--- a/presentation/company-2026/BRIDGE-Consult-presentation.pptx
+++ b/presentation/company-2026/BRIDGE-Consult-presentation.pptx
@@ -1,6 +1,6 @@
 
 <file path=ppt/presentation.xml><?xml version="1.0" encoding="utf-8"?>
-<p:presentation xmlns:a="http://schemas.openxmlformats.org/drawingml/2006/main" xmlns:r="http://schemas.openxmlformats.org/officeDocument/2006/relationships" xmlns:p="http://schemas.openxmlformats.org/presentationml/2006/main" saveSubsetFonts="1" autoCompressPictures="0">
+<p:presentation xmlns:a="http://schemas.openxmlformats.org/drawingml/2006/main" xmlns:r="http://schemas.openxmlformats.org/officeDocument/2006/relationships" xmlns:p="http://schemas.openxmlformats.org/presentationml/2006/main" embedTrueTypeFonts="1" autoCompressPictures="0">
   <p:sldMasterIdLst>
     <p:sldMasterId id="2147483648" r:id="rId1"/>
   </p:sldMasterIdLst>
@@ -21,6 +21,25 @@
   </p:notesMasterIdLst>
   <p:sldSz cx="12192000" cy="6858000"/>
   <p:notesSz cx="6858000" cy="12192000"/>
+  <p:embeddedFontLst>
+    <p:embeddedFont>
+      <p:font typeface="Bridge Manrope" pitchFamily="2" charset="0"/>
+      <p:regular r:id="rIdFont1"/>
+    </p:embeddedFont>
+    <p:embeddedFont>
+      <p:font typeface="Bridge Manrope SemiBold" pitchFamily="2" charset="0"/>
+      <p:regular r:id="rIdFont2"/>
+    </p:embeddedFont>
+    <p:embeddedFont>
+      <p:font typeface="Bridge Manrope ExtraBold" pitchFamily="2" charset="0"/>
+      <p:regular r:id="rIdFont3"/>
+    </p:embeddedFont>
+    <p:embeddedFont>
+      <p:font typeface="Bridge Playfair" pitchFamily="2" charset="0"/>
+      <p:regular r:id="rIdFont4"/>
+      <p:italic r:id="rIdFont5"/>
+    </p:embeddedFont>
+  </p:embeddedFontLst>
   <p:defaultTextStyle>
     <a:lvl1pPr marL="0" algn="l" defTabSz="914400" rtl="0" eaLnBrk="1" latinLnBrk="0" hangingPunct="1">
       <a:defRPr sz="1800" kern="1200">
@@ -1678,7 +1697,7 @@
       </p:grpSpPr>
       <p:pic>
         <p:nvPicPr>
-          <p:cNvPr id="2" name="bc1_1" descr="/tmp/claude-0/-home-user-bridge-astro/c468759c-dc39-5c73-8ddc-d9f14d631ba1/scratchpad/assets/cover.jpg">    </p:cNvPr>
+          <p:cNvPr id="2" name="bc1_1" descr="/home/user/bridge-astro/presentation/company-2026/assets/cover.jpg">    </p:cNvPr>
           <p:cNvPicPr>
             <a:picLocks noChangeAspect="1"/>
           </p:cNvPicPr>
@@ -1702,7 +1721,7 @@
       </p:pic>
       <p:pic>
         <p:nvPicPr>
-          <p:cNvPr id="3" name="bc1_2" descr="/tmp/claude-0/-home-user-bridge-astro/c468759c-dc39-5c73-8ddc-d9f14d631ba1/scratchpad/assets/logo-paper.png">    </p:cNvPr>
+          <p:cNvPr id="3" name="bc1_2" descr="/home/user/bridge-astro/presentation/company-2026/assets/logo-paper.png">    </p:cNvPr>
           <p:cNvPicPr>
             <a:picLocks noChangeAspect="1"/>
           </p:cNvPicPr>
@@ -1776,9 +1795,9 @@
                 <a:solidFill>
                   <a:srgbClr val="D8BD96"/>
                 </a:solidFill>
-                <a:latin typeface="Manrope SemiBold" pitchFamily="34" charset="0"/>
-                <a:ea typeface="Manrope SemiBold" pitchFamily="34" charset="-122"/>
-                <a:cs typeface="Manrope SemiBold" pitchFamily="34" charset="-120"/>
+                <a:latin typeface="Bridge Manrope SemiBold" pitchFamily="34" charset="0"/>
+                <a:ea typeface="Bridge Manrope SemiBold" pitchFamily="34" charset="-122"/>
+                <a:cs typeface="Bridge Manrope SemiBold" pitchFamily="34" charset="-120"/>
               </a:rPr>
               <a:t>КОНТРАКТНЫЙ ИНЖИНИРИНГ · FIDIC / EPC</a:t>
             </a:r>
@@ -1815,9 +1834,9 @@
                 <a:solidFill>
                   <a:srgbClr val="F4EFE6"/>
                 </a:solidFill>
-                <a:latin typeface="Playfair Display" pitchFamily="34" charset="0"/>
-                <a:ea typeface="Playfair Display" pitchFamily="34" charset="-122"/>
-                <a:cs typeface="Playfair Display" pitchFamily="34" charset="-120"/>
+                <a:latin typeface="Bridge Playfair" pitchFamily="34" charset="0"/>
+                <a:ea typeface="Bridge Playfair" pitchFamily="34" charset="-122"/>
+                <a:cs typeface="Bridge Playfair" pitchFamily="34" charset="-120"/>
               </a:rPr>
               <a:t>Контракты,</a:t>
             </a:r>
@@ -1854,9 +1873,9 @@
                 <a:solidFill>
                   <a:srgbClr val="F4EFE6"/>
                 </a:solidFill>
-                <a:latin typeface="Playfair Display" pitchFamily="34" charset="0"/>
-                <a:ea typeface="Playfair Display" pitchFamily="34" charset="-122"/>
-                <a:cs typeface="Playfair Display" pitchFamily="34" charset="-120"/>
+                <a:latin typeface="Bridge Playfair" pitchFamily="34" charset="0"/>
+                <a:ea typeface="Bridge Playfair" pitchFamily="34" charset="-122"/>
+                <a:cs typeface="Bridge Playfair" pitchFamily="34" charset="-120"/>
               </a:rPr>
               <a:t>которые работают</a:t>
             </a:r>
@@ -1893,9 +1912,9 @@
                 <a:solidFill>
                   <a:srgbClr val="D8BD96"/>
                 </a:solidFill>
-                <a:latin typeface="Playfair Display" pitchFamily="34" charset="0"/>
-                <a:ea typeface="Playfair Display" pitchFamily="34" charset="-122"/>
-                <a:cs typeface="Playfair Display" pitchFamily="34" charset="-120"/>
+                <a:latin typeface="Bridge Playfair" pitchFamily="34" charset="0"/>
+                <a:ea typeface="Bridge Playfair" pitchFamily="34" charset="-122"/>
+                <a:cs typeface="Bridge Playfair" pitchFamily="34" charset="-120"/>
               </a:rPr>
               <a:t>на проект.</a:t>
             </a:r>
@@ -1935,9 +1954,9 @@
                 <a:solidFill>
                   <a:srgbClr val="A39C91"/>
                 </a:solidFill>
-                <a:latin typeface="Manrope" pitchFamily="34" charset="0"/>
-                <a:ea typeface="Manrope" pitchFamily="34" charset="-122"/>
-                <a:cs typeface="Manrope" pitchFamily="34" charset="-120"/>
+                <a:latin typeface="Bridge Manrope" pitchFamily="34" charset="0"/>
+                <a:ea typeface="Bridge Manrope" pitchFamily="34" charset="-122"/>
+                <a:cs typeface="Bridge Manrope" pitchFamily="34" charset="-120"/>
               </a:rPr>
               <a:t>Независимый консалтинг по инфраструктурным контрактам, претензиям и разрешению споров в проектах, финансируемых международными финансовыми институтами.</a:t>
             </a:r>
@@ -1974,9 +1993,9 @@
                 <a:solidFill>
                   <a:srgbClr val="A39C91"/>
                 </a:solidFill>
-                <a:latin typeface="Manrope SemiBold" pitchFamily="34" charset="0"/>
-                <a:ea typeface="Manrope SemiBold" pitchFamily="34" charset="-122"/>
-                <a:cs typeface="Manrope SemiBold" pitchFamily="34" charset="-120"/>
+                <a:latin typeface="Bridge Manrope SemiBold" pitchFamily="34" charset="0"/>
+                <a:ea typeface="Bridge Manrope SemiBold" pitchFamily="34" charset="-122"/>
+                <a:cs typeface="Bridge Manrope SemiBold" pitchFamily="34" charset="-120"/>
               </a:rPr>
               <a:t>Презентация компании  ·  Ташкент  ·  2026</a:t>
             </a:r>
@@ -2013,9 +2032,9 @@
                 <a:solidFill>
                   <a:srgbClr val="A39C91"/>
                 </a:solidFill>
-                <a:latin typeface="Manrope SemiBold" pitchFamily="34" charset="0"/>
-                <a:ea typeface="Manrope SemiBold" pitchFamily="34" charset="-122"/>
-                <a:cs typeface="Manrope SemiBold" pitchFamily="34" charset="-120"/>
+                <a:latin typeface="Bridge Manrope SemiBold" pitchFamily="34" charset="0"/>
+                <a:ea typeface="Bridge Manrope SemiBold" pitchFamily="34" charset="-122"/>
+                <a:cs typeface="Bridge Manrope SemiBold" pitchFamily="34" charset="-120"/>
               </a:rPr>
               <a:t>41.2995° N  ·  69.2401° E</a:t>
             </a:r>
@@ -2655,7 +2674,7 @@
       </p:grpSpPr>
       <p:pic>
         <p:nvPicPr>
-          <p:cNvPr id="2" name="bc10_1" descr="/tmp/claude-0/-home-user-bridge-astro/c468759c-dc39-5c73-8ddc-d9f14d631ba1/scratchpad/assets/contact.jpg">    </p:cNvPr>
+          <p:cNvPr id="2" name="bc10_1" descr="/home/user/bridge-astro/presentation/company-2026/assets/contact.jpg">    </p:cNvPr>
           <p:cNvPicPr>
             <a:picLocks noChangeAspect="1"/>
           </p:cNvPicPr>
@@ -2679,7 +2698,7 @@
       </p:pic>
       <p:pic>
         <p:nvPicPr>
-          <p:cNvPr id="3" name="bc10_2" descr="/tmp/claude-0/-home-user-bridge-astro/c468759c-dc39-5c73-8ddc-d9f14d631ba1/scratchpad/assets/logo-paper.png">    </p:cNvPr>
+          <p:cNvPr id="3" name="bc10_2" descr="/home/user/bridge-astro/presentation/company-2026/assets/logo-paper.png">    </p:cNvPr>
           <p:cNvPicPr>
             <a:picLocks noChangeAspect="1"/>
           </p:cNvPicPr>
@@ -2730,9 +2749,9 @@
                 <a:solidFill>
                   <a:srgbClr val="F4EFE6"/>
                 </a:solidFill>
-                <a:latin typeface="Manrope SemiBold" pitchFamily="34" charset="0"/>
-                <a:ea typeface="Manrope SemiBold" pitchFamily="34" charset="-122"/>
-                <a:cs typeface="Manrope SemiBold" pitchFamily="34" charset="-120"/>
+                <a:latin typeface="Bridge Manrope SemiBold" pitchFamily="34" charset="0"/>
+                <a:ea typeface="Bridge Manrope SemiBold" pitchFamily="34" charset="-122"/>
+                <a:cs typeface="Bridge Manrope SemiBold" pitchFamily="34" charset="-120"/>
               </a:rPr>
               <a:t>10</a:t>
             </a:r>
@@ -2744,9 +2763,9 @@
                 <a:solidFill>
                   <a:srgbClr val="A39C91"/>
                 </a:solidFill>
-                <a:latin typeface="Manrope SemiBold" pitchFamily="34" charset="0"/>
-                <a:ea typeface="Manrope SemiBold" pitchFamily="34" charset="-122"/>
-                <a:cs typeface="Manrope SemiBold" pitchFamily="34" charset="-120"/>
+                <a:latin typeface="Bridge Manrope SemiBold" pitchFamily="34" charset="0"/>
+                <a:ea typeface="Bridge Manrope SemiBold" pitchFamily="34" charset="-122"/>
+                <a:cs typeface="Bridge Manrope SemiBold" pitchFamily="34" charset="-120"/>
               </a:rPr>
               <a:t> / 10</a:t>
             </a:r>
@@ -2806,9 +2825,9 @@
                 <a:solidFill>
                   <a:srgbClr val="D8BD96"/>
                 </a:solidFill>
-                <a:latin typeface="Manrope SemiBold" pitchFamily="34" charset="0"/>
-                <a:ea typeface="Manrope SemiBold" pitchFamily="34" charset="-122"/>
-                <a:cs typeface="Manrope SemiBold" pitchFamily="34" charset="-120"/>
+                <a:latin typeface="Bridge Manrope SemiBold" pitchFamily="34" charset="0"/>
+                <a:ea typeface="Bridge Manrope SemiBold" pitchFamily="34" charset="-122"/>
+                <a:cs typeface="Bridge Manrope SemiBold" pitchFamily="34" charset="-120"/>
               </a:rPr>
               <a:t>КОНТАКТЫ</a:t>
             </a:r>
@@ -2845,9 +2864,9 @@
                 <a:solidFill>
                   <a:srgbClr val="F4EFE6"/>
                 </a:solidFill>
-                <a:latin typeface="Playfair Display" pitchFamily="34" charset="0"/>
-                <a:ea typeface="Playfair Display" pitchFamily="34" charset="-122"/>
-                <a:cs typeface="Playfair Display" pitchFamily="34" charset="-120"/>
+                <a:latin typeface="Bridge Playfair" pitchFamily="34" charset="0"/>
+                <a:ea typeface="Bridge Playfair" pitchFamily="34" charset="-122"/>
+                <a:cs typeface="Bridge Playfair" pitchFamily="34" charset="-120"/>
               </a:rPr>
               <a:t>Начнём</a:t>
             </a:r>
@@ -2884,9 +2903,9 @@
                 <a:solidFill>
                   <a:srgbClr val="D8BD96"/>
                 </a:solidFill>
-                <a:latin typeface="Playfair Display" pitchFamily="34" charset="0"/>
-                <a:ea typeface="Playfair Display" pitchFamily="34" charset="-122"/>
-                <a:cs typeface="Playfair Display" pitchFamily="34" charset="-120"/>
+                <a:latin typeface="Bridge Playfair" pitchFamily="34" charset="0"/>
+                <a:ea typeface="Bridge Playfair" pitchFamily="34" charset="-122"/>
+                <a:cs typeface="Bridge Playfair" pitchFamily="34" charset="-120"/>
               </a:rPr>
               <a:t>с разговора.</a:t>
             </a:r>
@@ -2923,9 +2942,9 @@
                 <a:solidFill>
                   <a:srgbClr val="D8BD96"/>
                 </a:solidFill>
-                <a:latin typeface="Manrope SemiBold" pitchFamily="34" charset="0"/>
-                <a:ea typeface="Manrope SemiBold" pitchFamily="34" charset="-122"/>
-                <a:cs typeface="Manrope SemiBold" pitchFamily="34" charset="-120"/>
+                <a:latin typeface="Bridge Manrope SemiBold" pitchFamily="34" charset="0"/>
+                <a:ea typeface="Bridge Manrope SemiBold" pitchFamily="34" charset="-122"/>
+                <a:cs typeface="Bridge Manrope SemiBold" pitchFamily="34" charset="-120"/>
               </a:rPr>
               <a:t>ТЕЛЕФОН</a:t>
             </a:r>
@@ -2962,9 +2981,9 @@
                 <a:solidFill>
                   <a:srgbClr val="F4EFE6"/>
                 </a:solidFill>
-                <a:latin typeface="Manrope SemiBold" pitchFamily="34" charset="0"/>
-                <a:ea typeface="Manrope SemiBold" pitchFamily="34" charset="-122"/>
-                <a:cs typeface="Manrope SemiBold" pitchFamily="34" charset="-120"/>
+                <a:latin typeface="Bridge Manrope SemiBold" pitchFamily="34" charset="0"/>
+                <a:ea typeface="Bridge Manrope SemiBold" pitchFamily="34" charset="-122"/>
+                <a:cs typeface="Bridge Manrope SemiBold" pitchFamily="34" charset="-120"/>
                 <a:hlinkClick r:id="rId3" invalidUrl="" action="" tgtFrame="" tooltip="" history="1" highlightClick="0" endSnd="0">
                   <a:extLst>
                     <a:ext uri="{A12FA001-AC4F-418D-AE19-62706E023703}">
@@ -3008,9 +3027,9 @@
                 <a:solidFill>
                   <a:srgbClr val="D8BD96"/>
                 </a:solidFill>
-                <a:latin typeface="Manrope SemiBold" pitchFamily="34" charset="0"/>
-                <a:ea typeface="Manrope SemiBold" pitchFamily="34" charset="-122"/>
-                <a:cs typeface="Manrope SemiBold" pitchFamily="34" charset="-120"/>
+                <a:latin typeface="Bridge Manrope SemiBold" pitchFamily="34" charset="0"/>
+                <a:ea typeface="Bridge Manrope SemiBold" pitchFamily="34" charset="-122"/>
+                <a:cs typeface="Bridge Manrope SemiBold" pitchFamily="34" charset="-120"/>
               </a:rPr>
               <a:t>EMAIL</a:t>
             </a:r>
@@ -3047,9 +3066,9 @@
                 <a:solidFill>
                   <a:srgbClr val="F4EFE6"/>
                 </a:solidFill>
-                <a:latin typeface="Manrope SemiBold" pitchFamily="34" charset="0"/>
-                <a:ea typeface="Manrope SemiBold" pitchFamily="34" charset="-122"/>
-                <a:cs typeface="Manrope SemiBold" pitchFamily="34" charset="-120"/>
+                <a:latin typeface="Bridge Manrope SemiBold" pitchFamily="34" charset="0"/>
+                <a:ea typeface="Bridge Manrope SemiBold" pitchFamily="34" charset="-122"/>
+                <a:cs typeface="Bridge Manrope SemiBold" pitchFamily="34" charset="-120"/>
                 <a:hlinkClick r:id="rId4" invalidUrl="" action="" tgtFrame="" tooltip="" history="1" highlightClick="0" endSnd="0">
                   <a:extLst>
                     <a:ext uri="{A12FA001-AC4F-418D-AE19-62706E023703}">
@@ -3093,9 +3112,9 @@
                 <a:solidFill>
                   <a:srgbClr val="D8BD96"/>
                 </a:solidFill>
-                <a:latin typeface="Manrope SemiBold" pitchFamily="34" charset="0"/>
-                <a:ea typeface="Manrope SemiBold" pitchFamily="34" charset="-122"/>
-                <a:cs typeface="Manrope SemiBold" pitchFamily="34" charset="-120"/>
+                <a:latin typeface="Bridge Manrope SemiBold" pitchFamily="34" charset="0"/>
+                <a:ea typeface="Bridge Manrope SemiBold" pitchFamily="34" charset="-122"/>
+                <a:cs typeface="Bridge Manrope SemiBold" pitchFamily="34" charset="-120"/>
               </a:rPr>
               <a:t>САЙТ</a:t>
             </a:r>
@@ -3132,9 +3151,9 @@
                 <a:solidFill>
                   <a:srgbClr val="F4EFE6"/>
                 </a:solidFill>
-                <a:latin typeface="Manrope SemiBold" pitchFamily="34" charset="0"/>
-                <a:ea typeface="Manrope SemiBold" pitchFamily="34" charset="-122"/>
-                <a:cs typeface="Manrope SemiBold" pitchFamily="34" charset="-120"/>
+                <a:latin typeface="Bridge Manrope SemiBold" pitchFamily="34" charset="0"/>
+                <a:ea typeface="Bridge Manrope SemiBold" pitchFamily="34" charset="-122"/>
+                <a:cs typeface="Bridge Manrope SemiBold" pitchFamily="34" charset="-120"/>
                 <a:hlinkClick r:id="rId5" invalidUrl="" action="" tgtFrame="" tooltip="" history="1" highlightClick="0" endSnd="0">
                   <a:extLst>
                     <a:ext uri="{A12FA001-AC4F-418D-AE19-62706E023703}">
@@ -3178,9 +3197,9 @@
                 <a:solidFill>
                   <a:srgbClr val="D8BD96"/>
                 </a:solidFill>
-                <a:latin typeface="Manrope SemiBold" pitchFamily="34" charset="0"/>
-                <a:ea typeface="Manrope SemiBold" pitchFamily="34" charset="-122"/>
-                <a:cs typeface="Manrope SemiBold" pitchFamily="34" charset="-120"/>
+                <a:latin typeface="Bridge Manrope SemiBold" pitchFamily="34" charset="0"/>
+                <a:ea typeface="Bridge Manrope SemiBold" pitchFamily="34" charset="-122"/>
+                <a:cs typeface="Bridge Manrope SemiBold" pitchFamily="34" charset="-120"/>
               </a:rPr>
               <a:t>TELEGRAM</a:t>
             </a:r>
@@ -3217,9 +3236,9 @@
                 <a:solidFill>
                   <a:srgbClr val="F4EFE6"/>
                 </a:solidFill>
-                <a:latin typeface="Manrope SemiBold" pitchFamily="34" charset="0"/>
-                <a:ea typeface="Manrope SemiBold" pitchFamily="34" charset="-122"/>
-                <a:cs typeface="Manrope SemiBold" pitchFamily="34" charset="-120"/>
+                <a:latin typeface="Bridge Manrope SemiBold" pitchFamily="34" charset="0"/>
+                <a:ea typeface="Bridge Manrope SemiBold" pitchFamily="34" charset="-122"/>
+                <a:cs typeface="Bridge Manrope SemiBold" pitchFamily="34" charset="-120"/>
                 <a:hlinkClick r:id="rId6" invalidUrl="" action="" tgtFrame="" tooltip="" history="1" highlightClick="0" endSnd="0">
                   <a:extLst>
                     <a:ext uri="{A12FA001-AC4F-418D-AE19-62706E023703}">
@@ -3263,9 +3282,9 @@
                 <a:solidFill>
                   <a:srgbClr val="D8BD96"/>
                 </a:solidFill>
-                <a:latin typeface="Manrope SemiBold" pitchFamily="34" charset="0"/>
-                <a:ea typeface="Manrope SemiBold" pitchFamily="34" charset="-122"/>
-                <a:cs typeface="Manrope SemiBold" pitchFamily="34" charset="-120"/>
+                <a:latin typeface="Bridge Manrope SemiBold" pitchFamily="34" charset="0"/>
+                <a:ea typeface="Bridge Manrope SemiBold" pitchFamily="34" charset="-122"/>
+                <a:cs typeface="Bridge Manrope SemiBold" pitchFamily="34" charset="-120"/>
               </a:rPr>
               <a:t>АДРЕС</a:t>
             </a:r>
@@ -3302,9 +3321,9 @@
                 <a:solidFill>
                   <a:srgbClr val="F4EFE6"/>
                 </a:solidFill>
-                <a:latin typeface="Manrope" pitchFamily="34" charset="0"/>
-                <a:ea typeface="Manrope" pitchFamily="34" charset="-122"/>
-                <a:cs typeface="Manrope" pitchFamily="34" charset="-120"/>
+                <a:latin typeface="Bridge Manrope" pitchFamily="34" charset="0"/>
+                <a:ea typeface="Bridge Manrope" pitchFamily="34" charset="-122"/>
+                <a:cs typeface="Bridge Manrope" pitchFamily="34" charset="-120"/>
               </a:rPr>
               <a:t>100180, Ташкент, Юнусабадский район, ул. Ахмада Дониша, 12 квартал, 20А</a:t>
             </a:r>
@@ -3339,7 +3358,7 @@
       </p:sp>
       <p:pic>
         <p:nvPicPr>
-          <p:cNvPr id="20" name="bc10_19" descr="/tmp/claude-0/-home-user-bridge-astro/c468759c-dc39-5c73-8ddc-d9f14d631ba1/scratchpad/assets/qr.png">    </p:cNvPr>
+          <p:cNvPr id="20" name="bc10_19" descr="/home/user/bridge-astro/presentation/company-2026/assets/qr.png">    </p:cNvPr>
           <p:cNvPicPr>
             <a:picLocks noChangeAspect="1"/>
           </p:cNvPicPr>
@@ -3390,9 +3409,9 @@
                 <a:solidFill>
                   <a:srgbClr val="A39C91"/>
                 </a:solidFill>
-                <a:latin typeface="Manrope SemiBold" pitchFamily="34" charset="0"/>
-                <a:ea typeface="Manrope SemiBold" pitchFamily="34" charset="-122"/>
-                <a:cs typeface="Manrope SemiBold" pitchFamily="34" charset="-120"/>
+                <a:latin typeface="Bridge Manrope SemiBold" pitchFamily="34" charset="0"/>
+                <a:ea typeface="Bridge Manrope SemiBold" pitchFamily="34" charset="-122"/>
+                <a:cs typeface="Bridge Manrope SemiBold" pitchFamily="34" charset="-120"/>
               </a:rPr>
               <a:t>СКАНИРУЙТЕ — САЙТ КОМПАНИИ</a:t>
             </a:r>
@@ -3429,9 +3448,9 @@
                 <a:solidFill>
                   <a:srgbClr val="A39C91"/>
                 </a:solidFill>
-                <a:latin typeface="Manrope SemiBold" pitchFamily="34" charset="0"/>
-                <a:ea typeface="Manrope SemiBold" pitchFamily="34" charset="-122"/>
-                <a:cs typeface="Manrope SemiBold" pitchFamily="34" charset="-120"/>
+                <a:latin typeface="Bridge Manrope SemiBold" pitchFamily="34" charset="0"/>
+                <a:ea typeface="Bridge Manrope SemiBold" pitchFamily="34" charset="-122"/>
+                <a:cs typeface="Bridge Manrope SemiBold" pitchFamily="34" charset="-120"/>
               </a:rPr>
               <a:t>Строим связи — достигаем результата</a:t>
             </a:r>
@@ -4650,7 +4669,7 @@
       </p:grpSpPr>
       <p:pic>
         <p:nvPicPr>
-          <p:cNvPr id="2" name="bc2_1" descr="/tmp/claude-0/-home-user-bridge-astro/c468759c-dc39-5c73-8ddc-d9f14d631ba1/scratchpad/assets/about.jpg">    </p:cNvPr>
+          <p:cNvPr id="2" name="bc2_1" descr="/home/user/bridge-astro/presentation/company-2026/assets/about.jpg">    </p:cNvPr>
           <p:cNvPicPr>
             <a:picLocks noChangeAspect="1"/>
           </p:cNvPicPr>
@@ -4701,9 +4720,9 @@
                 <a:solidFill>
                   <a:srgbClr val="D8BD96"/>
                 </a:solidFill>
-                <a:latin typeface="Manrope SemiBold" pitchFamily="34" charset="0"/>
-                <a:ea typeface="Manrope SemiBold" pitchFamily="34" charset="-122"/>
-                <a:cs typeface="Manrope SemiBold" pitchFamily="34" charset="-120"/>
+                <a:latin typeface="Bridge Manrope SemiBold" pitchFamily="34" charset="0"/>
+                <a:ea typeface="Bridge Manrope SemiBold" pitchFamily="34" charset="-122"/>
+                <a:cs typeface="Bridge Manrope SemiBold" pitchFamily="34" charset="-120"/>
               </a:rPr>
               <a:t>С 2016 ГОДА</a:t>
             </a:r>
@@ -4740,9 +4759,9 @@
                 <a:solidFill>
                   <a:srgbClr val="F4EFE6"/>
                 </a:solidFill>
-                <a:latin typeface="Playfair Display" pitchFamily="34" charset="0"/>
-                <a:ea typeface="Playfair Display" pitchFamily="34" charset="-122"/>
-                <a:cs typeface="Playfair Display" pitchFamily="34" charset="-120"/>
+                <a:latin typeface="Bridge Playfair" pitchFamily="34" charset="0"/>
+                <a:ea typeface="Bridge Playfair" pitchFamily="34" charset="-122"/>
+                <a:cs typeface="Bridge Playfair" pitchFamily="34" charset="-120"/>
               </a:rPr>
               <a:t>2016</a:t>
             </a:r>
@@ -4779,9 +4798,9 @@
                 <a:solidFill>
                   <a:srgbClr val="F4EFE6"/>
                 </a:solidFill>
-                <a:latin typeface="Manrope" pitchFamily="34" charset="0"/>
-                <a:ea typeface="Manrope" pitchFamily="34" charset="-122"/>
-                <a:cs typeface="Manrope" pitchFamily="34" charset="-120"/>
+                <a:latin typeface="Bridge Manrope" pitchFamily="34" charset="0"/>
+                <a:ea typeface="Bridge Manrope" pitchFamily="34" charset="-122"/>
+                <a:cs typeface="Bridge Manrope" pitchFamily="34" charset="-120"/>
               </a:rPr>
               <a:t>Зарегистрирована в Республике Узбекистан</a:t>
             </a:r>
@@ -4818,9 +4837,9 @@
                 <a:solidFill>
                   <a:srgbClr val="1A1816"/>
                 </a:solidFill>
-                <a:latin typeface="Manrope SemiBold" pitchFamily="34" charset="0"/>
-                <a:ea typeface="Manrope SemiBold" pitchFamily="34" charset="-122"/>
-                <a:cs typeface="Manrope SemiBold" pitchFamily="34" charset="-120"/>
+                <a:latin typeface="Bridge Manrope SemiBold" pitchFamily="34" charset="0"/>
+                <a:ea typeface="Bridge Manrope SemiBold" pitchFamily="34" charset="-122"/>
+                <a:cs typeface="Bridge Manrope SemiBold" pitchFamily="34" charset="-120"/>
               </a:rPr>
               <a:t>02</a:t>
             </a:r>
@@ -4832,9 +4851,9 @@
                 <a:solidFill>
                   <a:srgbClr val="6E655A"/>
                 </a:solidFill>
-                <a:latin typeface="Manrope SemiBold" pitchFamily="34" charset="0"/>
-                <a:ea typeface="Manrope SemiBold" pitchFamily="34" charset="-122"/>
-                <a:cs typeface="Manrope SemiBold" pitchFamily="34" charset="-120"/>
+                <a:latin typeface="Bridge Manrope SemiBold" pitchFamily="34" charset="0"/>
+                <a:ea typeface="Bridge Manrope SemiBold" pitchFamily="34" charset="-122"/>
+                <a:cs typeface="Bridge Manrope SemiBold" pitchFamily="34" charset="-120"/>
               </a:rPr>
               <a:t> / 10</a:t>
             </a:r>
@@ -4871,9 +4890,9 @@
                 <a:solidFill>
                   <a:srgbClr val="6E655A"/>
                 </a:solidFill>
-                <a:latin typeface="Manrope SemiBold" pitchFamily="34" charset="0"/>
-                <a:ea typeface="Manrope SemiBold" pitchFamily="34" charset="-122"/>
-                <a:cs typeface="Manrope SemiBold" pitchFamily="34" charset="-120"/>
+                <a:latin typeface="Bridge Manrope SemiBold" pitchFamily="34" charset="0"/>
+                <a:ea typeface="Bridge Manrope SemiBold" pitchFamily="34" charset="-122"/>
+                <a:cs typeface="Bridge Manrope SemiBold" pitchFamily="34" charset="-120"/>
               </a:rPr>
               <a:t>bridgeconsult.uz</a:t>
             </a:r>
@@ -4910,9 +4929,9 @@
                 <a:solidFill>
                   <a:srgbClr val="6E655A"/>
                 </a:solidFill>
-                <a:latin typeface="Manrope SemiBold" pitchFamily="34" charset="0"/>
-                <a:ea typeface="Manrope SemiBold" pitchFamily="34" charset="-122"/>
-                <a:cs typeface="Manrope SemiBold" pitchFamily="34" charset="-120"/>
+                <a:latin typeface="Bridge Manrope SemiBold" pitchFamily="34" charset="0"/>
+                <a:ea typeface="Bridge Manrope SemiBold" pitchFamily="34" charset="-122"/>
+                <a:cs typeface="Bridge Manrope SemiBold" pitchFamily="34" charset="-120"/>
               </a:rPr>
               <a:t>41.2995° N  ·  69.2401° E</a:t>
             </a:r>
@@ -4972,9 +4991,9 @@
                 <a:solidFill>
                   <a:srgbClr val="9B7C56"/>
                 </a:solidFill>
-                <a:latin typeface="Manrope SemiBold" pitchFamily="34" charset="0"/>
-                <a:ea typeface="Manrope SemiBold" pitchFamily="34" charset="-122"/>
-                <a:cs typeface="Manrope SemiBold" pitchFamily="34" charset="-120"/>
+                <a:latin typeface="Bridge Manrope SemiBold" pitchFamily="34" charset="0"/>
+                <a:ea typeface="Bridge Manrope SemiBold" pitchFamily="34" charset="-122"/>
+                <a:cs typeface="Bridge Manrope SemiBold" pitchFamily="34" charset="-120"/>
               </a:rPr>
               <a:t>О КОМПАНИИ</a:t>
             </a:r>
@@ -5011,9 +5030,9 @@
                 <a:solidFill>
                   <a:srgbClr val="1A1816"/>
                 </a:solidFill>
-                <a:latin typeface="Playfair Display" pitchFamily="34" charset="0"/>
-                <a:ea typeface="Playfair Display" pitchFamily="34" charset="-122"/>
-                <a:cs typeface="Playfair Display" pitchFamily="34" charset="-120"/>
+                <a:latin typeface="Bridge Playfair" pitchFamily="34" charset="0"/>
+                <a:ea typeface="Bridge Playfair" pitchFamily="34" charset="-122"/>
+                <a:cs typeface="Bridge Playfair" pitchFamily="34" charset="-120"/>
               </a:rPr>
               <a:t>Независимая экспертиза</a:t>
             </a:r>
@@ -5050,9 +5069,9 @@
                 <a:solidFill>
                   <a:srgbClr val="9B7C56"/>
                 </a:solidFill>
-                <a:latin typeface="Playfair Display" pitchFamily="34" charset="0"/>
-                <a:ea typeface="Playfair Display" pitchFamily="34" charset="-122"/>
-                <a:cs typeface="Playfair Display" pitchFamily="34" charset="-120"/>
+                <a:latin typeface="Bridge Playfair" pitchFamily="34" charset="0"/>
+                <a:ea typeface="Bridge Playfair" pitchFamily="34" charset="-122"/>
+                <a:cs typeface="Bridge Playfair" pitchFamily="34" charset="-120"/>
               </a:rPr>
               <a:t>для инфраструктуры</a:t>
             </a:r>
@@ -5092,9 +5111,9 @@
                 <a:solidFill>
                   <a:srgbClr val="3A342D"/>
                 </a:solidFill>
-                <a:latin typeface="Manrope" pitchFamily="34" charset="0"/>
-                <a:ea typeface="Manrope" pitchFamily="34" charset="-122"/>
-                <a:cs typeface="Manrope" pitchFamily="34" charset="-120"/>
+                <a:latin typeface="Bridge Manrope" pitchFamily="34" charset="0"/>
+                <a:ea typeface="Bridge Manrope" pitchFamily="34" charset="-122"/>
+                <a:cs typeface="Bridge Manrope" pitchFamily="34" charset="-120"/>
               </a:rPr>
               <a:t>BRIDGE Consult — независимая консалтинговая компания, специализирующаяся на контрактном инжиниринге, администрировании строительных контрактов и разрешении споров в международных инфраструктурных проектах.</a:t>
             </a:r>
@@ -5134,9 +5153,9 @@
                 <a:solidFill>
                   <a:srgbClr val="6E655A"/>
                 </a:solidFill>
-                <a:latin typeface="Manrope" pitchFamily="34" charset="0"/>
-                <a:ea typeface="Manrope" pitchFamily="34" charset="-122"/>
-                <a:cs typeface="Manrope" pitchFamily="34" charset="-120"/>
+                <a:latin typeface="Bridge Manrope" pitchFamily="34" charset="0"/>
+                <a:ea typeface="Bridge Manrope" pitchFamily="34" charset="-122"/>
+                <a:cs typeface="Bridge Manrope" pitchFamily="34" charset="-120"/>
               </a:rPr>
               <a:t>Мы поддерживаем государственный сектор, международные финансовые институты, инвесторов и подрядчиков — включая проекты, финансируемые международными банками развития.</a:t>
             </a:r>
@@ -5196,9 +5215,9 @@
                 <a:solidFill>
                   <a:srgbClr val="9B7C56"/>
                 </a:solidFill>
-                <a:latin typeface="Manrope SemiBold" pitchFamily="34" charset="0"/>
-                <a:ea typeface="Manrope SemiBold" pitchFamily="34" charset="-122"/>
-                <a:cs typeface="Manrope SemiBold" pitchFamily="34" charset="-120"/>
+                <a:latin typeface="Bridge Manrope SemiBold" pitchFamily="34" charset="0"/>
+                <a:ea typeface="Bridge Manrope SemiBold" pitchFamily="34" charset="-122"/>
+                <a:cs typeface="Bridge Manrope SemiBold" pitchFamily="34" charset="-120"/>
               </a:rPr>
               <a:t>КЛИЕНТЫ</a:t>
             </a:r>
@@ -5238,9 +5257,9 @@
                 <a:solidFill>
                   <a:srgbClr val="1A1816"/>
                 </a:solidFill>
-                <a:latin typeface="Manrope SemiBold" pitchFamily="34" charset="0"/>
-                <a:ea typeface="Manrope SemiBold" pitchFamily="34" charset="-122"/>
-                <a:cs typeface="Manrope SemiBold" pitchFamily="34" charset="-120"/>
+                <a:latin typeface="Bridge Manrope SemiBold" pitchFamily="34" charset="0"/>
+                <a:ea typeface="Bridge Manrope SemiBold" pitchFamily="34" charset="-122"/>
+                <a:cs typeface="Bridge Manrope SemiBold" pitchFamily="34" charset="-120"/>
               </a:rPr>
               <a:t>Госсектор, МФИ, инвесторы, подрядчики</a:t>
             </a:r>
@@ -5277,9 +5296,9 @@
                 <a:solidFill>
                   <a:srgbClr val="9B7C56"/>
                 </a:solidFill>
-                <a:latin typeface="Manrope SemiBold" pitchFamily="34" charset="0"/>
-                <a:ea typeface="Manrope SemiBold" pitchFamily="34" charset="-122"/>
-                <a:cs typeface="Manrope SemiBold" pitchFamily="34" charset="-120"/>
+                <a:latin typeface="Bridge Manrope SemiBold" pitchFamily="34" charset="0"/>
+                <a:ea typeface="Bridge Manrope SemiBold" pitchFamily="34" charset="-122"/>
+                <a:cs typeface="Bridge Manrope SemiBold" pitchFamily="34" charset="-120"/>
               </a:rPr>
               <a:t>СТАНДАРТЫ</a:t>
             </a:r>
@@ -5319,9 +5338,9 @@
                 <a:solidFill>
                   <a:srgbClr val="1A1816"/>
                 </a:solidFill>
-                <a:latin typeface="Manrope SemiBold" pitchFamily="34" charset="0"/>
-                <a:ea typeface="Manrope SemiBold" pitchFamily="34" charset="-122"/>
-                <a:cs typeface="Manrope SemiBold" pitchFamily="34" charset="-120"/>
+                <a:latin typeface="Bridge Manrope SemiBold" pitchFamily="34" charset="0"/>
+                <a:ea typeface="Bridge Manrope SemiBold" pitchFamily="34" charset="-122"/>
+                <a:cs typeface="Bridge Manrope SemiBold" pitchFamily="34" charset="-120"/>
               </a:rPr>
               <a:t>FIDIC · EPC / EPC+F · MDB Harmonised</a:t>
             </a:r>
@@ -5358,9 +5377,9 @@
                 <a:solidFill>
                   <a:srgbClr val="9B7C56"/>
                 </a:solidFill>
-                <a:latin typeface="Manrope SemiBold" pitchFamily="34" charset="0"/>
-                <a:ea typeface="Manrope SemiBold" pitchFamily="34" charset="-122"/>
-                <a:cs typeface="Manrope SemiBold" pitchFamily="34" charset="-120"/>
+                <a:latin typeface="Bridge Manrope SemiBold" pitchFamily="34" charset="0"/>
+                <a:ea typeface="Bridge Manrope SemiBold" pitchFamily="34" charset="-122"/>
+                <a:cs typeface="Bridge Manrope SemiBold" pitchFamily="34" charset="-120"/>
               </a:rPr>
               <a:t>ГЕОГРАФИЯ</a:t>
             </a:r>
@@ -5400,9 +5419,9 @@
                 <a:solidFill>
                   <a:srgbClr val="1A1816"/>
                 </a:solidFill>
-                <a:latin typeface="Manrope SemiBold" pitchFamily="34" charset="0"/>
-                <a:ea typeface="Manrope SemiBold" pitchFamily="34" charset="-122"/>
-                <a:cs typeface="Manrope SemiBold" pitchFamily="34" charset="-120"/>
+                <a:latin typeface="Bridge Manrope SemiBold" pitchFamily="34" charset="0"/>
+                <a:ea typeface="Bridge Manrope SemiBold" pitchFamily="34" charset="-122"/>
+                <a:cs typeface="Bridge Manrope SemiBold" pitchFamily="34" charset="-120"/>
               </a:rPr>
               <a:t>Узбекистан и Центральная Азия</a:t>
             </a:r>
@@ -6541,7 +6560,7 @@
       </p:grpSpPr>
       <p:pic>
         <p:nvPicPr>
-          <p:cNvPr id="2" name="bc3_1" descr="/tmp/claude-0/-home-user-bridge-astro/c468759c-dc39-5c73-8ddc-d9f14d631ba1/scratchpad/assets/stats.jpg">    </p:cNvPr>
+          <p:cNvPr id="2" name="bc3_1" descr="/home/user/bridge-astro/presentation/company-2026/assets/stats.jpg">    </p:cNvPr>
           <p:cNvPicPr>
             <a:picLocks noChangeAspect="1"/>
           </p:cNvPicPr>
@@ -6592,9 +6611,9 @@
                 <a:solidFill>
                   <a:srgbClr val="F4EFE6"/>
                 </a:solidFill>
-                <a:latin typeface="Manrope SemiBold" pitchFamily="34" charset="0"/>
-                <a:ea typeface="Manrope SemiBold" pitchFamily="34" charset="-122"/>
-                <a:cs typeface="Manrope SemiBold" pitchFamily="34" charset="-120"/>
+                <a:latin typeface="Bridge Manrope SemiBold" pitchFamily="34" charset="0"/>
+                <a:ea typeface="Bridge Manrope SemiBold" pitchFamily="34" charset="-122"/>
+                <a:cs typeface="Bridge Manrope SemiBold" pitchFamily="34" charset="-120"/>
               </a:rPr>
               <a:t>03</a:t>
             </a:r>
@@ -6606,9 +6625,9 @@
                 <a:solidFill>
                   <a:srgbClr val="A39C91"/>
                 </a:solidFill>
-                <a:latin typeface="Manrope SemiBold" pitchFamily="34" charset="0"/>
-                <a:ea typeface="Manrope SemiBold" pitchFamily="34" charset="-122"/>
-                <a:cs typeface="Manrope SemiBold" pitchFamily="34" charset="-120"/>
+                <a:latin typeface="Bridge Manrope SemiBold" pitchFamily="34" charset="0"/>
+                <a:ea typeface="Bridge Manrope SemiBold" pitchFamily="34" charset="-122"/>
+                <a:cs typeface="Bridge Manrope SemiBold" pitchFamily="34" charset="-120"/>
               </a:rPr>
               <a:t> / 10</a:t>
             </a:r>
@@ -6645,9 +6664,9 @@
                 <a:solidFill>
                   <a:srgbClr val="A39C91"/>
                 </a:solidFill>
-                <a:latin typeface="Manrope SemiBold" pitchFamily="34" charset="0"/>
-                <a:ea typeface="Manrope SemiBold" pitchFamily="34" charset="-122"/>
-                <a:cs typeface="Manrope SemiBold" pitchFamily="34" charset="-120"/>
+                <a:latin typeface="Bridge Manrope SemiBold" pitchFamily="34" charset="0"/>
+                <a:ea typeface="Bridge Manrope SemiBold" pitchFamily="34" charset="-122"/>
+                <a:cs typeface="Bridge Manrope SemiBold" pitchFamily="34" charset="-120"/>
               </a:rPr>
               <a:t>bridgeconsult.uz</a:t>
             </a:r>
@@ -6684,9 +6703,9 @@
                 <a:solidFill>
                   <a:srgbClr val="A39C91"/>
                 </a:solidFill>
-                <a:latin typeface="Manrope SemiBold" pitchFamily="34" charset="0"/>
-                <a:ea typeface="Manrope SemiBold" pitchFamily="34" charset="-122"/>
-                <a:cs typeface="Manrope SemiBold" pitchFamily="34" charset="-120"/>
+                <a:latin typeface="Bridge Manrope SemiBold" pitchFamily="34" charset="0"/>
+                <a:ea typeface="Bridge Manrope SemiBold" pitchFamily="34" charset="-122"/>
+                <a:cs typeface="Bridge Manrope SemiBold" pitchFamily="34" charset="-120"/>
               </a:rPr>
               <a:t>41.2995° N  ·  69.2401° E</a:t>
             </a:r>
@@ -6746,9 +6765,9 @@
                 <a:solidFill>
                   <a:srgbClr val="D8BD96"/>
                 </a:solidFill>
-                <a:latin typeface="Manrope SemiBold" pitchFamily="34" charset="0"/>
-                <a:ea typeface="Manrope SemiBold" pitchFamily="34" charset="-122"/>
-                <a:cs typeface="Manrope SemiBold" pitchFamily="34" charset="-120"/>
+                <a:latin typeface="Bridge Manrope SemiBold" pitchFamily="34" charset="0"/>
+                <a:ea typeface="Bridge Manrope SemiBold" pitchFamily="34" charset="-122"/>
+                <a:cs typeface="Bridge Manrope SemiBold" pitchFamily="34" charset="-120"/>
               </a:rPr>
               <a:t>МАСШТАБ</a:t>
             </a:r>
@@ -6785,9 +6804,9 @@
                 <a:solidFill>
                   <a:srgbClr val="F4EFE6"/>
                 </a:solidFill>
-                <a:latin typeface="Playfair Display" pitchFamily="34" charset="0"/>
-                <a:ea typeface="Playfair Display" pitchFamily="34" charset="-122"/>
-                <a:cs typeface="Playfair Display" pitchFamily="34" charset="-120"/>
+                <a:latin typeface="Bridge Playfair" pitchFamily="34" charset="0"/>
+                <a:ea typeface="Bridge Playfair" pitchFamily="34" charset="-122"/>
+                <a:cs typeface="Bridge Playfair" pitchFamily="34" charset="-120"/>
               </a:rPr>
               <a:t>Опыт, подтверждённый</a:t>
             </a:r>
@@ -6824,9 +6843,9 @@
                 <a:solidFill>
                   <a:srgbClr val="D8BD96"/>
                 </a:solidFill>
-                <a:latin typeface="Playfair Display" pitchFamily="34" charset="0"/>
-                <a:ea typeface="Playfair Display" pitchFamily="34" charset="-122"/>
-                <a:cs typeface="Playfair Display" pitchFamily="34" charset="-120"/>
+                <a:latin typeface="Bridge Playfair" pitchFamily="34" charset="0"/>
+                <a:ea typeface="Bridge Playfair" pitchFamily="34" charset="-122"/>
+                <a:cs typeface="Bridge Playfair" pitchFamily="34" charset="-120"/>
               </a:rPr>
               <a:t>проектами</a:t>
             </a:r>
@@ -6866,9 +6885,9 @@
                 <a:solidFill>
                   <a:srgbClr val="A39C91"/>
                 </a:solidFill>
-                <a:latin typeface="Manrope" pitchFamily="34" charset="0"/>
-                <a:ea typeface="Manrope" pitchFamily="34" charset="-122"/>
-                <a:cs typeface="Manrope" pitchFamily="34" charset="-120"/>
+                <a:latin typeface="Bridge Manrope" pitchFamily="34" charset="0"/>
+                <a:ea typeface="Bridge Manrope" pitchFamily="34" charset="-122"/>
+                <a:cs typeface="Bridge Manrope" pitchFamily="34" charset="-120"/>
               </a:rPr>
               <a:t>За каждой цифрой — реальные контракты, претензии и решения на объектах национального масштаба.</a:t>
             </a:r>
@@ -6928,9 +6947,9 @@
                 <a:solidFill>
                   <a:srgbClr val="F4EFE6"/>
                 </a:solidFill>
-                <a:latin typeface="Playfair Display" pitchFamily="34" charset="0"/>
-                <a:ea typeface="Playfair Display" pitchFamily="34" charset="-122"/>
-                <a:cs typeface="Playfair Display" pitchFamily="34" charset="-120"/>
+                <a:latin typeface="Bridge Playfair" pitchFamily="34" charset="0"/>
+                <a:ea typeface="Bridge Playfair" pitchFamily="34" charset="-122"/>
+                <a:cs typeface="Bridge Playfair" pitchFamily="34" charset="-120"/>
               </a:rPr>
               <a:t>10</a:t>
             </a:r>
@@ -6942,9 +6961,9 @@
                 <a:solidFill>
                   <a:srgbClr val="D8BD96"/>
                 </a:solidFill>
-                <a:latin typeface="Playfair Display" pitchFamily="34" charset="0"/>
-                <a:ea typeface="Playfair Display" pitchFamily="34" charset="-122"/>
-                <a:cs typeface="Playfair Display" pitchFamily="34" charset="-120"/>
+                <a:latin typeface="Bridge Playfair" pitchFamily="34" charset="0"/>
+                <a:ea typeface="Bridge Playfair" pitchFamily="34" charset="-122"/>
+                <a:cs typeface="Bridge Playfair" pitchFamily="34" charset="-120"/>
               </a:rPr>
               <a:t>+</a:t>
             </a:r>
@@ -6981,9 +7000,9 @@
                 <a:solidFill>
                   <a:srgbClr val="F4EFE6"/>
                 </a:solidFill>
-                <a:latin typeface="Manrope SemiBold" pitchFamily="34" charset="0"/>
-                <a:ea typeface="Manrope SemiBold" pitchFamily="34" charset="-122"/>
-                <a:cs typeface="Manrope SemiBold" pitchFamily="34" charset="-120"/>
+                <a:latin typeface="Bridge Manrope SemiBold" pitchFamily="34" charset="0"/>
+                <a:ea typeface="Bridge Manrope SemiBold" pitchFamily="34" charset="-122"/>
+                <a:cs typeface="Bridge Manrope SemiBold" pitchFamily="34" charset="-120"/>
               </a:rPr>
               <a:t>лет на рынке</a:t>
             </a:r>
@@ -7023,9 +7042,9 @@
                 <a:solidFill>
                   <a:srgbClr val="A39C91"/>
                 </a:solidFill>
-                <a:latin typeface="Manrope" pitchFamily="34" charset="0"/>
-                <a:ea typeface="Manrope" pitchFamily="34" charset="-122"/>
-                <a:cs typeface="Manrope" pitchFamily="34" charset="-120"/>
+                <a:latin typeface="Bridge Manrope" pitchFamily="34" charset="0"/>
+                <a:ea typeface="Bridge Manrope" pitchFamily="34" charset="-122"/>
+                <a:cs typeface="Bridge Manrope" pitchFamily="34" charset="-120"/>
               </a:rPr>
               <a:t>Компания основана в 2016 году в Ташкенте</a:t>
             </a:r>
@@ -7085,9 +7104,9 @@
                 <a:solidFill>
                   <a:srgbClr val="F4EFE6"/>
                 </a:solidFill>
-                <a:latin typeface="Playfair Display" pitchFamily="34" charset="0"/>
-                <a:ea typeface="Playfair Display" pitchFamily="34" charset="-122"/>
-                <a:cs typeface="Playfair Display" pitchFamily="34" charset="-120"/>
+                <a:latin typeface="Bridge Playfair" pitchFamily="34" charset="0"/>
+                <a:ea typeface="Bridge Playfair" pitchFamily="34" charset="-122"/>
+                <a:cs typeface="Bridge Playfair" pitchFamily="34" charset="-120"/>
               </a:rPr>
               <a:t>20</a:t>
             </a:r>
@@ -7099,9 +7118,9 @@
                 <a:solidFill>
                   <a:srgbClr val="D8BD96"/>
                 </a:solidFill>
-                <a:latin typeface="Playfair Display" pitchFamily="34" charset="0"/>
-                <a:ea typeface="Playfair Display" pitchFamily="34" charset="-122"/>
-                <a:cs typeface="Playfair Display" pitchFamily="34" charset="-120"/>
+                <a:latin typeface="Bridge Playfair" pitchFamily="34" charset="0"/>
+                <a:ea typeface="Bridge Playfair" pitchFamily="34" charset="-122"/>
+                <a:cs typeface="Bridge Playfair" pitchFamily="34" charset="-120"/>
               </a:rPr>
               <a:t>+</a:t>
             </a:r>
@@ -7138,9 +7157,9 @@
                 <a:solidFill>
                   <a:srgbClr val="F4EFE6"/>
                 </a:solidFill>
-                <a:latin typeface="Manrope SemiBold" pitchFamily="34" charset="0"/>
-                <a:ea typeface="Manrope SemiBold" pitchFamily="34" charset="-122"/>
-                <a:cs typeface="Manrope SemiBold" pitchFamily="34" charset="-120"/>
+                <a:latin typeface="Bridge Manrope SemiBold" pitchFamily="34" charset="0"/>
+                <a:ea typeface="Bridge Manrope SemiBold" pitchFamily="34" charset="-122"/>
+                <a:cs typeface="Bridge Manrope SemiBold" pitchFamily="34" charset="-120"/>
               </a:rPr>
               <a:t>крупных проектов</a:t>
             </a:r>
@@ -7180,9 +7199,9 @@
                 <a:solidFill>
                   <a:srgbClr val="A39C91"/>
                 </a:solidFill>
-                <a:latin typeface="Manrope" pitchFamily="34" charset="0"/>
-                <a:ea typeface="Manrope" pitchFamily="34" charset="-122"/>
-                <a:cs typeface="Manrope" pitchFamily="34" charset="-120"/>
+                <a:latin typeface="Bridge Manrope" pitchFamily="34" charset="0"/>
+                <a:ea typeface="Bridge Manrope" pitchFamily="34" charset="-122"/>
+                <a:cs typeface="Bridge Manrope" pitchFamily="34" charset="-120"/>
               </a:rPr>
               <a:t>Дороги, водоснабжение, энергетика, городская среда</a:t>
             </a:r>
@@ -7242,9 +7261,9 @@
                 <a:solidFill>
                   <a:srgbClr val="F4EFE6"/>
                 </a:solidFill>
-                <a:latin typeface="Playfair Display" pitchFamily="34" charset="0"/>
-                <a:ea typeface="Playfair Display" pitchFamily="34" charset="-122"/>
-                <a:cs typeface="Playfair Display" pitchFamily="34" charset="-120"/>
+                <a:latin typeface="Bridge Playfair" pitchFamily="34" charset="0"/>
+                <a:ea typeface="Bridge Playfair" pitchFamily="34" charset="-122"/>
+                <a:cs typeface="Bridge Playfair" pitchFamily="34" charset="-120"/>
               </a:rPr>
               <a:t>27</a:t>
             </a:r>
@@ -7284,9 +7303,9 @@
                 <a:solidFill>
                   <a:srgbClr val="F4EFE6"/>
                 </a:solidFill>
-                <a:latin typeface="Manrope SemiBold" pitchFamily="34" charset="0"/>
-                <a:ea typeface="Manrope SemiBold" pitchFamily="34" charset="-122"/>
-                <a:cs typeface="Manrope SemiBold" pitchFamily="34" charset="-120"/>
+                <a:latin typeface="Bridge Manrope SemiBold" pitchFamily="34" charset="0"/>
+                <a:ea typeface="Bridge Manrope SemiBold" pitchFamily="34" charset="-122"/>
+                <a:cs typeface="Bridge Manrope SemiBold" pitchFamily="34" charset="-120"/>
               </a:rPr>
               <a:t>лет опыта основателя</a:t>
             </a:r>
@@ -7326,9 +7345,9 @@
                 <a:solidFill>
                   <a:srgbClr val="A39C91"/>
                 </a:solidFill>
-                <a:latin typeface="Manrope" pitchFamily="34" charset="0"/>
-                <a:ea typeface="Manrope" pitchFamily="34" charset="-122"/>
-                <a:cs typeface="Manrope" pitchFamily="34" charset="-120"/>
+                <a:latin typeface="Bridge Manrope" pitchFamily="34" charset="0"/>
+                <a:ea typeface="Bridge Manrope" pitchFamily="34" charset="-122"/>
+                <a:cs typeface="Bridge Manrope" pitchFamily="34" charset="-120"/>
               </a:rPr>
               <a:t>Из них более 15 лет — контракты FIDIC и проекты МФИ</a:t>
             </a:r>
@@ -7388,9 +7407,9 @@
                 <a:solidFill>
                   <a:srgbClr val="F4EFE6"/>
                 </a:solidFill>
-                <a:latin typeface="Playfair Display" pitchFamily="34" charset="0"/>
-                <a:ea typeface="Playfair Display" pitchFamily="34" charset="-122"/>
-                <a:cs typeface="Playfair Display" pitchFamily="34" charset="-120"/>
+                <a:latin typeface="Bridge Playfair" pitchFamily="34" charset="0"/>
+                <a:ea typeface="Bridge Playfair" pitchFamily="34" charset="-122"/>
+                <a:cs typeface="Bridge Playfair" pitchFamily="34" charset="-120"/>
               </a:rPr>
               <a:t>100</a:t>
             </a:r>
@@ -7402,9 +7421,9 @@
                 <a:solidFill>
                   <a:srgbClr val="D8BD96"/>
                 </a:solidFill>
-                <a:latin typeface="Playfair Display" pitchFamily="34" charset="0"/>
-                <a:ea typeface="Playfair Display" pitchFamily="34" charset="-122"/>
-                <a:cs typeface="Playfair Display" pitchFamily="34" charset="-120"/>
+                <a:latin typeface="Bridge Playfair" pitchFamily="34" charset="0"/>
+                <a:ea typeface="Bridge Playfair" pitchFamily="34" charset="-122"/>
+                <a:cs typeface="Bridge Playfair" pitchFamily="34" charset="-120"/>
               </a:rPr>
               <a:t>%</a:t>
             </a:r>
@@ -7441,9 +7460,9 @@
                 <a:solidFill>
                   <a:srgbClr val="F4EFE6"/>
                 </a:solidFill>
-                <a:latin typeface="Manrope SemiBold" pitchFamily="34" charset="0"/>
-                <a:ea typeface="Manrope SemiBold" pitchFamily="34" charset="-122"/>
-                <a:cs typeface="Manrope SemiBold" pitchFamily="34" charset="-120"/>
+                <a:latin typeface="Bridge Manrope SemiBold" pitchFamily="34" charset="0"/>
+                <a:ea typeface="Bridge Manrope SemiBold" pitchFamily="34" charset="-122"/>
+                <a:cs typeface="Bridge Manrope SemiBold" pitchFamily="34" charset="-120"/>
               </a:rPr>
               <a:t>на стороне клиента</a:t>
             </a:r>
@@ -7483,9 +7502,9 @@
                 <a:solidFill>
                   <a:srgbClr val="A39C91"/>
                 </a:solidFill>
-                <a:latin typeface="Manrope" pitchFamily="34" charset="0"/>
-                <a:ea typeface="Manrope" pitchFamily="34" charset="-122"/>
-                <a:cs typeface="Manrope" pitchFamily="34" charset="-120"/>
+                <a:latin typeface="Bridge Manrope" pitchFamily="34" charset="0"/>
+                <a:ea typeface="Bridge Manrope" pitchFamily="34" charset="-122"/>
+                <a:cs typeface="Bridge Manrope" pitchFamily="34" charset="-120"/>
               </a:rPr>
               <a:t>От сметного аудита до арбитража</a:t>
             </a:r>
@@ -8831,9 +8850,9 @@
                 <a:solidFill>
                   <a:srgbClr val="1A1816"/>
                 </a:solidFill>
-                <a:latin typeface="Manrope SemiBold" pitchFamily="34" charset="0"/>
-                <a:ea typeface="Manrope SemiBold" pitchFamily="34" charset="-122"/>
-                <a:cs typeface="Manrope SemiBold" pitchFamily="34" charset="-120"/>
+                <a:latin typeface="Bridge Manrope SemiBold" pitchFamily="34" charset="0"/>
+                <a:ea typeface="Bridge Manrope SemiBold" pitchFamily="34" charset="-122"/>
+                <a:cs typeface="Bridge Manrope SemiBold" pitchFamily="34" charset="-120"/>
               </a:rPr>
               <a:t>04</a:t>
             </a:r>
@@ -8845,9 +8864,9 @@
                 <a:solidFill>
                   <a:srgbClr val="6E655A"/>
                 </a:solidFill>
-                <a:latin typeface="Manrope SemiBold" pitchFamily="34" charset="0"/>
-                <a:ea typeface="Manrope SemiBold" pitchFamily="34" charset="-122"/>
-                <a:cs typeface="Manrope SemiBold" pitchFamily="34" charset="-120"/>
+                <a:latin typeface="Bridge Manrope SemiBold" pitchFamily="34" charset="0"/>
+                <a:ea typeface="Bridge Manrope SemiBold" pitchFamily="34" charset="-122"/>
+                <a:cs typeface="Bridge Manrope SemiBold" pitchFamily="34" charset="-120"/>
               </a:rPr>
               <a:t> / 10</a:t>
             </a:r>
@@ -8884,9 +8903,9 @@
                 <a:solidFill>
                   <a:srgbClr val="6E655A"/>
                 </a:solidFill>
-                <a:latin typeface="Manrope SemiBold" pitchFamily="34" charset="0"/>
-                <a:ea typeface="Manrope SemiBold" pitchFamily="34" charset="-122"/>
-                <a:cs typeface="Manrope SemiBold" pitchFamily="34" charset="-120"/>
+                <a:latin typeface="Bridge Manrope SemiBold" pitchFamily="34" charset="0"/>
+                <a:ea typeface="Bridge Manrope SemiBold" pitchFamily="34" charset="-122"/>
+                <a:cs typeface="Bridge Manrope SemiBold" pitchFamily="34" charset="-120"/>
               </a:rPr>
               <a:t>bridgeconsult.uz</a:t>
             </a:r>
@@ -8923,9 +8942,9 @@
                 <a:solidFill>
                   <a:srgbClr val="6E655A"/>
                 </a:solidFill>
-                <a:latin typeface="Manrope SemiBold" pitchFamily="34" charset="0"/>
-                <a:ea typeface="Manrope SemiBold" pitchFamily="34" charset="-122"/>
-                <a:cs typeface="Manrope SemiBold" pitchFamily="34" charset="-120"/>
+                <a:latin typeface="Bridge Manrope SemiBold" pitchFamily="34" charset="0"/>
+                <a:ea typeface="Bridge Manrope SemiBold" pitchFamily="34" charset="-122"/>
+                <a:cs typeface="Bridge Manrope SemiBold" pitchFamily="34" charset="-120"/>
               </a:rPr>
               <a:t>41.2995° N  ·  69.2401° E</a:t>
             </a:r>
@@ -8985,9 +9004,9 @@
                 <a:solidFill>
                   <a:srgbClr val="9B7C56"/>
                 </a:solidFill>
-                <a:latin typeface="Manrope SemiBold" pitchFamily="34" charset="0"/>
-                <a:ea typeface="Manrope SemiBold" pitchFamily="34" charset="-122"/>
-                <a:cs typeface="Manrope SemiBold" pitchFamily="34" charset="-120"/>
+                <a:latin typeface="Bridge Manrope SemiBold" pitchFamily="34" charset="0"/>
+                <a:ea typeface="Bridge Manrope SemiBold" pitchFamily="34" charset="-122"/>
+                <a:cs typeface="Bridge Manrope SemiBold" pitchFamily="34" charset="-120"/>
               </a:rPr>
               <a:t>УСЛУГИ</a:t>
             </a:r>
@@ -9024,9 +9043,9 @@
                 <a:solidFill>
                   <a:srgbClr val="1A1816"/>
                 </a:solidFill>
-                <a:latin typeface="Playfair Display" pitchFamily="34" charset="0"/>
-                <a:ea typeface="Playfair Display" pitchFamily="34" charset="-122"/>
-                <a:cs typeface="Playfair Display" pitchFamily="34" charset="-120"/>
+                <a:latin typeface="Bridge Playfair" pitchFamily="34" charset="0"/>
+                <a:ea typeface="Bridge Playfair" pitchFamily="34" charset="-122"/>
+                <a:cs typeface="Bridge Playfair" pitchFamily="34" charset="-120"/>
               </a:rPr>
               <a:t>Четыре</a:t>
             </a:r>
@@ -9063,9 +9082,9 @@
                 <a:solidFill>
                   <a:srgbClr val="9B7C56"/>
                 </a:solidFill>
-                <a:latin typeface="Playfair Display" pitchFamily="34" charset="0"/>
-                <a:ea typeface="Playfair Display" pitchFamily="34" charset="-122"/>
-                <a:cs typeface="Playfair Display" pitchFamily="34" charset="-120"/>
+                <a:latin typeface="Bridge Playfair" pitchFamily="34" charset="0"/>
+                <a:ea typeface="Bridge Playfair" pitchFamily="34" charset="-122"/>
+                <a:cs typeface="Bridge Playfair" pitchFamily="34" charset="-120"/>
               </a:rPr>
               <a:t>направления</a:t>
             </a:r>
@@ -9105,9 +9124,9 @@
                 <a:solidFill>
                   <a:srgbClr val="6E655A"/>
                 </a:solidFill>
-                <a:latin typeface="Manrope" pitchFamily="34" charset="0"/>
-                <a:ea typeface="Manrope" pitchFamily="34" charset="-122"/>
-                <a:cs typeface="Manrope" pitchFamily="34" charset="-120"/>
+                <a:latin typeface="Bridge Manrope" pitchFamily="34" charset="0"/>
+                <a:ea typeface="Bridge Manrope" pitchFamily="34" charset="-122"/>
+                <a:cs typeface="Bridge Manrope" pitchFamily="34" charset="-120"/>
               </a:rPr>
               <a:t>Полный цикл сопровождения инфраструктурного контракта — от тендерной стратегии до защиты позиции в арбитраже.</a:t>
             </a:r>
@@ -9117,7 +9136,7 @@
       </p:sp>
       <p:pic>
         <p:nvPicPr>
-          <p:cNvPr id="10" name="bc4_9" descr="/tmp/claude-0/-home-user-bridge-astro/c468759c-dc39-5c73-8ddc-d9f14d631ba1/scratchpad/assets/svc.jpg">    </p:cNvPr>
+          <p:cNvPr id="10" name="bc4_9" descr="/home/user/bridge-astro/presentation/company-2026/assets/svc.jpg">    </p:cNvPr>
           <p:cNvPicPr>
             <a:picLocks noChangeAspect="1"/>
           </p:cNvPicPr>
@@ -9195,9 +9214,9 @@
                 <a:solidFill>
                   <a:srgbClr val="9B7C56"/>
                 </a:solidFill>
-                <a:latin typeface="Playfair Display" pitchFamily="34" charset="0"/>
-                <a:ea typeface="Playfair Display" pitchFamily="34" charset="-122"/>
-                <a:cs typeface="Playfair Display" pitchFamily="34" charset="-120"/>
+                <a:latin typeface="Bridge Playfair" pitchFamily="34" charset="0"/>
+                <a:ea typeface="Bridge Playfair" pitchFamily="34" charset="-122"/>
+                <a:cs typeface="Bridge Playfair" pitchFamily="34" charset="-120"/>
               </a:rPr>
               <a:t>01</a:t>
             </a:r>
@@ -9234,9 +9253,9 @@
                 <a:solidFill>
                   <a:srgbClr val="8A7B66"/>
                 </a:solidFill>
-                <a:latin typeface="Manrope SemiBold" pitchFamily="34" charset="0"/>
-                <a:ea typeface="Manrope SemiBold" pitchFamily="34" charset="-122"/>
-                <a:cs typeface="Manrope SemiBold" pitchFamily="34" charset="-120"/>
+                <a:latin typeface="Bridge Manrope SemiBold" pitchFamily="34" charset="0"/>
+                <a:ea typeface="Bridge Manrope SemiBold" pitchFamily="34" charset="-122"/>
+                <a:cs typeface="Bridge Manrope SemiBold" pitchFamily="34" charset="-120"/>
               </a:rPr>
               <a:t>FIDIC / EPC</a:t>
             </a:r>
@@ -9273,9 +9292,9 @@
                 <a:solidFill>
                   <a:srgbClr val="1A1816"/>
                 </a:solidFill>
-                <a:latin typeface="Manrope ExtraBold" pitchFamily="34" charset="0"/>
-                <a:ea typeface="Manrope ExtraBold" pitchFamily="34" charset="-122"/>
-                <a:cs typeface="Manrope ExtraBold" pitchFamily="34" charset="-120"/>
+                <a:latin typeface="Bridge Manrope ExtraBold" pitchFamily="34" charset="0"/>
+                <a:ea typeface="Bridge Manrope ExtraBold" pitchFamily="34" charset="-122"/>
+                <a:cs typeface="Bridge Manrope ExtraBold" pitchFamily="34" charset="-120"/>
               </a:rPr>
               <a:t>Контрактный инжиниринг</a:t>
             </a:r>
@@ -9319,9 +9338,9 @@
                 <a:solidFill>
                   <a:srgbClr val="3A342D"/>
                 </a:solidFill>
-                <a:latin typeface="Manrope" pitchFamily="34" charset="0"/>
-                <a:ea typeface="Manrope" pitchFamily="34" charset="-122"/>
-                <a:cs typeface="Manrope" pitchFamily="34" charset="-120"/>
+                <a:latin typeface="Bridge Manrope" pitchFamily="34" charset="0"/>
+                <a:ea typeface="Bridge Manrope" pitchFamily="34" charset="-122"/>
+                <a:cs typeface="Bridge Manrope" pitchFamily="34" charset="-120"/>
               </a:rPr>
               <a:t>Тендерная документация и тендерный инжиниринг</a:t>
             </a:r>
@@ -9343,9 +9362,9 @@
                 <a:solidFill>
                   <a:srgbClr val="3A342D"/>
                 </a:solidFill>
-                <a:latin typeface="Manrope" pitchFamily="34" charset="0"/>
-                <a:ea typeface="Manrope" pitchFamily="34" charset="-122"/>
-                <a:cs typeface="Manrope" pitchFamily="34" charset="-120"/>
+                <a:latin typeface="Bridge Manrope" pitchFamily="34" charset="0"/>
+                <a:ea typeface="Bridge Manrope" pitchFamily="34" charset="-122"/>
+                <a:cs typeface="Bridge Manrope" pitchFamily="34" charset="-120"/>
               </a:rPr>
               <a:t>Разработка и адаптация контрактов FIDIC и EPC</a:t>
             </a:r>
@@ -9367,9 +9386,9 @@
                 <a:solidFill>
                   <a:srgbClr val="3A342D"/>
                 </a:solidFill>
-                <a:latin typeface="Manrope" pitchFamily="34" charset="0"/>
-                <a:ea typeface="Manrope" pitchFamily="34" charset="-122"/>
-                <a:cs typeface="Manrope" pitchFamily="34" charset="-120"/>
+                <a:latin typeface="Bridge Manrope" pitchFamily="34" charset="0"/>
+                <a:ea typeface="Bridge Manrope" pitchFamily="34" charset="-122"/>
+                <a:cs typeface="Bridge Manrope" pitchFamily="34" charset="-120"/>
               </a:rPr>
               <a:t>Аудит контрактной стратегии</a:t>
             </a:r>
@@ -9433,9 +9452,9 @@
                 <a:solidFill>
                   <a:srgbClr val="9B7C56"/>
                 </a:solidFill>
-                <a:latin typeface="Playfair Display" pitchFamily="34" charset="0"/>
-                <a:ea typeface="Playfair Display" pitchFamily="34" charset="-122"/>
-                <a:cs typeface="Playfair Display" pitchFamily="34" charset="-120"/>
+                <a:latin typeface="Bridge Playfair" pitchFamily="34" charset="0"/>
+                <a:ea typeface="Bridge Playfair" pitchFamily="34" charset="-122"/>
+                <a:cs typeface="Bridge Playfair" pitchFamily="34" charset="-120"/>
               </a:rPr>
               <a:t>02</a:t>
             </a:r>
@@ -9472,9 +9491,9 @@
                 <a:solidFill>
                   <a:srgbClr val="8A7B66"/>
                 </a:solidFill>
-                <a:latin typeface="Manrope SemiBold" pitchFamily="34" charset="0"/>
-                <a:ea typeface="Manrope SemiBold" pitchFamily="34" charset="-122"/>
-                <a:cs typeface="Manrope SemiBold" pitchFamily="34" charset="-120"/>
+                <a:latin typeface="Bridge Manrope SemiBold" pitchFamily="34" charset="0"/>
+                <a:ea typeface="Bridge Manrope SemiBold" pitchFamily="34" charset="-122"/>
+                <a:cs typeface="Bridge Manrope SemiBold" pitchFamily="34" charset="-120"/>
               </a:rPr>
               <a:t>CLAIMS · RISKS</a:t>
             </a:r>
@@ -9511,9 +9530,9 @@
                 <a:solidFill>
                   <a:srgbClr val="1A1816"/>
                 </a:solidFill>
-                <a:latin typeface="Manrope ExtraBold" pitchFamily="34" charset="0"/>
-                <a:ea typeface="Manrope ExtraBold" pitchFamily="34" charset="-122"/>
-                <a:cs typeface="Manrope ExtraBold" pitchFamily="34" charset="-120"/>
+                <a:latin typeface="Bridge Manrope ExtraBold" pitchFamily="34" charset="0"/>
+                <a:ea typeface="Bridge Manrope ExtraBold" pitchFamily="34" charset="-122"/>
+                <a:cs typeface="Bridge Manrope ExtraBold" pitchFamily="34" charset="-120"/>
               </a:rPr>
               <a:t>Управление контрактами</a:t>
             </a:r>
@@ -9557,9 +9576,9 @@
                 <a:solidFill>
                   <a:srgbClr val="3A342D"/>
                 </a:solidFill>
-                <a:latin typeface="Manrope" pitchFamily="34" charset="0"/>
-                <a:ea typeface="Manrope" pitchFamily="34" charset="-122"/>
-                <a:cs typeface="Manrope" pitchFamily="34" charset="-120"/>
+                <a:latin typeface="Bridge Manrope" pitchFamily="34" charset="0"/>
+                <a:ea typeface="Bridge Manrope" pitchFamily="34" charset="-122"/>
+                <a:cs typeface="Bridge Manrope" pitchFamily="34" charset="-120"/>
               </a:rPr>
               <a:t>Управление претензиями (claims)</a:t>
             </a:r>
@@ -9581,9 +9600,9 @@
                 <a:solidFill>
                   <a:srgbClr val="3A342D"/>
                 </a:solidFill>
-                <a:latin typeface="Manrope" pitchFamily="34" charset="0"/>
-                <a:ea typeface="Manrope" pitchFamily="34" charset="-122"/>
-                <a:cs typeface="Manrope" pitchFamily="34" charset="-120"/>
+                <a:latin typeface="Bridge Manrope" pitchFamily="34" charset="0"/>
+                <a:ea typeface="Bridge Manrope" pitchFamily="34" charset="-122"/>
+                <a:cs typeface="Bridge Manrope" pitchFamily="34" charset="-120"/>
               </a:rPr>
               <a:t>Управление рисками и изменениями</a:t>
             </a:r>
@@ -9605,9 +9624,9 @@
                 <a:solidFill>
                   <a:srgbClr val="3A342D"/>
                 </a:solidFill>
-                <a:latin typeface="Manrope" pitchFamily="34" charset="0"/>
-                <a:ea typeface="Manrope" pitchFamily="34" charset="-122"/>
-                <a:cs typeface="Manrope" pitchFamily="34" charset="-120"/>
+                <a:latin typeface="Bridge Manrope" pitchFamily="34" charset="0"/>
+                <a:ea typeface="Bridge Manrope" pitchFamily="34" charset="-122"/>
+                <a:cs typeface="Bridge Manrope" pitchFamily="34" charset="-120"/>
               </a:rPr>
               <a:t>Контроль бюджета, закупок и качества</a:t>
             </a:r>
@@ -9671,9 +9690,9 @@
                 <a:solidFill>
                   <a:srgbClr val="9B7C56"/>
                 </a:solidFill>
-                <a:latin typeface="Playfair Display" pitchFamily="34" charset="0"/>
-                <a:ea typeface="Playfair Display" pitchFamily="34" charset="-122"/>
-                <a:cs typeface="Playfair Display" pitchFamily="34" charset="-120"/>
+                <a:latin typeface="Bridge Playfair" pitchFamily="34" charset="0"/>
+                <a:ea typeface="Bridge Playfair" pitchFamily="34" charset="-122"/>
+                <a:cs typeface="Bridge Playfair" pitchFamily="34" charset="-120"/>
               </a:rPr>
               <a:t>03</a:t>
             </a:r>
@@ -9710,9 +9729,9 @@
                 <a:solidFill>
                   <a:srgbClr val="8A7B66"/>
                 </a:solidFill>
-                <a:latin typeface="Manrope SemiBold" pitchFamily="34" charset="0"/>
-                <a:ea typeface="Manrope SemiBold" pitchFamily="34" charset="-122"/>
-                <a:cs typeface="Manrope SemiBold" pitchFamily="34" charset="-120"/>
+                <a:latin typeface="Bridge Manrope SemiBold" pitchFamily="34" charset="0"/>
+                <a:ea typeface="Bridge Manrope SemiBold" pitchFamily="34" charset="-122"/>
+                <a:cs typeface="Bridge Manrope SemiBold" pitchFamily="34" charset="-120"/>
               </a:rPr>
               <a:t>DAAB · ADR</a:t>
             </a:r>
@@ -9749,9 +9768,9 @@
                 <a:solidFill>
                   <a:srgbClr val="1A1816"/>
                 </a:solidFill>
-                <a:latin typeface="Manrope ExtraBold" pitchFamily="34" charset="0"/>
-                <a:ea typeface="Manrope ExtraBold" pitchFamily="34" charset="-122"/>
-                <a:cs typeface="Manrope ExtraBold" pitchFamily="34" charset="-120"/>
+                <a:latin typeface="Bridge Manrope ExtraBold" pitchFamily="34" charset="0"/>
+                <a:ea typeface="Bridge Manrope ExtraBold" pitchFamily="34" charset="-122"/>
+                <a:cs typeface="Bridge Manrope ExtraBold" pitchFamily="34" charset="-120"/>
               </a:rPr>
               <a:t>Споры и арбитраж</a:t>
             </a:r>
@@ -9795,9 +9814,9 @@
                 <a:solidFill>
                   <a:srgbClr val="3A342D"/>
                 </a:solidFill>
-                <a:latin typeface="Manrope" pitchFamily="34" charset="0"/>
-                <a:ea typeface="Manrope" pitchFamily="34" charset="-122"/>
-                <a:cs typeface="Manrope" pitchFamily="34" charset="-120"/>
+                <a:latin typeface="Bridge Manrope" pitchFamily="34" charset="0"/>
+                <a:ea typeface="Bridge Manrope" pitchFamily="34" charset="-122"/>
+                <a:cs typeface="Bridge Manrope" pitchFamily="34" charset="-120"/>
               </a:rPr>
               <a:t>Советы по урегулированию споров DAAB / DAB</a:t>
             </a:r>
@@ -9819,9 +9838,9 @@
                 <a:solidFill>
                   <a:srgbClr val="3A342D"/>
                 </a:solidFill>
-                <a:latin typeface="Manrope" pitchFamily="34" charset="0"/>
-                <a:ea typeface="Manrope" pitchFamily="34" charset="-122"/>
-                <a:cs typeface="Manrope" pitchFamily="34" charset="-120"/>
+                <a:latin typeface="Bridge Manrope" pitchFamily="34" charset="0"/>
+                <a:ea typeface="Bridge Manrope" pitchFamily="34" charset="-122"/>
+                <a:cs typeface="Bridge Manrope" pitchFamily="34" charset="-120"/>
               </a:rPr>
               <a:t>Медиация и внесудебное урегулирование</a:t>
             </a:r>
@@ -9843,9 +9862,9 @@
                 <a:solidFill>
                   <a:srgbClr val="3A342D"/>
                 </a:solidFill>
-                <a:latin typeface="Manrope" pitchFamily="34" charset="0"/>
-                <a:ea typeface="Manrope" pitchFamily="34" charset="-122"/>
-                <a:cs typeface="Manrope" pitchFamily="34" charset="-120"/>
+                <a:latin typeface="Bridge Manrope" pitchFamily="34" charset="0"/>
+                <a:ea typeface="Bridge Manrope" pitchFamily="34" charset="-122"/>
+                <a:cs typeface="Bridge Manrope" pitchFamily="34" charset="-120"/>
               </a:rPr>
               <a:t>Экспертная поддержка в арбитраже</a:t>
             </a:r>
@@ -9909,9 +9928,9 @@
                 <a:solidFill>
                   <a:srgbClr val="9B7C56"/>
                 </a:solidFill>
-                <a:latin typeface="Playfair Display" pitchFamily="34" charset="0"/>
-                <a:ea typeface="Playfair Display" pitchFamily="34" charset="-122"/>
-                <a:cs typeface="Playfair Display" pitchFamily="34" charset="-120"/>
+                <a:latin typeface="Bridge Playfair" pitchFamily="34" charset="0"/>
+                <a:ea typeface="Bridge Playfair" pitchFamily="34" charset="-122"/>
+                <a:cs typeface="Bridge Playfair" pitchFamily="34" charset="-120"/>
               </a:rPr>
               <a:t>04</a:t>
             </a:r>
@@ -9948,9 +9967,9 @@
                 <a:solidFill>
                   <a:srgbClr val="8A7B66"/>
                 </a:solidFill>
-                <a:latin typeface="Manrope SemiBold" pitchFamily="34" charset="0"/>
-                <a:ea typeface="Manrope SemiBold" pitchFamily="34" charset="-122"/>
-                <a:cs typeface="Manrope SemiBold" pitchFamily="34" charset="-120"/>
+                <a:latin typeface="Bridge Manrope SemiBold" pitchFamily="34" charset="0"/>
+                <a:ea typeface="Bridge Manrope SemiBold" pitchFamily="34" charset="-122"/>
+                <a:cs typeface="Bridge Manrope SemiBold" pitchFamily="34" charset="-120"/>
               </a:rPr>
               <a:t>FDA · QUANTUM</a:t>
             </a:r>
@@ -9987,9 +10006,9 @@
                 <a:solidFill>
                   <a:srgbClr val="1A1816"/>
                 </a:solidFill>
-                <a:latin typeface="Manrope ExtraBold" pitchFamily="34" charset="0"/>
-                <a:ea typeface="Manrope ExtraBold" pitchFamily="34" charset="-122"/>
-                <a:cs typeface="Manrope ExtraBold" pitchFamily="34" charset="-120"/>
+                <a:latin typeface="Bridge Manrope ExtraBold" pitchFamily="34" charset="0"/>
+                <a:ea typeface="Bridge Manrope ExtraBold" pitchFamily="34" charset="-122"/>
+                <a:cs typeface="Bridge Manrope ExtraBold" pitchFamily="34" charset="-120"/>
               </a:rPr>
               <a:t>Аналитика и обучение</a:t>
             </a:r>
@@ -10033,9 +10052,9 @@
                 <a:solidFill>
                   <a:srgbClr val="3A342D"/>
                 </a:solidFill>
-                <a:latin typeface="Manrope" pitchFamily="34" charset="0"/>
-                <a:ea typeface="Manrope" pitchFamily="34" charset="-122"/>
-                <a:cs typeface="Manrope" pitchFamily="34" charset="-120"/>
+                <a:latin typeface="Bridge Manrope" pitchFamily="34" charset="0"/>
+                <a:ea typeface="Bridge Manrope" pitchFamily="34" charset="-122"/>
+                <a:cs typeface="Bridge Manrope" pitchFamily="34" charset="-120"/>
               </a:rPr>
               <a:t>Forensic Delay Analysis и расчёт Quantum</a:t>
             </a:r>
@@ -10057,9 +10076,9 @@
                 <a:solidFill>
                   <a:srgbClr val="3A342D"/>
                 </a:solidFill>
-                <a:latin typeface="Manrope" pitchFamily="34" charset="0"/>
-                <a:ea typeface="Manrope" pitchFamily="34" charset="-122"/>
-                <a:cs typeface="Manrope" pitchFamily="34" charset="-120"/>
+                <a:latin typeface="Bridge Manrope" pitchFamily="34" charset="0"/>
+                <a:ea typeface="Bridge Manrope" pitchFamily="34" charset="-122"/>
+                <a:cs typeface="Bridge Manrope" pitchFamily="34" charset="-120"/>
               </a:rPr>
               <a:t>Адаптация к законодательству РУз</a:t>
             </a:r>
@@ -10081,9 +10100,9 @@
                 <a:solidFill>
                   <a:srgbClr val="3A342D"/>
                 </a:solidFill>
-                <a:latin typeface="Manrope" pitchFamily="34" charset="0"/>
-                <a:ea typeface="Manrope" pitchFamily="34" charset="-122"/>
-                <a:cs typeface="Manrope" pitchFamily="34" charset="-120"/>
+                <a:latin typeface="Bridge Manrope" pitchFamily="34" charset="0"/>
+                <a:ea typeface="Bridge Manrope" pitchFamily="34" charset="-122"/>
+                <a:cs typeface="Bridge Manrope" pitchFamily="34" charset="-120"/>
               </a:rPr>
               <a:t>Семинары и корпоративное обучение</a:t>
             </a:r>
@@ -11546,7 +11565,7 @@
       </p:grpSpPr>
       <p:pic>
         <p:nvPicPr>
-          <p:cNvPr id="2" name="bc5_1" descr="/tmp/claude-0/-home-user-bridge-astro/c468759c-dc39-5c73-8ddc-d9f14d631ba1/scratchpad/assets/fidic.jpg">    </p:cNvPr>
+          <p:cNvPr id="2" name="bc5_1" descr="/home/user/bridge-astro/presentation/company-2026/assets/fidic.jpg">    </p:cNvPr>
           <p:cNvPicPr>
             <a:picLocks noChangeAspect="1"/>
           </p:cNvPicPr>
@@ -11597,9 +11616,9 @@
                 <a:solidFill>
                   <a:srgbClr val="F4EFE6"/>
                 </a:solidFill>
-                <a:latin typeface="Manrope SemiBold" pitchFamily="34" charset="0"/>
-                <a:ea typeface="Manrope SemiBold" pitchFamily="34" charset="-122"/>
-                <a:cs typeface="Manrope SemiBold" pitchFamily="34" charset="-120"/>
+                <a:latin typeface="Bridge Manrope SemiBold" pitchFamily="34" charset="0"/>
+                <a:ea typeface="Bridge Manrope SemiBold" pitchFamily="34" charset="-122"/>
+                <a:cs typeface="Bridge Manrope SemiBold" pitchFamily="34" charset="-120"/>
               </a:rPr>
               <a:t>05</a:t>
             </a:r>
@@ -11611,9 +11630,9 @@
                 <a:solidFill>
                   <a:srgbClr val="A39C91"/>
                 </a:solidFill>
-                <a:latin typeface="Manrope SemiBold" pitchFamily="34" charset="0"/>
-                <a:ea typeface="Manrope SemiBold" pitchFamily="34" charset="-122"/>
-                <a:cs typeface="Manrope SemiBold" pitchFamily="34" charset="-120"/>
+                <a:latin typeface="Bridge Manrope SemiBold" pitchFamily="34" charset="0"/>
+                <a:ea typeface="Bridge Manrope SemiBold" pitchFamily="34" charset="-122"/>
+                <a:cs typeface="Bridge Manrope SemiBold" pitchFamily="34" charset="-120"/>
               </a:rPr>
               <a:t> / 10</a:t>
             </a:r>
@@ -11650,9 +11669,9 @@
                 <a:solidFill>
                   <a:srgbClr val="A39C91"/>
                 </a:solidFill>
-                <a:latin typeface="Manrope SemiBold" pitchFamily="34" charset="0"/>
-                <a:ea typeface="Manrope SemiBold" pitchFamily="34" charset="-122"/>
-                <a:cs typeface="Manrope SemiBold" pitchFamily="34" charset="-120"/>
+                <a:latin typeface="Bridge Manrope SemiBold" pitchFamily="34" charset="0"/>
+                <a:ea typeface="Bridge Manrope SemiBold" pitchFamily="34" charset="-122"/>
+                <a:cs typeface="Bridge Manrope SemiBold" pitchFamily="34" charset="-120"/>
               </a:rPr>
               <a:t>bridgeconsult.uz</a:t>
             </a:r>
@@ -11689,9 +11708,9 @@
                 <a:solidFill>
                   <a:srgbClr val="A39C91"/>
                 </a:solidFill>
-                <a:latin typeface="Manrope SemiBold" pitchFamily="34" charset="0"/>
-                <a:ea typeface="Manrope SemiBold" pitchFamily="34" charset="-122"/>
-                <a:cs typeface="Manrope SemiBold" pitchFamily="34" charset="-120"/>
+                <a:latin typeface="Bridge Manrope SemiBold" pitchFamily="34" charset="0"/>
+                <a:ea typeface="Bridge Manrope SemiBold" pitchFamily="34" charset="-122"/>
+                <a:cs typeface="Bridge Manrope SemiBold" pitchFamily="34" charset="-120"/>
               </a:rPr>
               <a:t>41.2995° N  ·  69.2401° E</a:t>
             </a:r>
@@ -11751,9 +11770,9 @@
                 <a:solidFill>
                   <a:srgbClr val="D8BD96"/>
                 </a:solidFill>
-                <a:latin typeface="Manrope SemiBold" pitchFamily="34" charset="0"/>
-                <a:ea typeface="Manrope SemiBold" pitchFamily="34" charset="-122"/>
-                <a:cs typeface="Manrope SemiBold" pitchFamily="34" charset="-120"/>
+                <a:latin typeface="Bridge Manrope SemiBold" pitchFamily="34" charset="0"/>
+                <a:ea typeface="Bridge Manrope SemiBold" pitchFamily="34" charset="-122"/>
+                <a:cs typeface="Bridge Manrope SemiBold" pitchFamily="34" charset="-120"/>
               </a:rPr>
               <a:t>ЭКСПЕРТИЗА FIDIC</a:t>
             </a:r>
@@ -11790,9 +11809,9 @@
                 <a:solidFill>
                   <a:srgbClr val="F4EFE6"/>
                 </a:solidFill>
-                <a:latin typeface="Playfair Display" pitchFamily="34" charset="0"/>
-                <a:ea typeface="Playfair Display" pitchFamily="34" charset="-122"/>
-                <a:cs typeface="Playfair Display" pitchFamily="34" charset="-120"/>
+                <a:latin typeface="Bridge Playfair" pitchFamily="34" charset="0"/>
+                <a:ea typeface="Bridge Playfair" pitchFamily="34" charset="-122"/>
+                <a:cs typeface="Bridge Playfair" pitchFamily="34" charset="-120"/>
               </a:rPr>
               <a:t>Вся линейка</a:t>
             </a:r>
@@ -11829,9 +11848,9 @@
                 <a:solidFill>
                   <a:srgbClr val="D8BD96"/>
                 </a:solidFill>
-                <a:latin typeface="Playfair Display" pitchFamily="34" charset="0"/>
-                <a:ea typeface="Playfair Display" pitchFamily="34" charset="-122"/>
-                <a:cs typeface="Playfair Display" pitchFamily="34" charset="-120"/>
+                <a:latin typeface="Bridge Playfair" pitchFamily="34" charset="0"/>
+                <a:ea typeface="Bridge Playfair" pitchFamily="34" charset="-122"/>
+                <a:cs typeface="Bridge Playfair" pitchFamily="34" charset="-120"/>
               </a:rPr>
               <a:t>проформ FIDIC</a:t>
             </a:r>
@@ -11871,9 +11890,9 @@
                 <a:solidFill>
                   <a:srgbClr val="A39C91"/>
                 </a:solidFill>
-                <a:latin typeface="Manrope" pitchFamily="34" charset="0"/>
-                <a:ea typeface="Manrope" pitchFamily="34" charset="-122"/>
-                <a:cs typeface="Manrope" pitchFamily="34" charset="-120"/>
+                <a:latin typeface="Bridge Manrope" pitchFamily="34" charset="0"/>
+                <a:ea typeface="Bridge Manrope" pitchFamily="34" charset="-122"/>
+                <a:cs typeface="Bridge Manrope" pitchFamily="34" charset="-120"/>
               </a:rPr>
               <a:t>Золотой стандарт типовых контрактов Международной федерации инженеров-консультантов — в ежедневной практике команды.</a:t>
             </a:r>
@@ -11933,9 +11952,9 @@
                 <a:solidFill>
                   <a:srgbClr val="F4EFE6"/>
                 </a:solidFill>
-                <a:latin typeface="Manrope SemiBold" pitchFamily="34" charset="0"/>
-                <a:ea typeface="Manrope SemiBold" pitchFamily="34" charset="-122"/>
-                <a:cs typeface="Manrope SemiBold" pitchFamily="34" charset="-120"/>
+                <a:latin typeface="Bridge Manrope SemiBold" pitchFamily="34" charset="0"/>
+                <a:ea typeface="Bridge Manrope SemiBold" pitchFamily="34" charset="-122"/>
+                <a:cs typeface="Bridge Manrope SemiBold" pitchFamily="34" charset="-120"/>
               </a:rPr>
               <a:t>Forensic Delay Analysis</a:t>
             </a:r>
@@ -11975,9 +11994,9 @@
                 <a:solidFill>
                   <a:srgbClr val="A39C91"/>
                 </a:solidFill>
-                <a:latin typeface="Manrope" pitchFamily="34" charset="0"/>
-                <a:ea typeface="Manrope" pitchFamily="34" charset="-122"/>
-                <a:cs typeface="Manrope" pitchFamily="34" charset="-120"/>
+                <a:latin typeface="Bridge Manrope" pitchFamily="34" charset="0"/>
+                <a:ea typeface="Bridge Manrope" pitchFamily="34" charset="-122"/>
+                <a:cs typeface="Bridge Manrope" pitchFamily="34" charset="-120"/>
               </a:rPr>
               <a:t>SCL Protocol: Time Impact и Time Slice Analysis — обоснование права на продление сроков (EOT) и компенсацию.</a:t>
             </a:r>
@@ -12037,9 +12056,9 @@
                 <a:solidFill>
                   <a:srgbClr val="F4EFE6"/>
                 </a:solidFill>
-                <a:latin typeface="Manrope SemiBold" pitchFamily="34" charset="0"/>
-                <a:ea typeface="Manrope SemiBold" pitchFamily="34" charset="-122"/>
-                <a:cs typeface="Manrope SemiBold" pitchFamily="34" charset="-120"/>
+                <a:latin typeface="Bridge Manrope SemiBold" pitchFamily="34" charset="0"/>
+                <a:ea typeface="Bridge Manrope SemiBold" pitchFamily="34" charset="-122"/>
+                <a:cs typeface="Bridge Manrope SemiBold" pitchFamily="34" charset="-120"/>
               </a:rPr>
               <a:t>DAAB / DAB</a:t>
             </a:r>
@@ -12079,9 +12098,9 @@
                 <a:solidFill>
                   <a:srgbClr val="A39C91"/>
                 </a:solidFill>
-                <a:latin typeface="Manrope" pitchFamily="34" charset="0"/>
-                <a:ea typeface="Manrope" pitchFamily="34" charset="-122"/>
-                <a:cs typeface="Manrope" pitchFamily="34" charset="-120"/>
+                <a:latin typeface="Bridge Manrope" pitchFamily="34" charset="0"/>
+                <a:ea typeface="Bridge Manrope" pitchFamily="34" charset="-122"/>
+                <a:cs typeface="Bridge Manrope" pitchFamily="34" charset="-120"/>
               </a:rPr>
               <a:t>Структурирование советов по спорам, Position Papers и представительство клиента на слушаниях.</a:t>
             </a:r>
@@ -12138,9 +12157,9 @@
                 <a:solidFill>
                   <a:srgbClr val="F4EFE6"/>
                 </a:solidFill>
-                <a:latin typeface="Manrope SemiBold" pitchFamily="34" charset="0"/>
-                <a:ea typeface="Manrope SemiBold" pitchFamily="34" charset="-122"/>
-                <a:cs typeface="Manrope SemiBold" pitchFamily="34" charset="-120"/>
+                <a:latin typeface="Bridge Manrope SemiBold" pitchFamily="34" charset="0"/>
+                <a:ea typeface="Bridge Manrope SemiBold" pitchFamily="34" charset="-122"/>
+                <a:cs typeface="Bridge Manrope SemiBold" pitchFamily="34" charset="-120"/>
               </a:rPr>
               <a:t>FIDIC</a:t>
             </a:r>
@@ -12177,9 +12196,9 @@
                 <a:solidFill>
                   <a:srgbClr val="F4EFE6"/>
                 </a:solidFill>
-                <a:latin typeface="Playfair Display" pitchFamily="34" charset="0"/>
-                <a:ea typeface="Playfair Display" pitchFamily="34" charset="-122"/>
-                <a:cs typeface="Playfair Display" pitchFamily="34" charset="-120"/>
+                <a:latin typeface="Bridge Playfair" pitchFamily="34" charset="0"/>
+                <a:ea typeface="Bridge Playfair" pitchFamily="34" charset="-122"/>
+                <a:cs typeface="Bridge Playfair" pitchFamily="34" charset="-120"/>
               </a:rPr>
               <a:t>Red Book</a:t>
             </a:r>
@@ -12219,9 +12238,9 @@
                 <a:solidFill>
                   <a:srgbClr val="F4EFE6"/>
                 </a:solidFill>
-                <a:latin typeface="Manrope SemiBold" pitchFamily="34" charset="0"/>
-                <a:ea typeface="Manrope SemiBold" pitchFamily="34" charset="-122"/>
-                <a:cs typeface="Manrope SemiBold" pitchFamily="34" charset="-120"/>
+                <a:latin typeface="Bridge Manrope SemiBold" pitchFamily="34" charset="0"/>
+                <a:ea typeface="Bridge Manrope SemiBold" pitchFamily="34" charset="-122"/>
+                <a:cs typeface="Bridge Manrope SemiBold" pitchFamily="34" charset="-120"/>
               </a:rPr>
               <a:t>Строительство по проекту Заказчика</a:t>
             </a:r>
@@ -12278,9 +12297,9 @@
                 <a:solidFill>
                   <a:srgbClr val="1A1816"/>
                 </a:solidFill>
-                <a:latin typeface="Manrope SemiBold" pitchFamily="34" charset="0"/>
-                <a:ea typeface="Manrope SemiBold" pitchFamily="34" charset="-122"/>
-                <a:cs typeface="Manrope SemiBold" pitchFamily="34" charset="-120"/>
+                <a:latin typeface="Bridge Manrope SemiBold" pitchFamily="34" charset="0"/>
+                <a:ea typeface="Bridge Manrope SemiBold" pitchFamily="34" charset="-122"/>
+                <a:cs typeface="Bridge Manrope SemiBold" pitchFamily="34" charset="-120"/>
               </a:rPr>
               <a:t>FIDIC</a:t>
             </a:r>
@@ -12317,9 +12336,9 @@
                 <a:solidFill>
                   <a:srgbClr val="1A1816"/>
                 </a:solidFill>
-                <a:latin typeface="Playfair Display" pitchFamily="34" charset="0"/>
-                <a:ea typeface="Playfair Display" pitchFamily="34" charset="-122"/>
-                <a:cs typeface="Playfair Display" pitchFamily="34" charset="-120"/>
+                <a:latin typeface="Bridge Playfair" pitchFamily="34" charset="0"/>
+                <a:ea typeface="Bridge Playfair" pitchFamily="34" charset="-122"/>
+                <a:cs typeface="Bridge Playfair" pitchFamily="34" charset="-120"/>
               </a:rPr>
               <a:t>Yellow Book</a:t>
             </a:r>
@@ -12359,9 +12378,9 @@
                 <a:solidFill>
                   <a:srgbClr val="1A1816"/>
                 </a:solidFill>
-                <a:latin typeface="Manrope SemiBold" pitchFamily="34" charset="0"/>
-                <a:ea typeface="Manrope SemiBold" pitchFamily="34" charset="-122"/>
-                <a:cs typeface="Manrope SemiBold" pitchFamily="34" charset="-120"/>
+                <a:latin typeface="Bridge Manrope SemiBold" pitchFamily="34" charset="0"/>
+                <a:ea typeface="Bridge Manrope SemiBold" pitchFamily="34" charset="-122"/>
+                <a:cs typeface="Bridge Manrope SemiBold" pitchFamily="34" charset="-120"/>
               </a:rPr>
               <a:t>Проектирование и строительство</a:t>
             </a:r>
@@ -12418,9 +12437,9 @@
                 <a:solidFill>
                   <a:srgbClr val="1A1816"/>
                 </a:solidFill>
-                <a:latin typeface="Manrope SemiBold" pitchFamily="34" charset="0"/>
-                <a:ea typeface="Manrope SemiBold" pitchFamily="34" charset="-122"/>
-                <a:cs typeface="Manrope SemiBold" pitchFamily="34" charset="-120"/>
+                <a:latin typeface="Bridge Manrope SemiBold" pitchFamily="34" charset="0"/>
+                <a:ea typeface="Bridge Manrope SemiBold" pitchFamily="34" charset="-122"/>
+                <a:cs typeface="Bridge Manrope SemiBold" pitchFamily="34" charset="-120"/>
               </a:rPr>
               <a:t>FIDIC</a:t>
             </a:r>
@@ -12457,9 +12476,9 @@
                 <a:solidFill>
                   <a:srgbClr val="1A1816"/>
                 </a:solidFill>
-                <a:latin typeface="Playfair Display" pitchFamily="34" charset="0"/>
-                <a:ea typeface="Playfair Display" pitchFamily="34" charset="-122"/>
-                <a:cs typeface="Playfair Display" pitchFamily="34" charset="-120"/>
+                <a:latin typeface="Bridge Playfair" pitchFamily="34" charset="0"/>
+                <a:ea typeface="Bridge Playfair" pitchFamily="34" charset="-122"/>
+                <a:cs typeface="Bridge Playfair" pitchFamily="34" charset="-120"/>
               </a:rPr>
               <a:t>Silver Book</a:t>
             </a:r>
@@ -12499,9 +12518,9 @@
                 <a:solidFill>
                   <a:srgbClr val="1A1816"/>
                 </a:solidFill>
-                <a:latin typeface="Manrope SemiBold" pitchFamily="34" charset="0"/>
-                <a:ea typeface="Manrope SemiBold" pitchFamily="34" charset="-122"/>
-                <a:cs typeface="Manrope SemiBold" pitchFamily="34" charset="-120"/>
+                <a:latin typeface="Bridge Manrope SemiBold" pitchFamily="34" charset="0"/>
+                <a:ea typeface="Bridge Manrope SemiBold" pitchFamily="34" charset="-122"/>
+                <a:cs typeface="Bridge Manrope SemiBold" pitchFamily="34" charset="-120"/>
               </a:rPr>
               <a:t>EPC / объекты под ключ</a:t>
             </a:r>
@@ -12558,9 +12577,9 @@
                 <a:solidFill>
                   <a:srgbClr val="1A1816"/>
                 </a:solidFill>
-                <a:latin typeface="Manrope SemiBold" pitchFamily="34" charset="0"/>
-                <a:ea typeface="Manrope SemiBold" pitchFamily="34" charset="-122"/>
-                <a:cs typeface="Manrope SemiBold" pitchFamily="34" charset="-120"/>
+                <a:latin typeface="Bridge Manrope SemiBold" pitchFamily="34" charset="0"/>
+                <a:ea typeface="Bridge Manrope SemiBold" pitchFamily="34" charset="-122"/>
+                <a:cs typeface="Bridge Manrope SemiBold" pitchFamily="34" charset="-120"/>
               </a:rPr>
               <a:t>FIDIC</a:t>
             </a:r>
@@ -12597,9 +12616,9 @@
                 <a:solidFill>
                   <a:srgbClr val="1A1816"/>
                 </a:solidFill>
-                <a:latin typeface="Playfair Display" pitchFamily="34" charset="0"/>
-                <a:ea typeface="Playfair Display" pitchFamily="34" charset="-122"/>
-                <a:cs typeface="Playfair Display" pitchFamily="34" charset="-120"/>
+                <a:latin typeface="Bridge Playfair" pitchFamily="34" charset="0"/>
+                <a:ea typeface="Bridge Playfair" pitchFamily="34" charset="-122"/>
+                <a:cs typeface="Bridge Playfair" pitchFamily="34" charset="-120"/>
               </a:rPr>
               <a:t>Pink Book</a:t>
             </a:r>
@@ -12639,9 +12658,9 @@
                 <a:solidFill>
                   <a:srgbClr val="1A1816"/>
                 </a:solidFill>
-                <a:latin typeface="Manrope SemiBold" pitchFamily="34" charset="0"/>
-                <a:ea typeface="Manrope SemiBold" pitchFamily="34" charset="-122"/>
-                <a:cs typeface="Manrope SemiBold" pitchFamily="34" charset="-120"/>
+                <a:latin typeface="Bridge Manrope SemiBold" pitchFamily="34" charset="0"/>
+                <a:ea typeface="Bridge Manrope SemiBold" pitchFamily="34" charset="-122"/>
+                <a:cs typeface="Bridge Manrope SemiBold" pitchFamily="34" charset="-120"/>
               </a:rPr>
               <a:t>MDB: издание для банков развития</a:t>
             </a:r>
@@ -12698,9 +12717,9 @@
                 <a:solidFill>
                   <a:srgbClr val="1A1816"/>
                 </a:solidFill>
-                <a:latin typeface="Manrope SemiBold" pitchFamily="34" charset="0"/>
-                <a:ea typeface="Manrope SemiBold" pitchFamily="34" charset="-122"/>
-                <a:cs typeface="Manrope SemiBold" pitchFamily="34" charset="-120"/>
+                <a:latin typeface="Bridge Manrope SemiBold" pitchFamily="34" charset="0"/>
+                <a:ea typeface="Bridge Manrope SemiBold" pitchFamily="34" charset="-122"/>
+                <a:cs typeface="Bridge Manrope SemiBold" pitchFamily="34" charset="-120"/>
               </a:rPr>
               <a:t>FIDIC</a:t>
             </a:r>
@@ -12737,9 +12756,9 @@
                 <a:solidFill>
                   <a:srgbClr val="1A1816"/>
                 </a:solidFill>
-                <a:latin typeface="Playfair Display" pitchFamily="34" charset="0"/>
-                <a:ea typeface="Playfair Display" pitchFamily="34" charset="-122"/>
-                <a:cs typeface="Playfair Display" pitchFamily="34" charset="-120"/>
+                <a:latin typeface="Bridge Playfair" pitchFamily="34" charset="0"/>
+                <a:ea typeface="Bridge Playfair" pitchFamily="34" charset="-122"/>
+                <a:cs typeface="Bridge Playfair" pitchFamily="34" charset="-120"/>
               </a:rPr>
               <a:t>White Book</a:t>
             </a:r>
@@ -12779,9 +12798,9 @@
                 <a:solidFill>
                   <a:srgbClr val="1A1816"/>
                 </a:solidFill>
-                <a:latin typeface="Manrope SemiBold" pitchFamily="34" charset="0"/>
-                <a:ea typeface="Manrope SemiBold" pitchFamily="34" charset="-122"/>
-                <a:cs typeface="Manrope SemiBold" pitchFamily="34" charset="-120"/>
+                <a:latin typeface="Bridge Manrope SemiBold" pitchFamily="34" charset="0"/>
+                <a:ea typeface="Bridge Manrope SemiBold" pitchFamily="34" charset="-122"/>
+                <a:cs typeface="Bridge Manrope SemiBold" pitchFamily="34" charset="-120"/>
               </a:rPr>
               <a:t>Договор с консультантом</a:t>
             </a:r>
@@ -14316,9 +14335,9 @@
                 <a:solidFill>
                   <a:srgbClr val="1A1816"/>
                 </a:solidFill>
-                <a:latin typeface="Manrope SemiBold" pitchFamily="34" charset="0"/>
-                <a:ea typeface="Manrope SemiBold" pitchFamily="34" charset="-122"/>
-                <a:cs typeface="Manrope SemiBold" pitchFamily="34" charset="-120"/>
+                <a:latin typeface="Bridge Manrope SemiBold" pitchFamily="34" charset="0"/>
+                <a:ea typeface="Bridge Manrope SemiBold" pitchFamily="34" charset="-122"/>
+                <a:cs typeface="Bridge Manrope SemiBold" pitchFamily="34" charset="-120"/>
               </a:rPr>
               <a:t>06</a:t>
             </a:r>
@@ -14330,9 +14349,9 @@
                 <a:solidFill>
                   <a:srgbClr val="6E655A"/>
                 </a:solidFill>
-                <a:latin typeface="Manrope SemiBold" pitchFamily="34" charset="0"/>
-                <a:ea typeface="Manrope SemiBold" pitchFamily="34" charset="-122"/>
-                <a:cs typeface="Manrope SemiBold" pitchFamily="34" charset="-120"/>
+                <a:latin typeface="Bridge Manrope SemiBold" pitchFamily="34" charset="0"/>
+                <a:ea typeface="Bridge Manrope SemiBold" pitchFamily="34" charset="-122"/>
+                <a:cs typeface="Bridge Manrope SemiBold" pitchFamily="34" charset="-120"/>
               </a:rPr>
               <a:t> / 10</a:t>
             </a:r>
@@ -14369,9 +14388,9 @@
                 <a:solidFill>
                   <a:srgbClr val="6E655A"/>
                 </a:solidFill>
-                <a:latin typeface="Manrope SemiBold" pitchFamily="34" charset="0"/>
-                <a:ea typeface="Manrope SemiBold" pitchFamily="34" charset="-122"/>
-                <a:cs typeface="Manrope SemiBold" pitchFamily="34" charset="-120"/>
+                <a:latin typeface="Bridge Manrope SemiBold" pitchFamily="34" charset="0"/>
+                <a:ea typeface="Bridge Manrope SemiBold" pitchFamily="34" charset="-122"/>
+                <a:cs typeface="Bridge Manrope SemiBold" pitchFamily="34" charset="-120"/>
               </a:rPr>
               <a:t>bridgeconsult.uz</a:t>
             </a:r>
@@ -14408,9 +14427,9 @@
                 <a:solidFill>
                   <a:srgbClr val="6E655A"/>
                 </a:solidFill>
-                <a:latin typeface="Manrope SemiBold" pitchFamily="34" charset="0"/>
-                <a:ea typeface="Manrope SemiBold" pitchFamily="34" charset="-122"/>
-                <a:cs typeface="Manrope SemiBold" pitchFamily="34" charset="-120"/>
+                <a:latin typeface="Bridge Manrope SemiBold" pitchFamily="34" charset="0"/>
+                <a:ea typeface="Bridge Manrope SemiBold" pitchFamily="34" charset="-122"/>
+                <a:cs typeface="Bridge Manrope SemiBold" pitchFamily="34" charset="-120"/>
               </a:rPr>
               <a:t>41.2995° N  ·  69.2401° E</a:t>
             </a:r>
@@ -14470,9 +14489,9 @@
                 <a:solidFill>
                   <a:srgbClr val="9B7C56"/>
                 </a:solidFill>
-                <a:latin typeface="Manrope SemiBold" pitchFamily="34" charset="0"/>
-                <a:ea typeface="Manrope SemiBold" pitchFamily="34" charset="-122"/>
-                <a:cs typeface="Manrope SemiBold" pitchFamily="34" charset="-120"/>
+                <a:latin typeface="Bridge Manrope SemiBold" pitchFamily="34" charset="0"/>
+                <a:ea typeface="Bridge Manrope SemiBold" pitchFamily="34" charset="-122"/>
+                <a:cs typeface="Bridge Manrope SemiBold" pitchFamily="34" charset="-120"/>
               </a:rPr>
               <a:t>ПОРТФОЛИО</a:t>
             </a:r>
@@ -14509,9 +14528,9 @@
                 <a:solidFill>
                   <a:srgbClr val="1A1816"/>
                 </a:solidFill>
-                <a:latin typeface="Playfair Display" pitchFamily="34" charset="0"/>
-                <a:ea typeface="Playfair Display" pitchFamily="34" charset="-122"/>
-                <a:cs typeface="Playfair Display" pitchFamily="34" charset="-120"/>
+                <a:latin typeface="Bridge Playfair" pitchFamily="34" charset="0"/>
+                <a:ea typeface="Bridge Playfair" pitchFamily="34" charset="-122"/>
+                <a:cs typeface="Bridge Playfair" pitchFamily="34" charset="-120"/>
               </a:rPr>
               <a:t>Избранные</a:t>
             </a:r>
@@ -14548,9 +14567,9 @@
                 <a:solidFill>
                   <a:srgbClr val="9B7C56"/>
                 </a:solidFill>
-                <a:latin typeface="Playfair Display" pitchFamily="34" charset="0"/>
-                <a:ea typeface="Playfair Display" pitchFamily="34" charset="-122"/>
-                <a:cs typeface="Playfair Display" pitchFamily="34" charset="-120"/>
+                <a:latin typeface="Bridge Playfair" pitchFamily="34" charset="0"/>
+                <a:ea typeface="Bridge Playfair" pitchFamily="34" charset="-122"/>
+                <a:cs typeface="Bridge Playfair" pitchFamily="34" charset="-120"/>
               </a:rPr>
               <a:t>проекты</a:t>
             </a:r>
@@ -14590,9 +14609,9 @@
                 <a:solidFill>
                   <a:srgbClr val="6E655A"/>
                 </a:solidFill>
-                <a:latin typeface="Manrope" pitchFamily="34" charset="0"/>
-                <a:ea typeface="Manrope" pitchFamily="34" charset="-122"/>
-                <a:cs typeface="Manrope" pitchFamily="34" charset="-120"/>
+                <a:latin typeface="Bridge Manrope" pitchFamily="34" charset="0"/>
+                <a:ea typeface="Bridge Manrope" pitchFamily="34" charset="-122"/>
+                <a:cs typeface="Bridge Manrope" pitchFamily="34" charset="-120"/>
               </a:rPr>
               <a:t>Контрактное сопровождение объектов национального масштаба — от спортивной инфраструктуры до транспортных коридоров ЦАРЭС.</a:t>
             </a:r>
@@ -14602,7 +14621,7 @@
       </p:sp>
       <p:pic>
         <p:nvPicPr>
-          <p:cNvPr id="10" name="bc6_9" descr="/tmp/claude-0/-home-user-bridge-astro/c468759c-dc39-5c73-8ddc-d9f14d631ba1/scratchpad/assets/p-olympic.jpg">    </p:cNvPr>
+          <p:cNvPr id="10" name="bc6_9" descr="/home/user/bridge-astro/presentation/company-2026/assets/p-olympic.jpg">    </p:cNvPr>
           <p:cNvPicPr>
             <a:picLocks noChangeAspect="1"/>
           </p:cNvPicPr>
@@ -14675,9 +14694,9 @@
                 <a:solidFill>
                   <a:srgbClr val="F0DCBA"/>
                 </a:solidFill>
-                <a:latin typeface="Manrope SemiBold" pitchFamily="34" charset="0"/>
-                <a:ea typeface="Manrope SemiBold" pitchFamily="34" charset="-122"/>
-                <a:cs typeface="Manrope SemiBold" pitchFamily="34" charset="-120"/>
+                <a:latin typeface="Bridge Manrope SemiBold" pitchFamily="34" charset="0"/>
+                <a:ea typeface="Bridge Manrope SemiBold" pitchFamily="34" charset="-122"/>
+                <a:cs typeface="Bridge Manrope SemiBold" pitchFamily="34" charset="-120"/>
               </a:rPr>
               <a:t>EPC+F</a:t>
             </a:r>
@@ -14714,9 +14733,9 @@
                 <a:solidFill>
                   <a:srgbClr val="9B7C56"/>
                 </a:solidFill>
-                <a:latin typeface="Manrope SemiBold" pitchFamily="34" charset="0"/>
-                <a:ea typeface="Manrope SemiBold" pitchFamily="34" charset="-122"/>
-                <a:cs typeface="Manrope SemiBold" pitchFamily="34" charset="-120"/>
+                <a:latin typeface="Bridge Manrope SemiBold" pitchFamily="34" charset="0"/>
+                <a:ea typeface="Bridge Manrope SemiBold" pitchFamily="34" charset="-122"/>
+                <a:cs typeface="Bridge Manrope SemiBold" pitchFamily="34" charset="-120"/>
               </a:rPr>
               <a:t>2022 — 2025</a:t>
             </a:r>
@@ -14753,9 +14772,9 @@
                 <a:solidFill>
                   <a:srgbClr val="1A1816"/>
                 </a:solidFill>
-                <a:latin typeface="Manrope ExtraBold" pitchFamily="34" charset="0"/>
-                <a:ea typeface="Manrope ExtraBold" pitchFamily="34" charset="-122"/>
-                <a:cs typeface="Manrope ExtraBold" pitchFamily="34" charset="-120"/>
+                <a:latin typeface="Bridge Manrope ExtraBold" pitchFamily="34" charset="0"/>
+                <a:ea typeface="Bridge Manrope ExtraBold" pitchFamily="34" charset="-122"/>
+                <a:cs typeface="Bridge Manrope ExtraBold" pitchFamily="34" charset="-120"/>
               </a:rPr>
               <a:t>Олимпийский городок, Ташкент</a:t>
             </a:r>
@@ -14795,9 +14814,9 @@
                 <a:solidFill>
                   <a:srgbClr val="6E655A"/>
                 </a:solidFill>
-                <a:latin typeface="Manrope" pitchFamily="34" charset="0"/>
-                <a:ea typeface="Manrope" pitchFamily="34" charset="-122"/>
-                <a:cs typeface="Manrope" pitchFamily="34" charset="-120"/>
+                <a:latin typeface="Bridge Manrope" pitchFamily="34" charset="0"/>
+                <a:ea typeface="Bridge Manrope" pitchFamily="34" charset="-122"/>
+                <a:cs typeface="Bridge Manrope" pitchFamily="34" charset="-120"/>
               </a:rPr>
               <a:t>Спортивные объекты IV Летних Азиатских юношеских игр.</a:t>
             </a:r>
@@ -14807,7 +14826,7 @@
       </p:sp>
       <p:pic>
         <p:nvPicPr>
-          <p:cNvPr id="16" name="bc6_15" descr="/tmp/claude-0/-home-user-bridge-astro/c468759c-dc39-5c73-8ddc-d9f14d631ba1/scratchpad/assets/p-tic.jpg">    </p:cNvPr>
+          <p:cNvPr id="16" name="bc6_15" descr="/home/user/bridge-astro/presentation/company-2026/assets/p-tic.jpg">    </p:cNvPr>
           <p:cNvPicPr>
             <a:picLocks noChangeAspect="1"/>
           </p:cNvPicPr>
@@ -14880,9 +14899,9 @@
                 <a:solidFill>
                   <a:srgbClr val="F0DCBA"/>
                 </a:solidFill>
-                <a:latin typeface="Manrope SemiBold" pitchFamily="34" charset="0"/>
-                <a:ea typeface="Manrope SemiBold" pitchFamily="34" charset="-122"/>
-                <a:cs typeface="Manrope SemiBold" pitchFamily="34" charset="-120"/>
+                <a:latin typeface="Bridge Manrope SemiBold" pitchFamily="34" charset="0"/>
+                <a:ea typeface="Bridge Manrope SemiBold" pitchFamily="34" charset="-122"/>
+                <a:cs typeface="Bridge Manrope SemiBold" pitchFamily="34" charset="-120"/>
               </a:rPr>
               <a:t>FIDIC WHITE BOOK</a:t>
             </a:r>
@@ -14919,9 +14938,9 @@
                 <a:solidFill>
                   <a:srgbClr val="9B7C56"/>
                 </a:solidFill>
-                <a:latin typeface="Manrope SemiBold" pitchFamily="34" charset="0"/>
-                <a:ea typeface="Manrope SemiBold" pitchFamily="34" charset="-122"/>
-                <a:cs typeface="Manrope SemiBold" pitchFamily="34" charset="-120"/>
+                <a:latin typeface="Bridge Manrope SemiBold" pitchFamily="34" charset="0"/>
+                <a:ea typeface="Bridge Manrope SemiBold" pitchFamily="34" charset="-122"/>
+                <a:cs typeface="Bridge Manrope SemiBold" pitchFamily="34" charset="-120"/>
               </a:rPr>
               <a:t>2025 — н.в.</a:t>
             </a:r>
@@ -14958,9 +14977,9 @@
                 <a:solidFill>
                   <a:srgbClr val="1A1816"/>
                 </a:solidFill>
-                <a:latin typeface="Manrope ExtraBold" pitchFamily="34" charset="0"/>
-                <a:ea typeface="Manrope ExtraBold" pitchFamily="34" charset="-122"/>
-                <a:cs typeface="Manrope ExtraBold" pitchFamily="34" charset="-120"/>
+                <a:latin typeface="Bridge Manrope ExtraBold" pitchFamily="34" charset="0"/>
+                <a:ea typeface="Bridge Manrope ExtraBold" pitchFamily="34" charset="-122"/>
+                <a:cs typeface="Bridge Manrope ExtraBold" pitchFamily="34" charset="-120"/>
               </a:rPr>
               <a:t>АО «Tashkent Invest Company»</a:t>
             </a:r>
@@ -15000,9 +15019,9 @@
                 <a:solidFill>
                   <a:srgbClr val="6E655A"/>
                 </a:solidFill>
-                <a:latin typeface="Manrope" pitchFamily="34" charset="0"/>
-                <a:ea typeface="Manrope" pitchFamily="34" charset="-122"/>
-                <a:cs typeface="Manrope" pitchFamily="34" charset="-120"/>
+                <a:latin typeface="Bridge Manrope" pitchFamily="34" charset="0"/>
+                <a:ea typeface="Bridge Manrope" pitchFamily="34" charset="-122"/>
+                <a:cs typeface="Bridge Manrope" pitchFamily="34" charset="-120"/>
               </a:rPr>
               <a:t>Система закупок и управления контрактами для проектов EPC+F.</a:t>
             </a:r>
@@ -15012,7 +15031,7 @@
       </p:sp>
       <p:pic>
         <p:nvPicPr>
-          <p:cNvPr id="22" name="bc6_21" descr="/tmp/claude-0/-home-user-bridge-astro/c468759c-dc39-5c73-8ddc-d9f14d631ba1/scratchpad/assets/p-kamchik.jpg">    </p:cNvPr>
+          <p:cNvPr id="22" name="bc6_21" descr="/home/user/bridge-astro/presentation/company-2026/assets/p-kamchik.jpg">    </p:cNvPr>
           <p:cNvPicPr>
             <a:picLocks noChangeAspect="1"/>
           </p:cNvPicPr>
@@ -15085,9 +15104,9 @@
                 <a:solidFill>
                   <a:srgbClr val="F0DCBA"/>
                 </a:solidFill>
-                <a:latin typeface="Manrope SemiBold" pitchFamily="34" charset="0"/>
-                <a:ea typeface="Manrope SemiBold" pitchFamily="34" charset="-122"/>
-                <a:cs typeface="Manrope SemiBold" pitchFamily="34" charset="-120"/>
+                <a:latin typeface="Bridge Manrope SemiBold" pitchFamily="34" charset="0"/>
+                <a:ea typeface="Bridge Manrope SemiBold" pitchFamily="34" charset="-122"/>
+                <a:cs typeface="Bridge Manrope SemiBold" pitchFamily="34" charset="-120"/>
               </a:rPr>
               <a:t>MDB HARMONISED</a:t>
             </a:r>
@@ -15124,9 +15143,9 @@
                 <a:solidFill>
                   <a:srgbClr val="9B7C56"/>
                 </a:solidFill>
-                <a:latin typeface="Manrope SemiBold" pitchFamily="34" charset="0"/>
-                <a:ea typeface="Manrope SemiBold" pitchFamily="34" charset="-122"/>
-                <a:cs typeface="Manrope SemiBold" pitchFamily="34" charset="-120"/>
+                <a:latin typeface="Bridge Manrope SemiBold" pitchFamily="34" charset="0"/>
+                <a:ea typeface="Bridge Manrope SemiBold" pitchFamily="34" charset="-122"/>
+                <a:cs typeface="Bridge Manrope SemiBold" pitchFamily="34" charset="-120"/>
               </a:rPr>
               <a:t>2016 — 2022</a:t>
             </a:r>
@@ -15163,9 +15182,9 @@
                 <a:solidFill>
                   <a:srgbClr val="1A1816"/>
                 </a:solidFill>
-                <a:latin typeface="Manrope ExtraBold" pitchFamily="34" charset="0"/>
-                <a:ea typeface="Manrope ExtraBold" pitchFamily="34" charset="-122"/>
-                <a:cs typeface="Manrope ExtraBold" pitchFamily="34" charset="-120"/>
+                <a:latin typeface="Bridge Manrope ExtraBold" pitchFamily="34" charset="0"/>
+                <a:ea typeface="Bridge Manrope ExtraBold" pitchFamily="34" charset="-122"/>
+                <a:cs typeface="Bridge Manrope ExtraBold" pitchFamily="34" charset="-120"/>
               </a:rPr>
               <a:t>Автодорога А-373, перевал Камчик</a:t>
             </a:r>
@@ -15205,9 +15224,9 @@
                 <a:solidFill>
                   <a:srgbClr val="6E655A"/>
                 </a:solidFill>
-                <a:latin typeface="Manrope" pitchFamily="34" charset="0"/>
-                <a:ea typeface="Manrope" pitchFamily="34" charset="-122"/>
-                <a:cs typeface="Manrope" pitchFamily="34" charset="-120"/>
+                <a:latin typeface="Bridge Manrope" pitchFamily="34" charset="0"/>
+                <a:ea typeface="Bridge Manrope" pitchFamily="34" charset="-122"/>
+                <a:cs typeface="Bridge Manrope" pitchFamily="34" charset="-120"/>
               </a:rPr>
               <a:t>Транспортный коридор ЦАРЭС 2. Заказчик — АО EVRASCON.</a:t>
             </a:r>
@@ -15267,9 +15286,9 @@
                 <a:solidFill>
                   <a:srgbClr val="9B7C56"/>
                 </a:solidFill>
-                <a:latin typeface="Manrope SemiBold" pitchFamily="34" charset="0"/>
-                <a:ea typeface="Manrope SemiBold" pitchFamily="34" charset="-122"/>
-                <a:cs typeface="Manrope SemiBold" pitchFamily="34" charset="-120"/>
+                <a:latin typeface="Bridge Manrope SemiBold" pitchFamily="34" charset="0"/>
+                <a:ea typeface="Bridge Manrope SemiBold" pitchFamily="34" charset="-122"/>
+                <a:cs typeface="Bridge Manrope SemiBold" pitchFamily="34" charset="-120"/>
               </a:rPr>
               <a:t>ВОДОСНАБЖЕНИЕ   </a:t>
             </a:r>
@@ -15281,9 +15300,9 @@
                 <a:solidFill>
                   <a:srgbClr val="3A342D"/>
                 </a:solidFill>
-                <a:latin typeface="Manrope" pitchFamily="34" charset="0"/>
-                <a:ea typeface="Manrope" pitchFamily="34" charset="-122"/>
-                <a:cs typeface="Manrope" pitchFamily="34" charset="-120"/>
+                <a:latin typeface="Bridge Manrope" pitchFamily="34" charset="0"/>
+                <a:ea typeface="Bridge Manrope" pitchFamily="34" charset="-122"/>
+                <a:cs typeface="Bridge Manrope" pitchFamily="34" charset="-120"/>
               </a:rPr>
               <a:t>Янгиюль и Жийдакапа — World Bank, EBRD   ·   Наманган, 60 км трубопровода — OPEC Fund   ·   Самаркандская область — АБР</a:t>
             </a:r>
@@ -16781,9 +16800,9 @@
                 <a:solidFill>
                   <a:srgbClr val="F4EFE6"/>
                 </a:solidFill>
-                <a:latin typeface="Manrope SemiBold" pitchFamily="34" charset="0"/>
-                <a:ea typeface="Manrope SemiBold" pitchFamily="34" charset="-122"/>
-                <a:cs typeface="Manrope SemiBold" pitchFamily="34" charset="-120"/>
+                <a:latin typeface="Bridge Manrope SemiBold" pitchFamily="34" charset="0"/>
+                <a:ea typeface="Bridge Manrope SemiBold" pitchFamily="34" charset="-122"/>
+                <a:cs typeface="Bridge Manrope SemiBold" pitchFamily="34" charset="-120"/>
               </a:rPr>
               <a:t>07</a:t>
             </a:r>
@@ -16795,9 +16814,9 @@
                 <a:solidFill>
                   <a:srgbClr val="A39C91"/>
                 </a:solidFill>
-                <a:latin typeface="Manrope SemiBold" pitchFamily="34" charset="0"/>
-                <a:ea typeface="Manrope SemiBold" pitchFamily="34" charset="-122"/>
-                <a:cs typeface="Manrope SemiBold" pitchFamily="34" charset="-120"/>
+                <a:latin typeface="Bridge Manrope SemiBold" pitchFamily="34" charset="0"/>
+                <a:ea typeface="Bridge Manrope SemiBold" pitchFamily="34" charset="-122"/>
+                <a:cs typeface="Bridge Manrope SemiBold" pitchFamily="34" charset="-120"/>
               </a:rPr>
               <a:t> / 10</a:t>
             </a:r>
@@ -16834,9 +16853,9 @@
                 <a:solidFill>
                   <a:srgbClr val="A39C91"/>
                 </a:solidFill>
-                <a:latin typeface="Manrope SemiBold" pitchFamily="34" charset="0"/>
-                <a:ea typeface="Manrope SemiBold" pitchFamily="34" charset="-122"/>
-                <a:cs typeface="Manrope SemiBold" pitchFamily="34" charset="-120"/>
+                <a:latin typeface="Bridge Manrope SemiBold" pitchFamily="34" charset="0"/>
+                <a:ea typeface="Bridge Manrope SemiBold" pitchFamily="34" charset="-122"/>
+                <a:cs typeface="Bridge Manrope SemiBold" pitchFamily="34" charset="-120"/>
               </a:rPr>
               <a:t>bridgeconsult.uz</a:t>
             </a:r>
@@ -16873,9 +16892,9 @@
                 <a:solidFill>
                   <a:srgbClr val="A39C91"/>
                 </a:solidFill>
-                <a:latin typeface="Manrope SemiBold" pitchFamily="34" charset="0"/>
-                <a:ea typeface="Manrope SemiBold" pitchFamily="34" charset="-122"/>
-                <a:cs typeface="Manrope SemiBold" pitchFamily="34" charset="-120"/>
+                <a:latin typeface="Bridge Manrope SemiBold" pitchFamily="34" charset="0"/>
+                <a:ea typeface="Bridge Manrope SemiBold" pitchFamily="34" charset="-122"/>
+                <a:cs typeface="Bridge Manrope SemiBold" pitchFamily="34" charset="-120"/>
               </a:rPr>
               <a:t>41.2995° N  ·  69.2401° E</a:t>
             </a:r>
@@ -16935,9 +16954,9 @@
                 <a:solidFill>
                   <a:srgbClr val="D8BD96"/>
                 </a:solidFill>
-                <a:latin typeface="Manrope SemiBold" pitchFamily="34" charset="0"/>
-                <a:ea typeface="Manrope SemiBold" pitchFamily="34" charset="-122"/>
-                <a:cs typeface="Manrope SemiBold" pitchFamily="34" charset="-120"/>
+                <a:latin typeface="Bridge Manrope SemiBold" pitchFamily="34" charset="0"/>
+                <a:ea typeface="Bridge Manrope SemiBold" pitchFamily="34" charset="-122"/>
+                <a:cs typeface="Bridge Manrope SemiBold" pitchFamily="34" charset="-120"/>
               </a:rPr>
               <a:t>КОМАНДА</a:t>
             </a:r>
@@ -16974,9 +16993,9 @@
                 <a:solidFill>
                   <a:srgbClr val="F4EFE6"/>
                 </a:solidFill>
-                <a:latin typeface="Playfair Display" pitchFamily="34" charset="0"/>
-                <a:ea typeface="Playfair Display" pitchFamily="34" charset="-122"/>
-                <a:cs typeface="Playfair Display" pitchFamily="34" charset="-120"/>
+                <a:latin typeface="Bridge Playfair" pitchFamily="34" charset="0"/>
+                <a:ea typeface="Bridge Playfair" pitchFamily="34" charset="-122"/>
+                <a:cs typeface="Bridge Playfair" pitchFamily="34" charset="-120"/>
               </a:rPr>
               <a:t>Лица</a:t>
             </a:r>
@@ -17013,9 +17032,9 @@
                 <a:solidFill>
                   <a:srgbClr val="D8BD96"/>
                 </a:solidFill>
-                <a:latin typeface="Playfair Display" pitchFamily="34" charset="0"/>
-                <a:ea typeface="Playfair Display" pitchFamily="34" charset="-122"/>
-                <a:cs typeface="Playfair Display" pitchFamily="34" charset="-120"/>
+                <a:latin typeface="Bridge Playfair" pitchFamily="34" charset="0"/>
+                <a:ea typeface="Bridge Playfair" pitchFamily="34" charset="-122"/>
+                <a:cs typeface="Bridge Playfair" pitchFamily="34" charset="-120"/>
               </a:rPr>
               <a:t>компании</a:t>
             </a:r>
@@ -17055,9 +17074,9 @@
                 <a:solidFill>
                   <a:srgbClr val="A39C91"/>
                 </a:solidFill>
-                <a:latin typeface="Manrope" pitchFamily="34" charset="0"/>
-                <a:ea typeface="Manrope" pitchFamily="34" charset="-122"/>
-                <a:cs typeface="Manrope" pitchFamily="34" charset="-120"/>
+                <a:latin typeface="Bridge Manrope" pitchFamily="34" charset="0"/>
+                <a:ea typeface="Bridge Manrope" pitchFamily="34" charset="-122"/>
+                <a:cs typeface="Bridge Manrope" pitchFamily="34" charset="-120"/>
               </a:rPr>
               <a:t>Десятилетия практики в инженерном деле, юриспруденции и международном арбитраже.</a:t>
             </a:r>
@@ -17067,7 +17086,7 @@
       </p:sp>
       <p:pic>
         <p:nvPicPr>
-          <p:cNvPr id="10" name="bc7_9" descr="/tmp/claude-0/-home-user-bridge-astro/c468759c-dc39-5c73-8ddc-d9f14d631ba1/scratchpad/assets/t-larisa.jpg">    </p:cNvPr>
+          <p:cNvPr id="10" name="bc7_9" descr="/home/user/bridge-astro/presentation/company-2026/assets/t-larisa.jpg">    </p:cNvPr>
           <p:cNvPicPr>
             <a:picLocks noChangeAspect="1"/>
           </p:cNvPicPr>
@@ -17118,9 +17137,9 @@
                 <a:solidFill>
                   <a:srgbClr val="F4EFE6"/>
                 </a:solidFill>
-                <a:latin typeface="Playfair Display" pitchFamily="34" charset="0"/>
-                <a:ea typeface="Playfair Display" pitchFamily="34" charset="-122"/>
-                <a:cs typeface="Playfair Display" pitchFamily="34" charset="-120"/>
+                <a:latin typeface="Bridge Playfair" pitchFamily="34" charset="0"/>
+                <a:ea typeface="Bridge Playfair" pitchFamily="34" charset="-122"/>
+                <a:cs typeface="Bridge Playfair" pitchFamily="34" charset="-120"/>
               </a:rPr>
               <a:t>Лариса Белоусова</a:t>
             </a:r>
@@ -17160,9 +17179,9 @@
                 <a:solidFill>
                   <a:srgbClr val="A39C91"/>
                 </a:solidFill>
-                <a:latin typeface="Manrope" pitchFamily="34" charset="0"/>
-                <a:ea typeface="Manrope" pitchFamily="34" charset="-122"/>
-                <a:cs typeface="Manrope" pitchFamily="34" charset="-120"/>
+                <a:latin typeface="Bridge Manrope" pitchFamily="34" charset="0"/>
+                <a:ea typeface="Bridge Manrope" pitchFamily="34" charset="-122"/>
+                <a:cs typeface="Bridge Manrope" pitchFamily="34" charset="-120"/>
               </a:rPr>
               <a:t>Основатель и директор · FCCE, FCCP, ADB Accredited</a:t>
             </a:r>
@@ -17172,7 +17191,7 @@
       </p:sp>
       <p:pic>
         <p:nvPicPr>
-          <p:cNvPr id="13" name="bc7_12" descr="/tmp/claude-0/-home-user-bridge-astro/c468759c-dc39-5c73-8ddc-d9f14d631ba1/scratchpad/assets/t-anna.jpg">    </p:cNvPr>
+          <p:cNvPr id="13" name="bc7_12" descr="/home/user/bridge-astro/presentation/company-2026/assets/t-anna.jpg">    </p:cNvPr>
           <p:cNvPicPr>
             <a:picLocks noChangeAspect="1"/>
           </p:cNvPicPr>
@@ -17223,9 +17242,9 @@
                 <a:solidFill>
                   <a:srgbClr val="F4EFE6"/>
                 </a:solidFill>
-                <a:latin typeface="Playfair Display" pitchFamily="34" charset="0"/>
-                <a:ea typeface="Playfair Display" pitchFamily="34" charset="-122"/>
-                <a:cs typeface="Playfair Display" pitchFamily="34" charset="-120"/>
+                <a:latin typeface="Bridge Playfair" pitchFamily="34" charset="0"/>
+                <a:ea typeface="Bridge Playfair" pitchFamily="34" charset="-122"/>
+                <a:cs typeface="Bridge Playfair" pitchFamily="34" charset="-120"/>
               </a:rPr>
               <a:t>Анна Убайдуллаева</a:t>
             </a:r>
@@ -17265,9 +17284,9 @@
                 <a:solidFill>
                   <a:srgbClr val="A39C91"/>
                 </a:solidFill>
-                <a:latin typeface="Manrope" pitchFamily="34" charset="0"/>
-                <a:ea typeface="Manrope" pitchFamily="34" charset="-122"/>
-                <a:cs typeface="Manrope" pitchFamily="34" charset="-120"/>
+                <a:latin typeface="Bridge Manrope" pitchFamily="34" charset="0"/>
+                <a:ea typeface="Bridge Manrope" pitchFamily="34" charset="-122"/>
+                <a:cs typeface="Bridge Manrope" pitchFamily="34" charset="-120"/>
               </a:rPr>
               <a:t>Партнёр, юридический консультант · арбитр TIAC и VIAC</a:t>
             </a:r>
@@ -17277,7 +17296,7 @@
       </p:sp>
       <p:pic>
         <p:nvPicPr>
-          <p:cNvPr id="16" name="bc7_15" descr="/tmp/claude-0/-home-user-bridge-astro/c468759c-dc39-5c73-8ddc-d9f14d631ba1/scratchpad/assets/t-ernest.jpg">    </p:cNvPr>
+          <p:cNvPr id="16" name="bc7_15" descr="/home/user/bridge-astro/presentation/company-2026/assets/t-ernest.jpg">    </p:cNvPr>
           <p:cNvPicPr>
             <a:picLocks noChangeAspect="1"/>
           </p:cNvPicPr>
@@ -17328,9 +17347,9 @@
                 <a:solidFill>
                   <a:srgbClr val="F4EFE6"/>
                 </a:solidFill>
-                <a:latin typeface="Playfair Display" pitchFamily="34" charset="0"/>
-                <a:ea typeface="Playfair Display" pitchFamily="34" charset="-122"/>
-                <a:cs typeface="Playfair Display" pitchFamily="34" charset="-120"/>
+                <a:latin typeface="Bridge Playfair" pitchFamily="34" charset="0"/>
+                <a:ea typeface="Bridge Playfair" pitchFamily="34" charset="-122"/>
+                <a:cs typeface="Bridge Playfair" pitchFamily="34" charset="-120"/>
               </a:rPr>
               <a:t>Эрнест Белоусов</a:t>
             </a:r>
@@ -17370,9 +17389,9 @@
                 <a:solidFill>
                   <a:srgbClr val="A39C91"/>
                 </a:solidFill>
-                <a:latin typeface="Manrope" pitchFamily="34" charset="0"/>
-                <a:ea typeface="Manrope" pitchFamily="34" charset="-122"/>
-                <a:cs typeface="Manrope" pitchFamily="34" charset="-120"/>
+                <a:latin typeface="Bridge Manrope" pitchFamily="34" charset="0"/>
+                <a:ea typeface="Bridge Manrope" pitchFamily="34" charset="-122"/>
+                <a:cs typeface="Bridge Manrope" pitchFamily="34" charset="-120"/>
               </a:rPr>
               <a:t>Ведущий специалист по контрактам FIDIC</a:t>
             </a:r>
@@ -17382,7 +17401,7 @@
       </p:sp>
       <p:pic>
         <p:nvPicPr>
-          <p:cNvPr id="19" name="bc7_18" descr="/tmp/claude-0/-home-user-bridge-astro/c468759c-dc39-5c73-8ddc-d9f14d631ba1/scratchpad/assets/t-lucia.jpg">    </p:cNvPr>
+          <p:cNvPr id="19" name="bc7_18" descr="/home/user/bridge-astro/presentation/company-2026/assets/t-lucia.jpg">    </p:cNvPr>
           <p:cNvPicPr>
             <a:picLocks noChangeAspect="1"/>
           </p:cNvPicPr>
@@ -17433,9 +17452,9 @@
                 <a:solidFill>
                   <a:srgbClr val="F4EFE6"/>
                 </a:solidFill>
-                <a:latin typeface="Playfair Display" pitchFamily="34" charset="0"/>
-                <a:ea typeface="Playfair Display" pitchFamily="34" charset="-122"/>
-                <a:cs typeface="Playfair Display" pitchFamily="34" charset="-120"/>
+                <a:latin typeface="Bridge Playfair" pitchFamily="34" charset="0"/>
+                <a:ea typeface="Bridge Playfair" pitchFamily="34" charset="-122"/>
+                <a:cs typeface="Bridge Playfair" pitchFamily="34" charset="-120"/>
               </a:rPr>
               <a:t>Люция Ахмедиева</a:t>
             </a:r>
@@ -17475,9 +17494,9 @@
                 <a:solidFill>
                   <a:srgbClr val="A39C91"/>
                 </a:solidFill>
-                <a:latin typeface="Manrope" pitchFamily="34" charset="0"/>
-                <a:ea typeface="Manrope" pitchFamily="34" charset="-122"/>
-                <a:cs typeface="Manrope" pitchFamily="34" charset="-120"/>
+                <a:latin typeface="Bridge Manrope" pitchFamily="34" charset="0"/>
+                <a:ea typeface="Bridge Manrope" pitchFamily="34" charset="-122"/>
+                <a:cs typeface="Bridge Manrope" pitchFamily="34" charset="-120"/>
               </a:rPr>
               <a:t>Руководитель сметного отдела · 40+ лет опыта</a:t>
             </a:r>
@@ -17487,7 +17506,7 @@
       </p:sp>
       <p:pic>
         <p:nvPicPr>
-          <p:cNvPr id="22" name="bc7_21" descr="/tmp/claude-0/-home-user-bridge-astro/c468759c-dc39-5c73-8ddc-d9f14d631ba1/scratchpad/assets/t-olga.jpg">    </p:cNvPr>
+          <p:cNvPr id="22" name="bc7_21" descr="/home/user/bridge-astro/presentation/company-2026/assets/t-olga.jpg">    </p:cNvPr>
           <p:cNvPicPr>
             <a:picLocks noChangeAspect="1"/>
           </p:cNvPicPr>
@@ -17538,9 +17557,9 @@
                 <a:solidFill>
                   <a:srgbClr val="F4EFE6"/>
                 </a:solidFill>
-                <a:latin typeface="Playfair Display" pitchFamily="34" charset="0"/>
-                <a:ea typeface="Playfair Display" pitchFamily="34" charset="-122"/>
-                <a:cs typeface="Playfair Display" pitchFamily="34" charset="-120"/>
+                <a:latin typeface="Bridge Playfair" pitchFamily="34" charset="0"/>
+                <a:ea typeface="Bridge Playfair" pitchFamily="34" charset="-122"/>
+                <a:cs typeface="Bridge Playfair" pitchFamily="34" charset="-120"/>
               </a:rPr>
               <a:t>Ольга Митрофанова</a:t>
             </a:r>
@@ -17580,9 +17599,9 @@
                 <a:solidFill>
                   <a:srgbClr val="A39C91"/>
                 </a:solidFill>
-                <a:latin typeface="Manrope" pitchFamily="34" charset="0"/>
-                <a:ea typeface="Manrope" pitchFamily="34" charset="-122"/>
-                <a:cs typeface="Manrope" pitchFamily="34" charset="-120"/>
+                <a:latin typeface="Bridge Manrope" pitchFamily="34" charset="0"/>
+                <a:ea typeface="Bridge Manrope" pitchFamily="34" charset="-122"/>
+                <a:cs typeface="Bridge Manrope" pitchFamily="34" charset="-120"/>
               </a:rPr>
               <a:t>Руководитель отдела качества · аудитор ISO 9001</a:t>
             </a:r>
@@ -19082,9 +19101,9 @@
                 <a:solidFill>
                   <a:srgbClr val="1A1816"/>
                 </a:solidFill>
-                <a:latin typeface="Manrope SemiBold" pitchFamily="34" charset="0"/>
-                <a:ea typeface="Manrope SemiBold" pitchFamily="34" charset="-122"/>
-                <a:cs typeface="Manrope SemiBold" pitchFamily="34" charset="-120"/>
+                <a:latin typeface="Bridge Manrope SemiBold" pitchFamily="34" charset="0"/>
+                <a:ea typeface="Bridge Manrope SemiBold" pitchFamily="34" charset="-122"/>
+                <a:cs typeface="Bridge Manrope SemiBold" pitchFamily="34" charset="-120"/>
               </a:rPr>
               <a:t>08</a:t>
             </a:r>
@@ -19096,9 +19115,9 @@
                 <a:solidFill>
                   <a:srgbClr val="6E655A"/>
                 </a:solidFill>
-                <a:latin typeface="Manrope SemiBold" pitchFamily="34" charset="0"/>
-                <a:ea typeface="Manrope SemiBold" pitchFamily="34" charset="-122"/>
-                <a:cs typeface="Manrope SemiBold" pitchFamily="34" charset="-120"/>
+                <a:latin typeface="Bridge Manrope SemiBold" pitchFamily="34" charset="0"/>
+                <a:ea typeface="Bridge Manrope SemiBold" pitchFamily="34" charset="-122"/>
+                <a:cs typeface="Bridge Manrope SemiBold" pitchFamily="34" charset="-120"/>
               </a:rPr>
               <a:t> / 10</a:t>
             </a:r>
@@ -19135,9 +19154,9 @@
                 <a:solidFill>
                   <a:srgbClr val="6E655A"/>
                 </a:solidFill>
-                <a:latin typeface="Manrope SemiBold" pitchFamily="34" charset="0"/>
-                <a:ea typeface="Manrope SemiBold" pitchFamily="34" charset="-122"/>
-                <a:cs typeface="Manrope SemiBold" pitchFamily="34" charset="-120"/>
+                <a:latin typeface="Bridge Manrope SemiBold" pitchFamily="34" charset="0"/>
+                <a:ea typeface="Bridge Manrope SemiBold" pitchFamily="34" charset="-122"/>
+                <a:cs typeface="Bridge Manrope SemiBold" pitchFamily="34" charset="-120"/>
               </a:rPr>
               <a:t>bridgeconsult.uz</a:t>
             </a:r>
@@ -19174,9 +19193,9 @@
                 <a:solidFill>
                   <a:srgbClr val="6E655A"/>
                 </a:solidFill>
-                <a:latin typeface="Manrope SemiBold" pitchFamily="34" charset="0"/>
-                <a:ea typeface="Manrope SemiBold" pitchFamily="34" charset="-122"/>
-                <a:cs typeface="Manrope SemiBold" pitchFamily="34" charset="-120"/>
+                <a:latin typeface="Bridge Manrope SemiBold" pitchFamily="34" charset="0"/>
+                <a:ea typeface="Bridge Manrope SemiBold" pitchFamily="34" charset="-122"/>
+                <a:cs typeface="Bridge Manrope SemiBold" pitchFamily="34" charset="-120"/>
               </a:rPr>
               <a:t>41.2995° N  ·  69.2401° E</a:t>
             </a:r>
@@ -19236,9 +19255,9 @@
                 <a:solidFill>
                   <a:srgbClr val="9B7C56"/>
                 </a:solidFill>
-                <a:latin typeface="Manrope SemiBold" pitchFamily="34" charset="0"/>
-                <a:ea typeface="Manrope SemiBold" pitchFamily="34" charset="-122"/>
-                <a:cs typeface="Manrope SemiBold" pitchFamily="34" charset="-120"/>
+                <a:latin typeface="Bridge Manrope SemiBold" pitchFamily="34" charset="0"/>
+                <a:ea typeface="Bridge Manrope SemiBold" pitchFamily="34" charset="-122"/>
+                <a:cs typeface="Bridge Manrope SemiBold" pitchFamily="34" charset="-120"/>
               </a:rPr>
               <a:t>ДОВЕРИЕ</a:t>
             </a:r>
@@ -19275,9 +19294,9 @@
                 <a:solidFill>
                   <a:srgbClr val="1A1816"/>
                 </a:solidFill>
-                <a:latin typeface="Playfair Display" pitchFamily="34" charset="0"/>
-                <a:ea typeface="Playfair Display" pitchFamily="34" charset="-122"/>
-                <a:cs typeface="Playfair Display" pitchFamily="34" charset="-120"/>
+                <a:latin typeface="Bridge Playfair" pitchFamily="34" charset="0"/>
+                <a:ea typeface="Bridge Playfair" pitchFamily="34" charset="-122"/>
+                <a:cs typeface="Bridge Playfair" pitchFamily="34" charset="-120"/>
               </a:rPr>
               <a:t>Международное</a:t>
             </a:r>
@@ -19314,9 +19333,9 @@
                 <a:solidFill>
                   <a:srgbClr val="9B7C56"/>
                 </a:solidFill>
-                <a:latin typeface="Playfair Display" pitchFamily="34" charset="0"/>
-                <a:ea typeface="Playfair Display" pitchFamily="34" charset="-122"/>
-                <a:cs typeface="Playfair Display" pitchFamily="34" charset="-120"/>
+                <a:latin typeface="Bridge Playfair" pitchFamily="34" charset="0"/>
+                <a:ea typeface="Bridge Playfair" pitchFamily="34" charset="-122"/>
+                <a:cs typeface="Bridge Playfair" pitchFamily="34" charset="-120"/>
               </a:rPr>
               <a:t>признание</a:t>
             </a:r>
@@ -19356,9 +19375,9 @@
                 <a:solidFill>
                   <a:srgbClr val="6E655A"/>
                 </a:solidFill>
-                <a:latin typeface="Manrope" pitchFamily="34" charset="0"/>
-                <a:ea typeface="Manrope" pitchFamily="34" charset="-122"/>
-                <a:cs typeface="Manrope" pitchFamily="34" charset="-120"/>
+                <a:latin typeface="Bridge Manrope" pitchFamily="34" charset="0"/>
+                <a:ea typeface="Bridge Manrope" pitchFamily="34" charset="-122"/>
+                <a:cs typeface="Bridge Manrope" pitchFamily="34" charset="-120"/>
               </a:rPr>
               <a:t>Руководитель компании — аккредитованный АБР специалист по управлению контрактами и предотвращению споров.</a:t>
             </a:r>
@@ -19418,9 +19437,9 @@
                 <a:solidFill>
                   <a:srgbClr val="9B7C56"/>
                 </a:solidFill>
-                <a:latin typeface="Playfair Display" pitchFamily="34" charset="0"/>
-                <a:ea typeface="Playfair Display" pitchFamily="34" charset="-122"/>
-                <a:cs typeface="Playfair Display" pitchFamily="34" charset="-120"/>
+                <a:latin typeface="Bridge Playfair" pitchFamily="34" charset="0"/>
+                <a:ea typeface="Bridge Playfair" pitchFamily="34" charset="-122"/>
+                <a:cs typeface="Bridge Playfair" pitchFamily="34" charset="-120"/>
               </a:rPr>
               <a:t>FCCE · FCCP</a:t>
             </a:r>
@@ -19457,9 +19476,9 @@
                 <a:solidFill>
                   <a:srgbClr val="1A1816"/>
                 </a:solidFill>
-                <a:latin typeface="Manrope" pitchFamily="34" charset="0"/>
-                <a:ea typeface="Manrope" pitchFamily="34" charset="-122"/>
-                <a:cs typeface="Manrope" pitchFamily="34" charset="-120"/>
+                <a:latin typeface="Bridge Manrope" pitchFamily="34" charset="0"/>
+                <a:ea typeface="Bridge Manrope" pitchFamily="34" charset="-122"/>
+                <a:cs typeface="Bridge Manrope" pitchFamily="34" charset="-120"/>
               </a:rPr>
               <a:t>Сертифицированный консультант FIDIC</a:t>
             </a:r>
@@ -19519,9 +19538,9 @@
                 <a:solidFill>
                   <a:srgbClr val="9B7C56"/>
                 </a:solidFill>
-                <a:latin typeface="Playfair Display" pitchFamily="34" charset="0"/>
-                <a:ea typeface="Playfair Display" pitchFamily="34" charset="-122"/>
-                <a:cs typeface="Playfair Display" pitchFamily="34" charset="-120"/>
+                <a:latin typeface="Bridge Playfair" pitchFamily="34" charset="0"/>
+                <a:ea typeface="Bridge Playfair" pitchFamily="34" charset="-122"/>
+                <a:cs typeface="Bridge Playfair" pitchFamily="34" charset="-120"/>
               </a:rPr>
               <a:t>ADB</a:t>
             </a:r>
@@ -19558,9 +19577,9 @@
                 <a:solidFill>
                   <a:srgbClr val="1A1816"/>
                 </a:solidFill>
-                <a:latin typeface="Manrope" pitchFamily="34" charset="0"/>
-                <a:ea typeface="Manrope" pitchFamily="34" charset="-122"/>
-                <a:cs typeface="Manrope" pitchFamily="34" charset="-120"/>
+                <a:latin typeface="Bridge Manrope" pitchFamily="34" charset="0"/>
+                <a:ea typeface="Bridge Manrope" pitchFamily="34" charset="-122"/>
+                <a:cs typeface="Bridge Manrope" pitchFamily="34" charset="-120"/>
               </a:rPr>
               <a:t>Аккредитация АБР: контракты и споры</a:t>
             </a:r>
@@ -19620,9 +19639,9 @@
                 <a:solidFill>
                   <a:srgbClr val="9B7C56"/>
                 </a:solidFill>
-                <a:latin typeface="Playfair Display" pitchFamily="34" charset="0"/>
-                <a:ea typeface="Playfair Display" pitchFamily="34" charset="-122"/>
-                <a:cs typeface="Playfair Display" pitchFamily="34" charset="-120"/>
+                <a:latin typeface="Bridge Playfair" pitchFamily="34" charset="0"/>
+                <a:ea typeface="Bridge Playfair" pitchFamily="34" charset="-122"/>
+                <a:cs typeface="Bridge Playfair" pitchFamily="34" charset="-120"/>
               </a:rPr>
               <a:t>MCIArb</a:t>
             </a:r>
@@ -19659,9 +19678,9 @@
                 <a:solidFill>
                   <a:srgbClr val="1A1816"/>
                 </a:solidFill>
-                <a:latin typeface="Manrope" pitchFamily="34" charset="0"/>
-                <a:ea typeface="Manrope" pitchFamily="34" charset="-122"/>
-                <a:cs typeface="Manrope" pitchFamily="34" charset="-120"/>
+                <a:latin typeface="Bridge Manrope" pitchFamily="34" charset="0"/>
+                <a:ea typeface="Bridge Manrope" pitchFamily="34" charset="-122"/>
+                <a:cs typeface="Bridge Manrope" pitchFamily="34" charset="-120"/>
               </a:rPr>
               <a:t>Член Королевского института арбитров</a:t>
             </a:r>
@@ -19721,9 +19740,9 @@
                 <a:solidFill>
                   <a:srgbClr val="9B7C56"/>
                 </a:solidFill>
-                <a:latin typeface="Playfair Display" pitchFamily="34" charset="0"/>
-                <a:ea typeface="Playfair Display" pitchFamily="34" charset="-122"/>
-                <a:cs typeface="Playfair Display" pitchFamily="34" charset="-120"/>
+                <a:latin typeface="Bridge Playfair" pitchFamily="34" charset="0"/>
+                <a:ea typeface="Bridge Playfair" pitchFamily="34" charset="-122"/>
+                <a:cs typeface="Bridge Playfair" pitchFamily="34" charset="-120"/>
               </a:rPr>
               <a:t>DRBF</a:t>
             </a:r>
@@ -19760,9 +19779,9 @@
                 <a:solidFill>
                   <a:srgbClr val="1A1816"/>
                 </a:solidFill>
-                <a:latin typeface="Manrope" pitchFamily="34" charset="0"/>
-                <a:ea typeface="Manrope" pitchFamily="34" charset="-122"/>
-                <a:cs typeface="Manrope" pitchFamily="34" charset="-120"/>
+                <a:latin typeface="Bridge Manrope" pitchFamily="34" charset="0"/>
+                <a:ea typeface="Bridge Manrope" pitchFamily="34" charset="-122"/>
+                <a:cs typeface="Bridge Manrope" pitchFamily="34" charset="-120"/>
               </a:rPr>
               <a:t>Практик Совета по разрешению споров</a:t>
             </a:r>
@@ -19822,9 +19841,9 @@
                 <a:solidFill>
                   <a:srgbClr val="9B7C56"/>
                 </a:solidFill>
-                <a:latin typeface="Playfair Display" pitchFamily="34" charset="0"/>
-                <a:ea typeface="Playfair Display" pitchFamily="34" charset="-122"/>
-                <a:cs typeface="Playfair Display" pitchFamily="34" charset="-120"/>
+                <a:latin typeface="Bridge Playfair" pitchFamily="34" charset="0"/>
+                <a:ea typeface="Bridge Playfair" pitchFamily="34" charset="-122"/>
+                <a:cs typeface="Bridge Playfair" pitchFamily="34" charset="-120"/>
               </a:rPr>
               <a:t>ICAC</a:t>
             </a:r>
@@ -19861,9 +19880,9 @@
                 <a:solidFill>
                   <a:srgbClr val="1A1816"/>
                 </a:solidFill>
-                <a:latin typeface="Manrope" pitchFamily="34" charset="0"/>
-                <a:ea typeface="Manrope" pitchFamily="34" charset="-122"/>
-                <a:cs typeface="Manrope" pitchFamily="34" charset="-120"/>
+                <a:latin typeface="Bridge Manrope" pitchFamily="34" charset="0"/>
+                <a:ea typeface="Bridge Manrope" pitchFamily="34" charset="-122"/>
+                <a:cs typeface="Bridge Manrope" pitchFamily="34" charset="-120"/>
               </a:rPr>
               <a:t>Арбитр МКАС при ТПП Республики Узбекистан</a:t>
             </a:r>
@@ -19900,9 +19919,9 @@
                 <a:solidFill>
                   <a:srgbClr val="9B7C56"/>
                 </a:solidFill>
-                <a:latin typeface="Manrope SemiBold" pitchFamily="34" charset="0"/>
-                <a:ea typeface="Manrope SemiBold" pitchFamily="34" charset="-122"/>
-                <a:cs typeface="Manrope SemiBold" pitchFamily="34" charset="-120"/>
+                <a:latin typeface="Bridge Manrope SemiBold" pitchFamily="34" charset="0"/>
+                <a:ea typeface="Bridge Manrope SemiBold" pitchFamily="34" charset="-122"/>
+                <a:cs typeface="Bridge Manrope SemiBold" pitchFamily="34" charset="-120"/>
               </a:rPr>
               <a:t>МФИ, АРБИТРАЖНЫЕ И ПРОФЕССИОНАЛЬНЫЕ СООБЩЕСТВА</a:t>
             </a:r>
@@ -19937,7 +19956,7 @@
       </p:sp>
       <p:pic>
         <p:nvPicPr>
-          <p:cNvPr id="27" name="bc8_26" descr="/tmp/claude-0/-home-user-bridge-astro/c468759c-dc39-5c73-8ddc-d9f14d631ba1/scratchpad/assets/logo-0.png">    </p:cNvPr>
+          <p:cNvPr id="27" name="bc8_26" descr="/home/user/bridge-astro/presentation/company-2026/assets/logo-0.png">    </p:cNvPr>
           <p:cNvPicPr>
             <a:picLocks noChangeAspect="1"/>
           </p:cNvPicPr>
@@ -19988,7 +20007,7 @@
       </p:sp>
       <p:pic>
         <p:nvPicPr>
-          <p:cNvPr id="29" name="bc8_28" descr="/tmp/claude-0/-home-user-bridge-astro/c468759c-dc39-5c73-8ddc-d9f14d631ba1/scratchpad/assets/logo-1.png">    </p:cNvPr>
+          <p:cNvPr id="29" name="bc8_28" descr="/home/user/bridge-astro/presentation/company-2026/assets/logo-1.png">    </p:cNvPr>
           <p:cNvPicPr>
             <a:picLocks noChangeAspect="1"/>
           </p:cNvPicPr>
@@ -20039,7 +20058,7 @@
       </p:sp>
       <p:pic>
         <p:nvPicPr>
-          <p:cNvPr id="31" name="bc8_30" descr="/tmp/claude-0/-home-user-bridge-astro/c468759c-dc39-5c73-8ddc-d9f14d631ba1/scratchpad/assets/logo-2.png">    </p:cNvPr>
+          <p:cNvPr id="31" name="bc8_30" descr="/home/user/bridge-astro/presentation/company-2026/assets/logo-2.png">    </p:cNvPr>
           <p:cNvPicPr>
             <a:picLocks noChangeAspect="1"/>
           </p:cNvPicPr>
@@ -20090,7 +20109,7 @@
       </p:sp>
       <p:pic>
         <p:nvPicPr>
-          <p:cNvPr id="33" name="bc8_32" descr="/tmp/claude-0/-home-user-bridge-astro/c468759c-dc39-5c73-8ddc-d9f14d631ba1/scratchpad/assets/logo-3.png">    </p:cNvPr>
+          <p:cNvPr id="33" name="bc8_32" descr="/home/user/bridge-astro/presentation/company-2026/assets/logo-3.png">    </p:cNvPr>
           <p:cNvPicPr>
             <a:picLocks noChangeAspect="1"/>
           </p:cNvPicPr>
@@ -20141,7 +20160,7 @@
       </p:sp>
       <p:pic>
         <p:nvPicPr>
-          <p:cNvPr id="35" name="bc8_34" descr="/tmp/claude-0/-home-user-bridge-astro/c468759c-dc39-5c73-8ddc-d9f14d631ba1/scratchpad/assets/logo-4.png">    </p:cNvPr>
+          <p:cNvPr id="35" name="bc8_34" descr="/home/user/bridge-astro/presentation/company-2026/assets/logo-4.png">    </p:cNvPr>
           <p:cNvPicPr>
             <a:picLocks noChangeAspect="1"/>
           </p:cNvPicPr>
@@ -20192,7 +20211,7 @@
       </p:sp>
       <p:pic>
         <p:nvPicPr>
-          <p:cNvPr id="37" name="bc8_36" descr="/tmp/claude-0/-home-user-bridge-astro/c468759c-dc39-5c73-8ddc-d9f14d631ba1/scratchpad/assets/logo-5.png">    </p:cNvPr>
+          <p:cNvPr id="37" name="bc8_36" descr="/home/user/bridge-astro/presentation/company-2026/assets/logo-5.png">    </p:cNvPr>
           <p:cNvPicPr>
             <a:picLocks noChangeAspect="1"/>
           </p:cNvPicPr>
@@ -20243,7 +20262,7 @@
       </p:sp>
       <p:pic>
         <p:nvPicPr>
-          <p:cNvPr id="39" name="bc8_38" descr="/tmp/claude-0/-home-user-bridge-astro/c468759c-dc39-5c73-8ddc-d9f14d631ba1/scratchpad/assets/logo-6.png">    </p:cNvPr>
+          <p:cNvPr id="39" name="bc8_38" descr="/home/user/bridge-astro/presentation/company-2026/assets/logo-6.png">    </p:cNvPr>
           <p:cNvPicPr>
             <a:picLocks noChangeAspect="1"/>
           </p:cNvPicPr>
@@ -20294,7 +20313,7 @@
       </p:sp>
       <p:pic>
         <p:nvPicPr>
-          <p:cNvPr id="41" name="bc8_40" descr="/tmp/claude-0/-home-user-bridge-astro/c468759c-dc39-5c73-8ddc-d9f14d631ba1/scratchpad/assets/logo-7.png">    </p:cNvPr>
+          <p:cNvPr id="41" name="bc8_40" descr="/home/user/bridge-astro/presentation/company-2026/assets/logo-7.png">    </p:cNvPr>
           <p:cNvPicPr>
             <a:picLocks noChangeAspect="1"/>
           </p:cNvPicPr>
@@ -20347,9 +20366,9 @@
                 <a:solidFill>
                   <a:srgbClr val="D8BD96"/>
                 </a:solidFill>
-                <a:latin typeface="Playfair Display" pitchFamily="34" charset="0"/>
-                <a:ea typeface="Playfair Display" pitchFamily="34" charset="-122"/>
-                <a:cs typeface="Playfair Display" pitchFamily="34" charset="-120"/>
+                <a:latin typeface="Bridge Playfair" pitchFamily="34" charset="0"/>
+                <a:ea typeface="Bridge Playfair" pitchFamily="34" charset="-122"/>
+                <a:cs typeface="Bridge Playfair" pitchFamily="34" charset="-120"/>
               </a:rPr>
               <a:t>“</a:t>
             </a:r>
@@ -20389,9 +20408,9 @@
                 <a:solidFill>
                   <a:srgbClr val="1A1816"/>
                 </a:solidFill>
-                <a:latin typeface="Playfair Display" pitchFamily="34" charset="0"/>
-                <a:ea typeface="Playfair Display" pitchFamily="34" charset="-122"/>
-                <a:cs typeface="Playfair Display" pitchFamily="34" charset="-120"/>
+                <a:latin typeface="Bridge Playfair" pitchFamily="34" charset="0"/>
+                <a:ea typeface="Bridge Playfair" pitchFamily="34" charset="-122"/>
+                <a:cs typeface="Bridge Playfair" pitchFamily="34" charset="-120"/>
               </a:rPr>
               <a:t>Сильный контракт создаёт не барьеры, а ясность, доверие и общий путь к результату.</a:t>
             </a:r>
@@ -20428,9 +20447,9 @@
                 <a:solidFill>
                   <a:srgbClr val="6E655A"/>
                 </a:solidFill>
-                <a:latin typeface="Manrope SemiBold" pitchFamily="34" charset="0"/>
-                <a:ea typeface="Manrope SemiBold" pitchFamily="34" charset="-122"/>
-                <a:cs typeface="Manrope SemiBold" pitchFamily="34" charset="-120"/>
+                <a:latin typeface="Bridge Manrope SemiBold" pitchFamily="34" charset="0"/>
+                <a:ea typeface="Bridge Manrope SemiBold" pitchFamily="34" charset="-122"/>
+                <a:cs typeface="Bridge Manrope SemiBold" pitchFamily="34" charset="-120"/>
               </a:rPr>
               <a:t>ЛАРИСА БЕЛОУСОВА, ОСНОВАТЕЛЬ</a:t>
             </a:r>
@@ -22209,7 +22228,7 @@
       </p:grpSpPr>
       <p:pic>
         <p:nvPicPr>
-          <p:cNvPr id="2" name="bc9_1" descr="/tmp/claude-0/-home-user-bridge-astro/c468759c-dc39-5c73-8ddc-d9f14d631ba1/scratchpad/assets/why.jpg">    </p:cNvPr>
+          <p:cNvPr id="2" name="bc9_1" descr="/home/user/bridge-astro/presentation/company-2026/assets/why.jpg">    </p:cNvPr>
           <p:cNvPicPr>
             <a:picLocks noChangeAspect="1"/>
           </p:cNvPicPr>
@@ -22260,9 +22279,9 @@
                 <a:solidFill>
                   <a:srgbClr val="F4EFE6"/>
                 </a:solidFill>
-                <a:latin typeface="Manrope SemiBold" pitchFamily="34" charset="0"/>
-                <a:ea typeface="Manrope SemiBold" pitchFamily="34" charset="-122"/>
-                <a:cs typeface="Manrope SemiBold" pitchFamily="34" charset="-120"/>
+                <a:latin typeface="Bridge Manrope SemiBold" pitchFamily="34" charset="0"/>
+                <a:ea typeface="Bridge Manrope SemiBold" pitchFamily="34" charset="-122"/>
+                <a:cs typeface="Bridge Manrope SemiBold" pitchFamily="34" charset="-120"/>
               </a:rPr>
               <a:t>09</a:t>
             </a:r>
@@ -22274,9 +22293,9 @@
                 <a:solidFill>
                   <a:srgbClr val="A39C91"/>
                 </a:solidFill>
-                <a:latin typeface="Manrope SemiBold" pitchFamily="34" charset="0"/>
-                <a:ea typeface="Manrope SemiBold" pitchFamily="34" charset="-122"/>
-                <a:cs typeface="Manrope SemiBold" pitchFamily="34" charset="-120"/>
+                <a:latin typeface="Bridge Manrope SemiBold" pitchFamily="34" charset="0"/>
+                <a:ea typeface="Bridge Manrope SemiBold" pitchFamily="34" charset="-122"/>
+                <a:cs typeface="Bridge Manrope SemiBold" pitchFamily="34" charset="-120"/>
               </a:rPr>
               <a:t> / 10</a:t>
             </a:r>
@@ -22313,9 +22332,9 @@
                 <a:solidFill>
                   <a:srgbClr val="A39C91"/>
                 </a:solidFill>
-                <a:latin typeface="Manrope SemiBold" pitchFamily="34" charset="0"/>
-                <a:ea typeface="Manrope SemiBold" pitchFamily="34" charset="-122"/>
-                <a:cs typeface="Manrope SemiBold" pitchFamily="34" charset="-120"/>
+                <a:latin typeface="Bridge Manrope SemiBold" pitchFamily="34" charset="0"/>
+                <a:ea typeface="Bridge Manrope SemiBold" pitchFamily="34" charset="-122"/>
+                <a:cs typeface="Bridge Manrope SemiBold" pitchFamily="34" charset="-120"/>
               </a:rPr>
               <a:t>bridgeconsult.uz</a:t>
             </a:r>
@@ -22352,9 +22371,9 @@
                 <a:solidFill>
                   <a:srgbClr val="A39C91"/>
                 </a:solidFill>
-                <a:latin typeface="Manrope SemiBold" pitchFamily="34" charset="0"/>
-                <a:ea typeface="Manrope SemiBold" pitchFamily="34" charset="-122"/>
-                <a:cs typeface="Manrope SemiBold" pitchFamily="34" charset="-120"/>
+                <a:latin typeface="Bridge Manrope SemiBold" pitchFamily="34" charset="0"/>
+                <a:ea typeface="Bridge Manrope SemiBold" pitchFamily="34" charset="-122"/>
+                <a:cs typeface="Bridge Manrope SemiBold" pitchFamily="34" charset="-120"/>
               </a:rPr>
               <a:t>41.2995° N  ·  69.2401° E</a:t>
             </a:r>
@@ -22414,9 +22433,9 @@
                 <a:solidFill>
                   <a:srgbClr val="D8BD96"/>
                 </a:solidFill>
-                <a:latin typeface="Manrope SemiBold" pitchFamily="34" charset="0"/>
-                <a:ea typeface="Manrope SemiBold" pitchFamily="34" charset="-122"/>
-                <a:cs typeface="Manrope SemiBold" pitchFamily="34" charset="-120"/>
+                <a:latin typeface="Bridge Manrope SemiBold" pitchFamily="34" charset="0"/>
+                <a:ea typeface="Bridge Manrope SemiBold" pitchFamily="34" charset="-122"/>
+                <a:cs typeface="Bridge Manrope SemiBold" pitchFamily="34" charset="-120"/>
               </a:rPr>
               <a:t>ПОДХОД</a:t>
             </a:r>
@@ -22453,9 +22472,9 @@
                 <a:solidFill>
                   <a:srgbClr val="F4EFE6"/>
                 </a:solidFill>
-                <a:latin typeface="Playfair Display" pitchFamily="34" charset="0"/>
-                <a:ea typeface="Playfair Display" pitchFamily="34" charset="-122"/>
-                <a:cs typeface="Playfair Display" pitchFamily="34" charset="-120"/>
+                <a:latin typeface="Bridge Playfair" pitchFamily="34" charset="0"/>
+                <a:ea typeface="Bridge Playfair" pitchFamily="34" charset="-122"/>
+                <a:cs typeface="Bridge Playfair" pitchFamily="34" charset="-120"/>
               </a:rPr>
               <a:t>Почему выбирают</a:t>
             </a:r>
@@ -22492,9 +22511,9 @@
                 <a:solidFill>
                   <a:srgbClr val="D8BD96"/>
                 </a:solidFill>
-                <a:latin typeface="Playfair Display" pitchFamily="34" charset="0"/>
-                <a:ea typeface="Playfair Display" pitchFamily="34" charset="-122"/>
-                <a:cs typeface="Playfair Display" pitchFamily="34" charset="-120"/>
+                <a:latin typeface="Bridge Playfair" pitchFamily="34" charset="0"/>
+                <a:ea typeface="Bridge Playfair" pitchFamily="34" charset="-122"/>
+                <a:cs typeface="Bridge Playfair" pitchFamily="34" charset="-120"/>
               </a:rPr>
               <a:t>Bridge Consult</a:t>
             </a:r>
@@ -22554,9 +22573,9 @@
                 <a:solidFill>
                   <a:srgbClr val="D8BD96"/>
                 </a:solidFill>
-                <a:latin typeface="Playfair Display" pitchFamily="34" charset="0"/>
-                <a:ea typeface="Playfair Display" pitchFamily="34" charset="-122"/>
-                <a:cs typeface="Playfair Display" pitchFamily="34" charset="-120"/>
+                <a:latin typeface="Bridge Playfair" pitchFamily="34" charset="0"/>
+                <a:ea typeface="Bridge Playfair" pitchFamily="34" charset="-122"/>
+                <a:cs typeface="Bridge Playfair" pitchFamily="34" charset="-120"/>
               </a:rPr>
               <a:t>01</a:t>
             </a:r>
@@ -22593,9 +22612,9 @@
                 <a:solidFill>
                   <a:srgbClr val="F4EFE6"/>
                 </a:solidFill>
-                <a:latin typeface="Manrope SemiBold" pitchFamily="34" charset="0"/>
-                <a:ea typeface="Manrope SemiBold" pitchFamily="34" charset="-122"/>
-                <a:cs typeface="Manrope SemiBold" pitchFamily="34" charset="-120"/>
+                <a:latin typeface="Bridge Manrope SemiBold" pitchFamily="34" charset="0"/>
+                <a:ea typeface="Bridge Manrope SemiBold" pitchFamily="34" charset="-122"/>
+                <a:cs typeface="Bridge Manrope SemiBold" pitchFamily="34" charset="-120"/>
               </a:rPr>
               <a:t>Международный стандарт</a:t>
             </a:r>
@@ -22635,9 +22654,9 @@
                 <a:solidFill>
                   <a:srgbClr val="A39C91"/>
                 </a:solidFill>
-                <a:latin typeface="Manrope" pitchFamily="34" charset="0"/>
-                <a:ea typeface="Manrope" pitchFamily="34" charset="-122"/>
-                <a:cs typeface="Manrope" pitchFamily="34" charset="-120"/>
+                <a:latin typeface="Bridge Manrope" pitchFamily="34" charset="0"/>
+                <a:ea typeface="Bridge Manrope" pitchFamily="34" charset="-122"/>
+                <a:cs typeface="Bridge Manrope" pitchFamily="34" charset="-120"/>
               </a:rPr>
               <a:t>Глубокое понимание проформ FIDIC, EPC-контрактов и требований международных финансовых институтов.</a:t>
             </a:r>
@@ -22697,9 +22716,9 @@
                 <a:solidFill>
                   <a:srgbClr val="D8BD96"/>
                 </a:solidFill>
-                <a:latin typeface="Playfair Display" pitchFamily="34" charset="0"/>
-                <a:ea typeface="Playfair Display" pitchFamily="34" charset="-122"/>
-                <a:cs typeface="Playfair Display" pitchFamily="34" charset="-120"/>
+                <a:latin typeface="Bridge Playfair" pitchFamily="34" charset="0"/>
+                <a:ea typeface="Bridge Playfair" pitchFamily="34" charset="-122"/>
+                <a:cs typeface="Bridge Playfair" pitchFamily="34" charset="-120"/>
               </a:rPr>
               <a:t>02</a:t>
             </a:r>
@@ -22736,9 +22755,9 @@
                 <a:solidFill>
                   <a:srgbClr val="F4EFE6"/>
                 </a:solidFill>
-                <a:latin typeface="Manrope SemiBold" pitchFamily="34" charset="0"/>
-                <a:ea typeface="Manrope SemiBold" pitchFamily="34" charset="-122"/>
-                <a:cs typeface="Manrope SemiBold" pitchFamily="34" charset="-120"/>
+                <a:latin typeface="Bridge Manrope SemiBold" pitchFamily="34" charset="0"/>
+                <a:ea typeface="Bridge Manrope SemiBold" pitchFamily="34" charset="-122"/>
+                <a:cs typeface="Bridge Manrope SemiBold" pitchFamily="34" charset="-120"/>
               </a:rPr>
               <a:t>Локальная адаптация</a:t>
             </a:r>
@@ -22778,9 +22797,9 @@
                 <a:solidFill>
                   <a:srgbClr val="A39C91"/>
                 </a:solidFill>
-                <a:latin typeface="Manrope" pitchFamily="34" charset="0"/>
-                <a:ea typeface="Manrope" pitchFamily="34" charset="-122"/>
-                <a:cs typeface="Manrope" pitchFamily="34" charset="-120"/>
+                <a:latin typeface="Bridge Manrope" pitchFamily="34" charset="0"/>
+                <a:ea typeface="Bridge Manrope" pitchFamily="34" charset="-122"/>
+                <a:cs typeface="Bridge Manrope" pitchFamily="34" charset="-120"/>
               </a:rPr>
               <a:t>Интеграция международных контрактов в правовое поле Республики Узбекистан без потери их юридической силы.</a:t>
             </a:r>
@@ -22840,9 +22859,9 @@
                 <a:solidFill>
                   <a:srgbClr val="D8BD96"/>
                 </a:solidFill>
-                <a:latin typeface="Playfair Display" pitchFamily="34" charset="0"/>
-                <a:ea typeface="Playfair Display" pitchFamily="34" charset="-122"/>
-                <a:cs typeface="Playfair Display" pitchFamily="34" charset="-120"/>
+                <a:latin typeface="Bridge Playfair" pitchFamily="34" charset="0"/>
+                <a:ea typeface="Bridge Playfair" pitchFamily="34" charset="-122"/>
+                <a:cs typeface="Bridge Playfair" pitchFamily="34" charset="-120"/>
               </a:rPr>
               <a:t>03</a:t>
             </a:r>
@@ -22879,9 +22898,9 @@
                 <a:solidFill>
                   <a:srgbClr val="F4EFE6"/>
                 </a:solidFill>
-                <a:latin typeface="Manrope SemiBold" pitchFamily="34" charset="0"/>
-                <a:ea typeface="Manrope SemiBold" pitchFamily="34" charset="-122"/>
-                <a:cs typeface="Manrope SemiBold" pitchFamily="34" charset="-120"/>
+                <a:latin typeface="Bridge Manrope SemiBold" pitchFamily="34" charset="0"/>
+                <a:ea typeface="Bridge Manrope SemiBold" pitchFamily="34" charset="-122"/>
+                <a:cs typeface="Bridge Manrope SemiBold" pitchFamily="34" charset="-120"/>
               </a:rPr>
               <a:t>Комплексная защита</a:t>
             </a:r>
@@ -22921,9 +22940,9 @@
                 <a:solidFill>
                   <a:srgbClr val="A39C91"/>
                 </a:solidFill>
-                <a:latin typeface="Manrope" pitchFamily="34" charset="0"/>
-                <a:ea typeface="Manrope" pitchFamily="34" charset="-122"/>
-                <a:cs typeface="Manrope" pitchFamily="34" charset="-120"/>
+                <a:latin typeface="Bridge Manrope" pitchFamily="34" charset="0"/>
+                <a:ea typeface="Bridge Manrope" pitchFamily="34" charset="-122"/>
+                <a:cs typeface="Bridge Manrope" pitchFamily="34" charset="-120"/>
               </a:rPr>
               <a:t>Интересы клиента на всех уровнях: от сметного аудита и претензий до представительства в арбитраже.</a:t>
             </a:r>

--- a/presentation/company-2026/BRIDGE-Consult-presentation.pptx
+++ b/presentation/company-2026/BRIDGE-Consult-presentation.pptx
@@ -1,6 +1,6 @@
 
 <file path=ppt/presentation.xml><?xml version="1.0" encoding="utf-8"?>
-<p:presentation xmlns:a="http://schemas.openxmlformats.org/drawingml/2006/main" xmlns:r="http://schemas.openxmlformats.org/officeDocument/2006/relationships" xmlns:p="http://schemas.openxmlformats.org/presentationml/2006/main" embedTrueTypeFonts="1" autoCompressPictures="0">
+<p:presentation xmlns:a="http://schemas.openxmlformats.org/drawingml/2006/main" xmlns:r="http://schemas.openxmlformats.org/officeDocument/2006/relationships" xmlns:p="http://schemas.openxmlformats.org/presentationml/2006/main" saveSubsetFonts="1" autoCompressPictures="0">
   <p:sldMasterIdLst>
     <p:sldMasterId id="2147483648" r:id="rId1"/>
   </p:sldMasterIdLst>
@@ -21,25 +21,6 @@
   </p:notesMasterIdLst>
   <p:sldSz cx="12192000" cy="6858000"/>
   <p:notesSz cx="6858000" cy="12192000"/>
-  <p:embeddedFontLst>
-    <p:embeddedFont>
-      <p:font typeface="Bridge Manrope" pitchFamily="2" charset="0"/>
-      <p:regular r:id="rIdFont1"/>
-    </p:embeddedFont>
-    <p:embeddedFont>
-      <p:font typeface="Bridge Manrope SemiBold" pitchFamily="2" charset="0"/>
-      <p:regular r:id="rIdFont2"/>
-    </p:embeddedFont>
-    <p:embeddedFont>
-      <p:font typeface="Bridge Manrope ExtraBold" pitchFamily="2" charset="0"/>
-      <p:regular r:id="rIdFont3"/>
-    </p:embeddedFont>
-    <p:embeddedFont>
-      <p:font typeface="Bridge Playfair" pitchFamily="2" charset="0"/>
-      <p:regular r:id="rIdFont4"/>
-      <p:italic r:id="rIdFont5"/>
-    </p:embeddedFont>
-  </p:embeddedFontLst>
   <p:defaultTextStyle>
     <a:lvl1pPr marL="0" algn="l" defTabSz="914400" rtl="0" eaLnBrk="1" latinLnBrk="0" hangingPunct="1">
       <a:defRPr sz="1800" kern="1200">
@@ -1791,13 +1772,13 @@
               <a:buNone/>
             </a:pPr>
             <a:r>
-              <a:rPr lang="en-US" sz="900" spc="300" kern="0" dirty="0">
+              <a:rPr lang="en-US" sz="900" b="1" spc="300" kern="0" dirty="0">
                 <a:solidFill>
                   <a:srgbClr val="D8BD96"/>
                 </a:solidFill>
-                <a:latin typeface="Bridge Manrope SemiBold" pitchFamily="34" charset="0"/>
-                <a:ea typeface="Bridge Manrope SemiBold" pitchFamily="34" charset="-122"/>
-                <a:cs typeface="Bridge Manrope SemiBold" pitchFamily="34" charset="-120"/>
+                <a:latin typeface="Arial" pitchFamily="34" charset="0"/>
+                <a:ea typeface="Arial" pitchFamily="34" charset="-122"/>
+                <a:cs typeface="Arial" pitchFamily="34" charset="-120"/>
               </a:rPr>
               <a:t>КОНТРАКТНЫЙ ИНЖИНИРИНГ · FIDIC / EPC</a:t>
             </a:r>
@@ -1834,9 +1815,9 @@
                 <a:solidFill>
                   <a:srgbClr val="F4EFE6"/>
                 </a:solidFill>
-                <a:latin typeface="Bridge Playfair" pitchFamily="34" charset="0"/>
-                <a:ea typeface="Bridge Playfair" pitchFamily="34" charset="-122"/>
-                <a:cs typeface="Bridge Playfair" pitchFamily="34" charset="-120"/>
+                <a:latin typeface="Georgia" pitchFamily="34" charset="0"/>
+                <a:ea typeface="Georgia" pitchFamily="34" charset="-122"/>
+                <a:cs typeface="Georgia" pitchFamily="34" charset="-120"/>
               </a:rPr>
               <a:t>Контракты,</a:t>
             </a:r>
@@ -1873,9 +1854,9 @@
                 <a:solidFill>
                   <a:srgbClr val="F4EFE6"/>
                 </a:solidFill>
-                <a:latin typeface="Bridge Playfair" pitchFamily="34" charset="0"/>
-                <a:ea typeface="Bridge Playfair" pitchFamily="34" charset="-122"/>
-                <a:cs typeface="Bridge Playfair" pitchFamily="34" charset="-120"/>
+                <a:latin typeface="Georgia" pitchFamily="34" charset="0"/>
+                <a:ea typeface="Georgia" pitchFamily="34" charset="-122"/>
+                <a:cs typeface="Georgia" pitchFamily="34" charset="-120"/>
               </a:rPr>
               <a:t>которые работают</a:t>
             </a:r>
@@ -1912,9 +1893,9 @@
                 <a:solidFill>
                   <a:srgbClr val="D8BD96"/>
                 </a:solidFill>
-                <a:latin typeface="Bridge Playfair" pitchFamily="34" charset="0"/>
-                <a:ea typeface="Bridge Playfair" pitchFamily="34" charset="-122"/>
-                <a:cs typeface="Bridge Playfair" pitchFamily="34" charset="-120"/>
+                <a:latin typeface="Georgia" pitchFamily="34" charset="0"/>
+                <a:ea typeface="Georgia" pitchFamily="34" charset="-122"/>
+                <a:cs typeface="Georgia" pitchFamily="34" charset="-120"/>
               </a:rPr>
               <a:t>на проект.</a:t>
             </a:r>
@@ -1954,9 +1935,9 @@
                 <a:solidFill>
                   <a:srgbClr val="A39C91"/>
                 </a:solidFill>
-                <a:latin typeface="Bridge Manrope" pitchFamily="34" charset="0"/>
-                <a:ea typeface="Bridge Manrope" pitchFamily="34" charset="-122"/>
-                <a:cs typeface="Bridge Manrope" pitchFamily="34" charset="-120"/>
+                <a:latin typeface="Arial" pitchFamily="34" charset="0"/>
+                <a:ea typeface="Arial" pitchFamily="34" charset="-122"/>
+                <a:cs typeface="Arial" pitchFamily="34" charset="-120"/>
               </a:rPr>
               <a:t>Независимый консалтинг по инфраструктурным контрактам, претензиям и разрешению споров в проектах, финансируемых международными финансовыми институтами.</a:t>
             </a:r>
@@ -1989,13 +1970,13 @@
               <a:buNone/>
             </a:pPr>
             <a:r>
-              <a:rPr lang="en-US" sz="800" spc="200" kern="0" dirty="0">
+              <a:rPr lang="en-US" sz="800" b="1" spc="200" kern="0" dirty="0">
                 <a:solidFill>
                   <a:srgbClr val="A39C91"/>
                 </a:solidFill>
-                <a:latin typeface="Bridge Manrope SemiBold" pitchFamily="34" charset="0"/>
-                <a:ea typeface="Bridge Manrope SemiBold" pitchFamily="34" charset="-122"/>
-                <a:cs typeface="Bridge Manrope SemiBold" pitchFamily="34" charset="-120"/>
+                <a:latin typeface="Arial" pitchFamily="34" charset="0"/>
+                <a:ea typeface="Arial" pitchFamily="34" charset="-122"/>
+                <a:cs typeface="Arial" pitchFamily="34" charset="-120"/>
               </a:rPr>
               <a:t>Презентация компании  ·  Ташкент  ·  2026</a:t>
             </a:r>
@@ -2028,13 +2009,13 @@
               <a:buNone/>
             </a:pPr>
             <a:r>
-              <a:rPr lang="en-US" sz="800" spc="200" kern="0" dirty="0">
+              <a:rPr lang="en-US" sz="800" b="1" spc="200" kern="0" dirty="0">
                 <a:solidFill>
                   <a:srgbClr val="A39C91"/>
                 </a:solidFill>
-                <a:latin typeface="Bridge Manrope SemiBold" pitchFamily="34" charset="0"/>
-                <a:ea typeface="Bridge Manrope SemiBold" pitchFamily="34" charset="-122"/>
-                <a:cs typeface="Bridge Manrope SemiBold" pitchFamily="34" charset="-120"/>
+                <a:latin typeface="Arial" pitchFamily="34" charset="0"/>
+                <a:ea typeface="Arial" pitchFamily="34" charset="-122"/>
+                <a:cs typeface="Arial" pitchFamily="34" charset="-120"/>
               </a:rPr>
               <a:t>41.2995° N  ·  69.2401° E</a:t>
             </a:r>
@@ -2745,13 +2726,13 @@
               <a:buNone/>
             </a:pPr>
             <a:r>
-              <a:rPr lang="en-US" sz="900" spc="200" kern="0" dirty="0">
+              <a:rPr lang="en-US" sz="900" b="1" spc="200" kern="0" dirty="0">
                 <a:solidFill>
                   <a:srgbClr val="F4EFE6"/>
                 </a:solidFill>
-                <a:latin typeface="Bridge Manrope SemiBold" pitchFamily="34" charset="0"/>
-                <a:ea typeface="Bridge Manrope SemiBold" pitchFamily="34" charset="-122"/>
-                <a:cs typeface="Bridge Manrope SemiBold" pitchFamily="34" charset="-120"/>
+                <a:latin typeface="Arial" pitchFamily="34" charset="0"/>
+                <a:ea typeface="Arial" pitchFamily="34" charset="-122"/>
+                <a:cs typeface="Arial" pitchFamily="34" charset="-120"/>
               </a:rPr>
               <a:t>10</a:t>
             </a:r>
@@ -2759,13 +2740,13 @@
               <a:buNone/>
             </a:pPr>
             <a:r>
-              <a:rPr lang="en-US" sz="900" spc="200" kern="0" dirty="0">
+              <a:rPr lang="en-US" sz="900" b="1" spc="200" kern="0" dirty="0">
                 <a:solidFill>
                   <a:srgbClr val="A39C91"/>
                 </a:solidFill>
-                <a:latin typeface="Bridge Manrope SemiBold" pitchFamily="34" charset="0"/>
-                <a:ea typeface="Bridge Manrope SemiBold" pitchFamily="34" charset="-122"/>
-                <a:cs typeface="Bridge Manrope SemiBold" pitchFamily="34" charset="-120"/>
+                <a:latin typeface="Arial" pitchFamily="34" charset="0"/>
+                <a:ea typeface="Arial" pitchFamily="34" charset="-122"/>
+                <a:cs typeface="Arial" pitchFamily="34" charset="-120"/>
               </a:rPr>
               <a:t> / 10</a:t>
             </a:r>
@@ -2821,13 +2802,13 @@
               <a:buNone/>
             </a:pPr>
             <a:r>
-              <a:rPr lang="en-US" sz="900" spc="300" kern="0" dirty="0">
+              <a:rPr lang="en-US" sz="900" b="1" spc="300" kern="0" dirty="0">
                 <a:solidFill>
                   <a:srgbClr val="D8BD96"/>
                 </a:solidFill>
-                <a:latin typeface="Bridge Manrope SemiBold" pitchFamily="34" charset="0"/>
-                <a:ea typeface="Bridge Manrope SemiBold" pitchFamily="34" charset="-122"/>
-                <a:cs typeface="Bridge Manrope SemiBold" pitchFamily="34" charset="-120"/>
+                <a:latin typeface="Arial" pitchFamily="34" charset="0"/>
+                <a:ea typeface="Arial" pitchFamily="34" charset="-122"/>
+                <a:cs typeface="Arial" pitchFamily="34" charset="-120"/>
               </a:rPr>
               <a:t>КОНТАКТЫ</a:t>
             </a:r>
@@ -2864,9 +2845,9 @@
                 <a:solidFill>
                   <a:srgbClr val="F4EFE6"/>
                 </a:solidFill>
-                <a:latin typeface="Bridge Playfair" pitchFamily="34" charset="0"/>
-                <a:ea typeface="Bridge Playfair" pitchFamily="34" charset="-122"/>
-                <a:cs typeface="Bridge Playfair" pitchFamily="34" charset="-120"/>
+                <a:latin typeface="Georgia" pitchFamily="34" charset="0"/>
+                <a:ea typeface="Georgia" pitchFamily="34" charset="-122"/>
+                <a:cs typeface="Georgia" pitchFamily="34" charset="-120"/>
               </a:rPr>
               <a:t>Начнём</a:t>
             </a:r>
@@ -2903,9 +2884,9 @@
                 <a:solidFill>
                   <a:srgbClr val="D8BD96"/>
                 </a:solidFill>
-                <a:latin typeface="Bridge Playfair" pitchFamily="34" charset="0"/>
-                <a:ea typeface="Bridge Playfair" pitchFamily="34" charset="-122"/>
-                <a:cs typeface="Bridge Playfair" pitchFamily="34" charset="-120"/>
+                <a:latin typeface="Georgia" pitchFamily="34" charset="0"/>
+                <a:ea typeface="Georgia" pitchFamily="34" charset="-122"/>
+                <a:cs typeface="Georgia" pitchFamily="34" charset="-120"/>
               </a:rPr>
               <a:t>с разговора.</a:t>
             </a:r>
@@ -2938,13 +2919,13 @@
               <a:buNone/>
             </a:pPr>
             <a:r>
-              <a:rPr lang="en-US" sz="800" spc="250" kern="0" dirty="0">
+              <a:rPr lang="en-US" sz="800" b="1" spc="250" kern="0" dirty="0">
                 <a:solidFill>
                   <a:srgbClr val="D8BD96"/>
                 </a:solidFill>
-                <a:latin typeface="Bridge Manrope SemiBold" pitchFamily="34" charset="0"/>
-                <a:ea typeface="Bridge Manrope SemiBold" pitchFamily="34" charset="-122"/>
-                <a:cs typeface="Bridge Manrope SemiBold" pitchFamily="34" charset="-120"/>
+                <a:latin typeface="Arial" pitchFamily="34" charset="0"/>
+                <a:ea typeface="Arial" pitchFamily="34" charset="-122"/>
+                <a:cs typeface="Arial" pitchFamily="34" charset="-120"/>
               </a:rPr>
               <a:t>ТЕЛЕФОН</a:t>
             </a:r>
@@ -2977,13 +2958,13 @@
               <a:buNone/>
             </a:pPr>
             <a:r>
-              <a:rPr lang="en-US" sz="1400" u="sng" dirty="0">
+              <a:rPr lang="en-US" sz="1400" b="1" u="sng" dirty="0">
                 <a:solidFill>
                   <a:srgbClr val="F4EFE6"/>
                 </a:solidFill>
-                <a:latin typeface="Bridge Manrope SemiBold" pitchFamily="34" charset="0"/>
-                <a:ea typeface="Bridge Manrope SemiBold" pitchFamily="34" charset="-122"/>
-                <a:cs typeface="Bridge Manrope SemiBold" pitchFamily="34" charset="-120"/>
+                <a:latin typeface="Arial" pitchFamily="34" charset="0"/>
+                <a:ea typeface="Arial" pitchFamily="34" charset="-122"/>
+                <a:cs typeface="Arial" pitchFamily="34" charset="-120"/>
                 <a:hlinkClick r:id="rId3" invalidUrl="" action="" tgtFrame="" tooltip="" history="1" highlightClick="0" endSnd="0">
                   <a:extLst>
                     <a:ext uri="{A12FA001-AC4F-418D-AE19-62706E023703}">
@@ -3023,13 +3004,13 @@
               <a:buNone/>
             </a:pPr>
             <a:r>
-              <a:rPr lang="en-US" sz="800" spc="250" kern="0" dirty="0">
+              <a:rPr lang="en-US" sz="800" b="1" spc="250" kern="0" dirty="0">
                 <a:solidFill>
                   <a:srgbClr val="D8BD96"/>
                 </a:solidFill>
-                <a:latin typeface="Bridge Manrope SemiBold" pitchFamily="34" charset="0"/>
-                <a:ea typeface="Bridge Manrope SemiBold" pitchFamily="34" charset="-122"/>
-                <a:cs typeface="Bridge Manrope SemiBold" pitchFamily="34" charset="-120"/>
+                <a:latin typeface="Arial" pitchFamily="34" charset="0"/>
+                <a:ea typeface="Arial" pitchFamily="34" charset="-122"/>
+                <a:cs typeface="Arial" pitchFamily="34" charset="-120"/>
               </a:rPr>
               <a:t>EMAIL</a:t>
             </a:r>
@@ -3062,13 +3043,13 @@
               <a:buNone/>
             </a:pPr>
             <a:r>
-              <a:rPr lang="en-US" sz="1400" u="sng" dirty="0">
+              <a:rPr lang="en-US" sz="1400" b="1" u="sng" dirty="0">
                 <a:solidFill>
                   <a:srgbClr val="F4EFE6"/>
                 </a:solidFill>
-                <a:latin typeface="Bridge Manrope SemiBold" pitchFamily="34" charset="0"/>
-                <a:ea typeface="Bridge Manrope SemiBold" pitchFamily="34" charset="-122"/>
-                <a:cs typeface="Bridge Manrope SemiBold" pitchFamily="34" charset="-120"/>
+                <a:latin typeface="Arial" pitchFamily="34" charset="0"/>
+                <a:ea typeface="Arial" pitchFamily="34" charset="-122"/>
+                <a:cs typeface="Arial" pitchFamily="34" charset="-120"/>
                 <a:hlinkClick r:id="rId4" invalidUrl="" action="" tgtFrame="" tooltip="" history="1" highlightClick="0" endSnd="0">
                   <a:extLst>
                     <a:ext uri="{A12FA001-AC4F-418D-AE19-62706E023703}">
@@ -3108,13 +3089,13 @@
               <a:buNone/>
             </a:pPr>
             <a:r>
-              <a:rPr lang="en-US" sz="800" spc="250" kern="0" dirty="0">
+              <a:rPr lang="en-US" sz="800" b="1" spc="250" kern="0" dirty="0">
                 <a:solidFill>
                   <a:srgbClr val="D8BD96"/>
                 </a:solidFill>
-                <a:latin typeface="Bridge Manrope SemiBold" pitchFamily="34" charset="0"/>
-                <a:ea typeface="Bridge Manrope SemiBold" pitchFamily="34" charset="-122"/>
-                <a:cs typeface="Bridge Manrope SemiBold" pitchFamily="34" charset="-120"/>
+                <a:latin typeface="Arial" pitchFamily="34" charset="0"/>
+                <a:ea typeface="Arial" pitchFamily="34" charset="-122"/>
+                <a:cs typeface="Arial" pitchFamily="34" charset="-120"/>
               </a:rPr>
               <a:t>САЙТ</a:t>
             </a:r>
@@ -3147,13 +3128,13 @@
               <a:buNone/>
             </a:pPr>
             <a:r>
-              <a:rPr lang="en-US" sz="1400" u="sng" dirty="0">
+              <a:rPr lang="en-US" sz="1400" b="1" u="sng" dirty="0">
                 <a:solidFill>
                   <a:srgbClr val="F4EFE6"/>
                 </a:solidFill>
-                <a:latin typeface="Bridge Manrope SemiBold" pitchFamily="34" charset="0"/>
-                <a:ea typeface="Bridge Manrope SemiBold" pitchFamily="34" charset="-122"/>
-                <a:cs typeface="Bridge Manrope SemiBold" pitchFamily="34" charset="-120"/>
+                <a:latin typeface="Arial" pitchFamily="34" charset="0"/>
+                <a:ea typeface="Arial" pitchFamily="34" charset="-122"/>
+                <a:cs typeface="Arial" pitchFamily="34" charset="-120"/>
                 <a:hlinkClick r:id="rId5" invalidUrl="" action="" tgtFrame="" tooltip="" history="1" highlightClick="0" endSnd="0">
                   <a:extLst>
                     <a:ext uri="{A12FA001-AC4F-418D-AE19-62706E023703}">
@@ -3193,13 +3174,13 @@
               <a:buNone/>
             </a:pPr>
             <a:r>
-              <a:rPr lang="en-US" sz="800" spc="250" kern="0" dirty="0">
+              <a:rPr lang="en-US" sz="800" b="1" spc="250" kern="0" dirty="0">
                 <a:solidFill>
                   <a:srgbClr val="D8BD96"/>
                 </a:solidFill>
-                <a:latin typeface="Bridge Manrope SemiBold" pitchFamily="34" charset="0"/>
-                <a:ea typeface="Bridge Manrope SemiBold" pitchFamily="34" charset="-122"/>
-                <a:cs typeface="Bridge Manrope SemiBold" pitchFamily="34" charset="-120"/>
+                <a:latin typeface="Arial" pitchFamily="34" charset="0"/>
+                <a:ea typeface="Arial" pitchFamily="34" charset="-122"/>
+                <a:cs typeface="Arial" pitchFamily="34" charset="-120"/>
               </a:rPr>
               <a:t>TELEGRAM</a:t>
             </a:r>
@@ -3232,13 +3213,13 @@
               <a:buNone/>
             </a:pPr>
             <a:r>
-              <a:rPr lang="en-US" sz="1400" u="sng" dirty="0">
+              <a:rPr lang="en-US" sz="1400" b="1" u="sng" dirty="0">
                 <a:solidFill>
                   <a:srgbClr val="F4EFE6"/>
                 </a:solidFill>
-                <a:latin typeface="Bridge Manrope SemiBold" pitchFamily="34" charset="0"/>
-                <a:ea typeface="Bridge Manrope SemiBold" pitchFamily="34" charset="-122"/>
-                <a:cs typeface="Bridge Manrope SemiBold" pitchFamily="34" charset="-120"/>
+                <a:latin typeface="Arial" pitchFamily="34" charset="0"/>
+                <a:ea typeface="Arial" pitchFamily="34" charset="-122"/>
+                <a:cs typeface="Arial" pitchFamily="34" charset="-120"/>
                 <a:hlinkClick r:id="rId6" invalidUrl="" action="" tgtFrame="" tooltip="" history="1" highlightClick="0" endSnd="0">
                   <a:extLst>
                     <a:ext uri="{A12FA001-AC4F-418D-AE19-62706E023703}">
@@ -3278,13 +3259,13 @@
               <a:buNone/>
             </a:pPr>
             <a:r>
-              <a:rPr lang="en-US" sz="800" spc="250" kern="0" dirty="0">
+              <a:rPr lang="en-US" sz="800" b="1" spc="250" kern="0" dirty="0">
                 <a:solidFill>
                   <a:srgbClr val="D8BD96"/>
                 </a:solidFill>
-                <a:latin typeface="Bridge Manrope SemiBold" pitchFamily="34" charset="0"/>
-                <a:ea typeface="Bridge Manrope SemiBold" pitchFamily="34" charset="-122"/>
-                <a:cs typeface="Bridge Manrope SemiBold" pitchFamily="34" charset="-120"/>
+                <a:latin typeface="Arial" pitchFamily="34" charset="0"/>
+                <a:ea typeface="Arial" pitchFamily="34" charset="-122"/>
+                <a:cs typeface="Arial" pitchFamily="34" charset="-120"/>
               </a:rPr>
               <a:t>АДРЕС</a:t>
             </a:r>
@@ -3321,9 +3302,9 @@
                 <a:solidFill>
                   <a:srgbClr val="F4EFE6"/>
                 </a:solidFill>
-                <a:latin typeface="Bridge Manrope" pitchFamily="34" charset="0"/>
-                <a:ea typeface="Bridge Manrope" pitchFamily="34" charset="-122"/>
-                <a:cs typeface="Bridge Manrope" pitchFamily="34" charset="-120"/>
+                <a:latin typeface="Arial" pitchFamily="34" charset="0"/>
+                <a:ea typeface="Arial" pitchFamily="34" charset="-122"/>
+                <a:cs typeface="Arial" pitchFamily="34" charset="-120"/>
               </a:rPr>
               <a:t>100180, Ташкент, Юнусабадский район, ул. Ахмада Дониша, 12 квартал, 20А</a:t>
             </a:r>
@@ -3405,13 +3386,13 @@
               <a:buNone/>
             </a:pPr>
             <a:r>
-              <a:rPr lang="en-US" sz="750" spc="200" kern="0" dirty="0">
+              <a:rPr lang="en-US" sz="750" b="1" spc="200" kern="0" dirty="0">
                 <a:solidFill>
                   <a:srgbClr val="A39C91"/>
                 </a:solidFill>
-                <a:latin typeface="Bridge Manrope SemiBold" pitchFamily="34" charset="0"/>
-                <a:ea typeface="Bridge Manrope SemiBold" pitchFamily="34" charset="-122"/>
-                <a:cs typeface="Bridge Manrope SemiBold" pitchFamily="34" charset="-120"/>
+                <a:latin typeface="Arial" pitchFamily="34" charset="0"/>
+                <a:ea typeface="Arial" pitchFamily="34" charset="-122"/>
+                <a:cs typeface="Arial" pitchFamily="34" charset="-120"/>
               </a:rPr>
               <a:t>СКАНИРУЙТЕ — САЙТ КОМПАНИИ</a:t>
             </a:r>
@@ -3444,13 +3425,13 @@
               <a:buNone/>
             </a:pPr>
             <a:r>
-              <a:rPr lang="en-US" sz="800" spc="200" kern="0" dirty="0">
+              <a:rPr lang="en-US" sz="800" b="1" spc="200" kern="0" dirty="0">
                 <a:solidFill>
                   <a:srgbClr val="A39C91"/>
                 </a:solidFill>
-                <a:latin typeface="Bridge Manrope SemiBold" pitchFamily="34" charset="0"/>
-                <a:ea typeface="Bridge Manrope SemiBold" pitchFamily="34" charset="-122"/>
-                <a:cs typeface="Bridge Manrope SemiBold" pitchFamily="34" charset="-120"/>
+                <a:latin typeface="Arial" pitchFamily="34" charset="0"/>
+                <a:ea typeface="Arial" pitchFamily="34" charset="-122"/>
+                <a:cs typeface="Arial" pitchFamily="34" charset="-120"/>
               </a:rPr>
               <a:t>Строим связи — достигаем результата</a:t>
             </a:r>
@@ -4716,13 +4697,13 @@
               <a:buNone/>
             </a:pPr>
             <a:r>
-              <a:rPr lang="en-US" sz="900" spc="300" kern="0" dirty="0">
+              <a:rPr lang="en-US" sz="900" b="1" spc="300" kern="0" dirty="0">
                 <a:solidFill>
                   <a:srgbClr val="D8BD96"/>
                 </a:solidFill>
-                <a:latin typeface="Bridge Manrope SemiBold" pitchFamily="34" charset="0"/>
-                <a:ea typeface="Bridge Manrope SemiBold" pitchFamily="34" charset="-122"/>
-                <a:cs typeface="Bridge Manrope SemiBold" pitchFamily="34" charset="-120"/>
+                <a:latin typeface="Arial" pitchFamily="34" charset="0"/>
+                <a:ea typeface="Arial" pitchFamily="34" charset="-122"/>
+                <a:cs typeface="Arial" pitchFamily="34" charset="-120"/>
               </a:rPr>
               <a:t>С 2016 ГОДА</a:t>
             </a:r>
@@ -4759,9 +4740,9 @@
                 <a:solidFill>
                   <a:srgbClr val="F4EFE6"/>
                 </a:solidFill>
-                <a:latin typeface="Bridge Playfair" pitchFamily="34" charset="0"/>
-                <a:ea typeface="Bridge Playfair" pitchFamily="34" charset="-122"/>
-                <a:cs typeface="Bridge Playfair" pitchFamily="34" charset="-120"/>
+                <a:latin typeface="Georgia" pitchFamily="34" charset="0"/>
+                <a:ea typeface="Georgia" pitchFamily="34" charset="-122"/>
+                <a:cs typeface="Georgia" pitchFamily="34" charset="-120"/>
               </a:rPr>
               <a:t>2016</a:t>
             </a:r>
@@ -4798,9 +4779,9 @@
                 <a:solidFill>
                   <a:srgbClr val="F4EFE6"/>
                 </a:solidFill>
-                <a:latin typeface="Bridge Manrope" pitchFamily="34" charset="0"/>
-                <a:ea typeface="Bridge Manrope" pitchFamily="34" charset="-122"/>
-                <a:cs typeface="Bridge Manrope" pitchFamily="34" charset="-120"/>
+                <a:latin typeface="Arial" pitchFamily="34" charset="0"/>
+                <a:ea typeface="Arial" pitchFamily="34" charset="-122"/>
+                <a:cs typeface="Arial" pitchFamily="34" charset="-120"/>
               </a:rPr>
               <a:t>Зарегистрирована в Республике Узбекистан</a:t>
             </a:r>
@@ -4833,13 +4814,13 @@
               <a:buNone/>
             </a:pPr>
             <a:r>
-              <a:rPr lang="en-US" sz="900" spc="200" kern="0" dirty="0">
+              <a:rPr lang="en-US" sz="900" b="1" spc="200" kern="0" dirty="0">
                 <a:solidFill>
                   <a:srgbClr val="1A1816"/>
                 </a:solidFill>
-                <a:latin typeface="Bridge Manrope SemiBold" pitchFamily="34" charset="0"/>
-                <a:ea typeface="Bridge Manrope SemiBold" pitchFamily="34" charset="-122"/>
-                <a:cs typeface="Bridge Manrope SemiBold" pitchFamily="34" charset="-120"/>
+                <a:latin typeface="Arial" pitchFamily="34" charset="0"/>
+                <a:ea typeface="Arial" pitchFamily="34" charset="-122"/>
+                <a:cs typeface="Arial" pitchFamily="34" charset="-120"/>
               </a:rPr>
               <a:t>02</a:t>
             </a:r>
@@ -4847,13 +4828,13 @@
               <a:buNone/>
             </a:pPr>
             <a:r>
-              <a:rPr lang="en-US" sz="900" spc="200" kern="0" dirty="0">
+              <a:rPr lang="en-US" sz="900" b="1" spc="200" kern="0" dirty="0">
                 <a:solidFill>
                   <a:srgbClr val="6E655A"/>
                 </a:solidFill>
-                <a:latin typeface="Bridge Manrope SemiBold" pitchFamily="34" charset="0"/>
-                <a:ea typeface="Bridge Manrope SemiBold" pitchFamily="34" charset="-122"/>
-                <a:cs typeface="Bridge Manrope SemiBold" pitchFamily="34" charset="-120"/>
+                <a:latin typeface="Arial" pitchFamily="34" charset="0"/>
+                <a:ea typeface="Arial" pitchFamily="34" charset="-122"/>
+                <a:cs typeface="Arial" pitchFamily="34" charset="-120"/>
               </a:rPr>
               <a:t> / 10</a:t>
             </a:r>
@@ -4886,13 +4867,13 @@
               <a:buNone/>
             </a:pPr>
             <a:r>
-              <a:rPr lang="en-US" sz="800" spc="200" kern="0" dirty="0">
+              <a:rPr lang="en-US" sz="800" b="1" spc="200" kern="0" dirty="0">
                 <a:solidFill>
                   <a:srgbClr val="6E655A"/>
                 </a:solidFill>
-                <a:latin typeface="Bridge Manrope SemiBold" pitchFamily="34" charset="0"/>
-                <a:ea typeface="Bridge Manrope SemiBold" pitchFamily="34" charset="-122"/>
-                <a:cs typeface="Bridge Manrope SemiBold" pitchFamily="34" charset="-120"/>
+                <a:latin typeface="Arial" pitchFamily="34" charset="0"/>
+                <a:ea typeface="Arial" pitchFamily="34" charset="-122"/>
+                <a:cs typeface="Arial" pitchFamily="34" charset="-120"/>
               </a:rPr>
               <a:t>bridgeconsult.uz</a:t>
             </a:r>
@@ -4925,13 +4906,13 @@
               <a:buNone/>
             </a:pPr>
             <a:r>
-              <a:rPr lang="en-US" sz="800" spc="200" kern="0" dirty="0">
+              <a:rPr lang="en-US" sz="800" b="1" spc="200" kern="0" dirty="0">
                 <a:solidFill>
                   <a:srgbClr val="6E655A"/>
                 </a:solidFill>
-                <a:latin typeface="Bridge Manrope SemiBold" pitchFamily="34" charset="0"/>
-                <a:ea typeface="Bridge Manrope SemiBold" pitchFamily="34" charset="-122"/>
-                <a:cs typeface="Bridge Manrope SemiBold" pitchFamily="34" charset="-120"/>
+                <a:latin typeface="Arial" pitchFamily="34" charset="0"/>
+                <a:ea typeface="Arial" pitchFamily="34" charset="-122"/>
+                <a:cs typeface="Arial" pitchFamily="34" charset="-120"/>
               </a:rPr>
               <a:t>41.2995° N  ·  69.2401° E</a:t>
             </a:r>
@@ -4987,13 +4968,13 @@
               <a:buNone/>
             </a:pPr>
             <a:r>
-              <a:rPr lang="en-US" sz="900" spc="300" kern="0" dirty="0">
+              <a:rPr lang="en-US" sz="900" b="1" spc="300" kern="0" dirty="0">
                 <a:solidFill>
                   <a:srgbClr val="9B7C56"/>
                 </a:solidFill>
-                <a:latin typeface="Bridge Manrope SemiBold" pitchFamily="34" charset="0"/>
-                <a:ea typeface="Bridge Manrope SemiBold" pitchFamily="34" charset="-122"/>
-                <a:cs typeface="Bridge Manrope SemiBold" pitchFamily="34" charset="-120"/>
+                <a:latin typeface="Arial" pitchFamily="34" charset="0"/>
+                <a:ea typeface="Arial" pitchFamily="34" charset="-122"/>
+                <a:cs typeface="Arial" pitchFamily="34" charset="-120"/>
               </a:rPr>
               <a:t>О КОМПАНИИ</a:t>
             </a:r>
@@ -5030,9 +5011,9 @@
                 <a:solidFill>
                   <a:srgbClr val="1A1816"/>
                 </a:solidFill>
-                <a:latin typeface="Bridge Playfair" pitchFamily="34" charset="0"/>
-                <a:ea typeface="Bridge Playfair" pitchFamily="34" charset="-122"/>
-                <a:cs typeface="Bridge Playfair" pitchFamily="34" charset="-120"/>
+                <a:latin typeface="Georgia" pitchFamily="34" charset="0"/>
+                <a:ea typeface="Georgia" pitchFamily="34" charset="-122"/>
+                <a:cs typeface="Georgia" pitchFamily="34" charset="-120"/>
               </a:rPr>
               <a:t>Независимая экспертиза</a:t>
             </a:r>
@@ -5069,9 +5050,9 @@
                 <a:solidFill>
                   <a:srgbClr val="9B7C56"/>
                 </a:solidFill>
-                <a:latin typeface="Bridge Playfair" pitchFamily="34" charset="0"/>
-                <a:ea typeface="Bridge Playfair" pitchFamily="34" charset="-122"/>
-                <a:cs typeface="Bridge Playfair" pitchFamily="34" charset="-120"/>
+                <a:latin typeface="Georgia" pitchFamily="34" charset="0"/>
+                <a:ea typeface="Georgia" pitchFamily="34" charset="-122"/>
+                <a:cs typeface="Georgia" pitchFamily="34" charset="-120"/>
               </a:rPr>
               <a:t>для инфраструктуры</a:t>
             </a:r>
@@ -5111,9 +5092,9 @@
                 <a:solidFill>
                   <a:srgbClr val="3A342D"/>
                 </a:solidFill>
-                <a:latin typeface="Bridge Manrope" pitchFamily="34" charset="0"/>
-                <a:ea typeface="Bridge Manrope" pitchFamily="34" charset="-122"/>
-                <a:cs typeface="Bridge Manrope" pitchFamily="34" charset="-120"/>
+                <a:latin typeface="Arial" pitchFamily="34" charset="0"/>
+                <a:ea typeface="Arial" pitchFamily="34" charset="-122"/>
+                <a:cs typeface="Arial" pitchFamily="34" charset="-120"/>
               </a:rPr>
               <a:t>BRIDGE Consult — независимая консалтинговая компания, специализирующаяся на контрактном инжиниринге, администрировании строительных контрактов и разрешении споров в международных инфраструктурных проектах.</a:t>
             </a:r>
@@ -5153,9 +5134,9 @@
                 <a:solidFill>
                   <a:srgbClr val="6E655A"/>
                 </a:solidFill>
-                <a:latin typeface="Bridge Manrope" pitchFamily="34" charset="0"/>
-                <a:ea typeface="Bridge Manrope" pitchFamily="34" charset="-122"/>
-                <a:cs typeface="Bridge Manrope" pitchFamily="34" charset="-120"/>
+                <a:latin typeface="Arial" pitchFamily="34" charset="0"/>
+                <a:ea typeface="Arial" pitchFamily="34" charset="-122"/>
+                <a:cs typeface="Arial" pitchFamily="34" charset="-120"/>
               </a:rPr>
               <a:t>Мы поддерживаем государственный сектор, международные финансовые институты, инвесторов и подрядчиков — включая проекты, финансируемые международными банками развития.</a:t>
             </a:r>
@@ -5211,13 +5192,13 @@
               <a:buNone/>
             </a:pPr>
             <a:r>
-              <a:rPr lang="en-US" sz="850" spc="250" kern="0" dirty="0">
+              <a:rPr lang="en-US" sz="850" b="1" spc="250" kern="0" dirty="0">
                 <a:solidFill>
                   <a:srgbClr val="9B7C56"/>
                 </a:solidFill>
-                <a:latin typeface="Bridge Manrope SemiBold" pitchFamily="34" charset="0"/>
-                <a:ea typeface="Bridge Manrope SemiBold" pitchFamily="34" charset="-122"/>
-                <a:cs typeface="Bridge Manrope SemiBold" pitchFamily="34" charset="-120"/>
+                <a:latin typeface="Arial" pitchFamily="34" charset="0"/>
+                <a:ea typeface="Arial" pitchFamily="34" charset="-122"/>
+                <a:cs typeface="Arial" pitchFamily="34" charset="-120"/>
               </a:rPr>
               <a:t>КЛИЕНТЫ</a:t>
             </a:r>
@@ -5253,13 +5234,13 @@
               <a:buNone/>
             </a:pPr>
             <a:r>
-              <a:rPr lang="en-US" sz="1200" dirty="0">
+              <a:rPr lang="en-US" sz="1200" b="1" dirty="0">
                 <a:solidFill>
                   <a:srgbClr val="1A1816"/>
                 </a:solidFill>
-                <a:latin typeface="Bridge Manrope SemiBold" pitchFamily="34" charset="0"/>
-                <a:ea typeface="Bridge Manrope SemiBold" pitchFamily="34" charset="-122"/>
-                <a:cs typeface="Bridge Manrope SemiBold" pitchFamily="34" charset="-120"/>
+                <a:latin typeface="Arial" pitchFamily="34" charset="0"/>
+                <a:ea typeface="Arial" pitchFamily="34" charset="-122"/>
+                <a:cs typeface="Arial" pitchFamily="34" charset="-120"/>
               </a:rPr>
               <a:t>Госсектор, МФИ, инвесторы, подрядчики</a:t>
             </a:r>
@@ -5292,13 +5273,13 @@
               <a:buNone/>
             </a:pPr>
             <a:r>
-              <a:rPr lang="en-US" sz="850" spc="250" kern="0" dirty="0">
+              <a:rPr lang="en-US" sz="850" b="1" spc="250" kern="0" dirty="0">
                 <a:solidFill>
                   <a:srgbClr val="9B7C56"/>
                 </a:solidFill>
-                <a:latin typeface="Bridge Manrope SemiBold" pitchFamily="34" charset="0"/>
-                <a:ea typeface="Bridge Manrope SemiBold" pitchFamily="34" charset="-122"/>
-                <a:cs typeface="Bridge Manrope SemiBold" pitchFamily="34" charset="-120"/>
+                <a:latin typeface="Arial" pitchFamily="34" charset="0"/>
+                <a:ea typeface="Arial" pitchFamily="34" charset="-122"/>
+                <a:cs typeface="Arial" pitchFamily="34" charset="-120"/>
               </a:rPr>
               <a:t>СТАНДАРТЫ</a:t>
             </a:r>
@@ -5334,13 +5315,13 @@
               <a:buNone/>
             </a:pPr>
             <a:r>
-              <a:rPr lang="en-US" sz="1200" dirty="0">
+              <a:rPr lang="en-US" sz="1200" b="1" dirty="0">
                 <a:solidFill>
                   <a:srgbClr val="1A1816"/>
                 </a:solidFill>
-                <a:latin typeface="Bridge Manrope SemiBold" pitchFamily="34" charset="0"/>
-                <a:ea typeface="Bridge Manrope SemiBold" pitchFamily="34" charset="-122"/>
-                <a:cs typeface="Bridge Manrope SemiBold" pitchFamily="34" charset="-120"/>
+                <a:latin typeface="Arial" pitchFamily="34" charset="0"/>
+                <a:ea typeface="Arial" pitchFamily="34" charset="-122"/>
+                <a:cs typeface="Arial" pitchFamily="34" charset="-120"/>
               </a:rPr>
               <a:t>FIDIC · EPC / EPC+F · MDB Harmonised</a:t>
             </a:r>
@@ -5373,13 +5354,13 @@
               <a:buNone/>
             </a:pPr>
             <a:r>
-              <a:rPr lang="en-US" sz="850" spc="250" kern="0" dirty="0">
+              <a:rPr lang="en-US" sz="850" b="1" spc="250" kern="0" dirty="0">
                 <a:solidFill>
                   <a:srgbClr val="9B7C56"/>
                 </a:solidFill>
-                <a:latin typeface="Bridge Manrope SemiBold" pitchFamily="34" charset="0"/>
-                <a:ea typeface="Bridge Manrope SemiBold" pitchFamily="34" charset="-122"/>
-                <a:cs typeface="Bridge Manrope SemiBold" pitchFamily="34" charset="-120"/>
+                <a:latin typeface="Arial" pitchFamily="34" charset="0"/>
+                <a:ea typeface="Arial" pitchFamily="34" charset="-122"/>
+                <a:cs typeface="Arial" pitchFamily="34" charset="-120"/>
               </a:rPr>
               <a:t>ГЕОГРАФИЯ</a:t>
             </a:r>
@@ -5415,13 +5396,13 @@
               <a:buNone/>
             </a:pPr>
             <a:r>
-              <a:rPr lang="en-US" sz="1200" dirty="0">
+              <a:rPr lang="en-US" sz="1200" b="1" dirty="0">
                 <a:solidFill>
                   <a:srgbClr val="1A1816"/>
                 </a:solidFill>
-                <a:latin typeface="Bridge Manrope SemiBold" pitchFamily="34" charset="0"/>
-                <a:ea typeface="Bridge Manrope SemiBold" pitchFamily="34" charset="-122"/>
-                <a:cs typeface="Bridge Manrope SemiBold" pitchFamily="34" charset="-120"/>
+                <a:latin typeface="Arial" pitchFamily="34" charset="0"/>
+                <a:ea typeface="Arial" pitchFamily="34" charset="-122"/>
+                <a:cs typeface="Arial" pitchFamily="34" charset="-120"/>
               </a:rPr>
               <a:t>Узбекистан и Центральная Азия</a:t>
             </a:r>
@@ -6607,13 +6588,13 @@
               <a:buNone/>
             </a:pPr>
             <a:r>
-              <a:rPr lang="en-US" sz="900" spc="200" kern="0" dirty="0">
+              <a:rPr lang="en-US" sz="900" b="1" spc="200" kern="0" dirty="0">
                 <a:solidFill>
                   <a:srgbClr val="F4EFE6"/>
                 </a:solidFill>
-                <a:latin typeface="Bridge Manrope SemiBold" pitchFamily="34" charset="0"/>
-                <a:ea typeface="Bridge Manrope SemiBold" pitchFamily="34" charset="-122"/>
-                <a:cs typeface="Bridge Manrope SemiBold" pitchFamily="34" charset="-120"/>
+                <a:latin typeface="Arial" pitchFamily="34" charset="0"/>
+                <a:ea typeface="Arial" pitchFamily="34" charset="-122"/>
+                <a:cs typeface="Arial" pitchFamily="34" charset="-120"/>
               </a:rPr>
               <a:t>03</a:t>
             </a:r>
@@ -6621,13 +6602,13 @@
               <a:buNone/>
             </a:pPr>
             <a:r>
-              <a:rPr lang="en-US" sz="900" spc="200" kern="0" dirty="0">
+              <a:rPr lang="en-US" sz="900" b="1" spc="200" kern="0" dirty="0">
                 <a:solidFill>
                   <a:srgbClr val="A39C91"/>
                 </a:solidFill>
-                <a:latin typeface="Bridge Manrope SemiBold" pitchFamily="34" charset="0"/>
-                <a:ea typeface="Bridge Manrope SemiBold" pitchFamily="34" charset="-122"/>
-                <a:cs typeface="Bridge Manrope SemiBold" pitchFamily="34" charset="-120"/>
+                <a:latin typeface="Arial" pitchFamily="34" charset="0"/>
+                <a:ea typeface="Arial" pitchFamily="34" charset="-122"/>
+                <a:cs typeface="Arial" pitchFamily="34" charset="-120"/>
               </a:rPr>
               <a:t> / 10</a:t>
             </a:r>
@@ -6660,13 +6641,13 @@
               <a:buNone/>
             </a:pPr>
             <a:r>
-              <a:rPr lang="en-US" sz="800" spc="200" kern="0" dirty="0">
+              <a:rPr lang="en-US" sz="800" b="1" spc="200" kern="0" dirty="0">
                 <a:solidFill>
                   <a:srgbClr val="A39C91"/>
                 </a:solidFill>
-                <a:latin typeface="Bridge Manrope SemiBold" pitchFamily="34" charset="0"/>
-                <a:ea typeface="Bridge Manrope SemiBold" pitchFamily="34" charset="-122"/>
-                <a:cs typeface="Bridge Manrope SemiBold" pitchFamily="34" charset="-120"/>
+                <a:latin typeface="Arial" pitchFamily="34" charset="0"/>
+                <a:ea typeface="Arial" pitchFamily="34" charset="-122"/>
+                <a:cs typeface="Arial" pitchFamily="34" charset="-120"/>
               </a:rPr>
               <a:t>bridgeconsult.uz</a:t>
             </a:r>
@@ -6699,13 +6680,13 @@
               <a:buNone/>
             </a:pPr>
             <a:r>
-              <a:rPr lang="en-US" sz="800" spc="200" kern="0" dirty="0">
+              <a:rPr lang="en-US" sz="800" b="1" spc="200" kern="0" dirty="0">
                 <a:solidFill>
                   <a:srgbClr val="A39C91"/>
                 </a:solidFill>
-                <a:latin typeface="Bridge Manrope SemiBold" pitchFamily="34" charset="0"/>
-                <a:ea typeface="Bridge Manrope SemiBold" pitchFamily="34" charset="-122"/>
-                <a:cs typeface="Bridge Manrope SemiBold" pitchFamily="34" charset="-120"/>
+                <a:latin typeface="Arial" pitchFamily="34" charset="0"/>
+                <a:ea typeface="Arial" pitchFamily="34" charset="-122"/>
+                <a:cs typeface="Arial" pitchFamily="34" charset="-120"/>
               </a:rPr>
               <a:t>41.2995° N  ·  69.2401° E</a:t>
             </a:r>
@@ -6761,13 +6742,13 @@
               <a:buNone/>
             </a:pPr>
             <a:r>
-              <a:rPr lang="en-US" sz="900" spc="300" kern="0" dirty="0">
+              <a:rPr lang="en-US" sz="900" b="1" spc="300" kern="0" dirty="0">
                 <a:solidFill>
                   <a:srgbClr val="D8BD96"/>
                 </a:solidFill>
-                <a:latin typeface="Bridge Manrope SemiBold" pitchFamily="34" charset="0"/>
-                <a:ea typeface="Bridge Manrope SemiBold" pitchFamily="34" charset="-122"/>
-                <a:cs typeface="Bridge Manrope SemiBold" pitchFamily="34" charset="-120"/>
+                <a:latin typeface="Arial" pitchFamily="34" charset="0"/>
+                <a:ea typeface="Arial" pitchFamily="34" charset="-122"/>
+                <a:cs typeface="Arial" pitchFamily="34" charset="-120"/>
               </a:rPr>
               <a:t>МАСШТАБ</a:t>
             </a:r>
@@ -6804,9 +6785,9 @@
                 <a:solidFill>
                   <a:srgbClr val="F4EFE6"/>
                 </a:solidFill>
-                <a:latin typeface="Bridge Playfair" pitchFamily="34" charset="0"/>
-                <a:ea typeface="Bridge Playfair" pitchFamily="34" charset="-122"/>
-                <a:cs typeface="Bridge Playfair" pitchFamily="34" charset="-120"/>
+                <a:latin typeface="Georgia" pitchFamily="34" charset="0"/>
+                <a:ea typeface="Georgia" pitchFamily="34" charset="-122"/>
+                <a:cs typeface="Georgia" pitchFamily="34" charset="-120"/>
               </a:rPr>
               <a:t>Опыт, подтверждённый</a:t>
             </a:r>
@@ -6843,9 +6824,9 @@
                 <a:solidFill>
                   <a:srgbClr val="D8BD96"/>
                 </a:solidFill>
-                <a:latin typeface="Bridge Playfair" pitchFamily="34" charset="0"/>
-                <a:ea typeface="Bridge Playfair" pitchFamily="34" charset="-122"/>
-                <a:cs typeface="Bridge Playfair" pitchFamily="34" charset="-120"/>
+                <a:latin typeface="Georgia" pitchFamily="34" charset="0"/>
+                <a:ea typeface="Georgia" pitchFamily="34" charset="-122"/>
+                <a:cs typeface="Georgia" pitchFamily="34" charset="-120"/>
               </a:rPr>
               <a:t>проектами</a:t>
             </a:r>
@@ -6885,9 +6866,9 @@
                 <a:solidFill>
                   <a:srgbClr val="A39C91"/>
                 </a:solidFill>
-                <a:latin typeface="Bridge Manrope" pitchFamily="34" charset="0"/>
-                <a:ea typeface="Bridge Manrope" pitchFamily="34" charset="-122"/>
-                <a:cs typeface="Bridge Manrope" pitchFamily="34" charset="-120"/>
+                <a:latin typeface="Arial" pitchFamily="34" charset="0"/>
+                <a:ea typeface="Arial" pitchFamily="34" charset="-122"/>
+                <a:cs typeface="Arial" pitchFamily="34" charset="-120"/>
               </a:rPr>
               <a:t>За каждой цифрой — реальные контракты, претензии и решения на объектах национального масштаба.</a:t>
             </a:r>
@@ -6947,9 +6928,9 @@
                 <a:solidFill>
                   <a:srgbClr val="F4EFE6"/>
                 </a:solidFill>
-                <a:latin typeface="Bridge Playfair" pitchFamily="34" charset="0"/>
-                <a:ea typeface="Bridge Playfair" pitchFamily="34" charset="-122"/>
-                <a:cs typeface="Bridge Playfair" pitchFamily="34" charset="-120"/>
+                <a:latin typeface="Georgia" pitchFamily="34" charset="0"/>
+                <a:ea typeface="Georgia" pitchFamily="34" charset="-122"/>
+                <a:cs typeface="Georgia" pitchFamily="34" charset="-120"/>
               </a:rPr>
               <a:t>10</a:t>
             </a:r>
@@ -6961,9 +6942,9 @@
                 <a:solidFill>
                   <a:srgbClr val="D8BD96"/>
                 </a:solidFill>
-                <a:latin typeface="Bridge Playfair" pitchFamily="34" charset="0"/>
-                <a:ea typeface="Bridge Playfair" pitchFamily="34" charset="-122"/>
-                <a:cs typeface="Bridge Playfair" pitchFamily="34" charset="-120"/>
+                <a:latin typeface="Georgia" pitchFamily="34" charset="0"/>
+                <a:ea typeface="Georgia" pitchFamily="34" charset="-122"/>
+                <a:cs typeface="Georgia" pitchFamily="34" charset="-120"/>
               </a:rPr>
               <a:t>+</a:t>
             </a:r>
@@ -6996,13 +6977,13 @@
               <a:buNone/>
             </a:pPr>
             <a:r>
-              <a:rPr lang="en-US" sz="1300" dirty="0">
+              <a:rPr lang="en-US" sz="1300" b="1" dirty="0">
                 <a:solidFill>
                   <a:srgbClr val="F4EFE6"/>
                 </a:solidFill>
-                <a:latin typeface="Bridge Manrope SemiBold" pitchFamily="34" charset="0"/>
-                <a:ea typeface="Bridge Manrope SemiBold" pitchFamily="34" charset="-122"/>
-                <a:cs typeface="Bridge Manrope SemiBold" pitchFamily="34" charset="-120"/>
+                <a:latin typeface="Arial" pitchFamily="34" charset="0"/>
+                <a:ea typeface="Arial" pitchFamily="34" charset="-122"/>
+                <a:cs typeface="Arial" pitchFamily="34" charset="-120"/>
               </a:rPr>
               <a:t>лет на рынке</a:t>
             </a:r>
@@ -7042,9 +7023,9 @@
                 <a:solidFill>
                   <a:srgbClr val="A39C91"/>
                 </a:solidFill>
-                <a:latin typeface="Bridge Manrope" pitchFamily="34" charset="0"/>
-                <a:ea typeface="Bridge Manrope" pitchFamily="34" charset="-122"/>
-                <a:cs typeface="Bridge Manrope" pitchFamily="34" charset="-120"/>
+                <a:latin typeface="Arial" pitchFamily="34" charset="0"/>
+                <a:ea typeface="Arial" pitchFamily="34" charset="-122"/>
+                <a:cs typeface="Arial" pitchFamily="34" charset="-120"/>
               </a:rPr>
               <a:t>Компания основана в 2016 году в Ташкенте</a:t>
             </a:r>
@@ -7104,9 +7085,9 @@
                 <a:solidFill>
                   <a:srgbClr val="F4EFE6"/>
                 </a:solidFill>
-                <a:latin typeface="Bridge Playfair" pitchFamily="34" charset="0"/>
-                <a:ea typeface="Bridge Playfair" pitchFamily="34" charset="-122"/>
-                <a:cs typeface="Bridge Playfair" pitchFamily="34" charset="-120"/>
+                <a:latin typeface="Georgia" pitchFamily="34" charset="0"/>
+                <a:ea typeface="Georgia" pitchFamily="34" charset="-122"/>
+                <a:cs typeface="Georgia" pitchFamily="34" charset="-120"/>
               </a:rPr>
               <a:t>20</a:t>
             </a:r>
@@ -7118,9 +7099,9 @@
                 <a:solidFill>
                   <a:srgbClr val="D8BD96"/>
                 </a:solidFill>
-                <a:latin typeface="Bridge Playfair" pitchFamily="34" charset="0"/>
-                <a:ea typeface="Bridge Playfair" pitchFamily="34" charset="-122"/>
-                <a:cs typeface="Bridge Playfair" pitchFamily="34" charset="-120"/>
+                <a:latin typeface="Georgia" pitchFamily="34" charset="0"/>
+                <a:ea typeface="Georgia" pitchFamily="34" charset="-122"/>
+                <a:cs typeface="Georgia" pitchFamily="34" charset="-120"/>
               </a:rPr>
               <a:t>+</a:t>
             </a:r>
@@ -7153,13 +7134,13 @@
               <a:buNone/>
             </a:pPr>
             <a:r>
-              <a:rPr lang="en-US" sz="1300" dirty="0">
+              <a:rPr lang="en-US" sz="1300" b="1" dirty="0">
                 <a:solidFill>
                   <a:srgbClr val="F4EFE6"/>
                 </a:solidFill>
-                <a:latin typeface="Bridge Manrope SemiBold" pitchFamily="34" charset="0"/>
-                <a:ea typeface="Bridge Manrope SemiBold" pitchFamily="34" charset="-122"/>
-                <a:cs typeface="Bridge Manrope SemiBold" pitchFamily="34" charset="-120"/>
+                <a:latin typeface="Arial" pitchFamily="34" charset="0"/>
+                <a:ea typeface="Arial" pitchFamily="34" charset="-122"/>
+                <a:cs typeface="Arial" pitchFamily="34" charset="-120"/>
               </a:rPr>
               <a:t>крупных проектов</a:t>
             </a:r>
@@ -7199,9 +7180,9 @@
                 <a:solidFill>
                   <a:srgbClr val="A39C91"/>
                 </a:solidFill>
-                <a:latin typeface="Bridge Manrope" pitchFamily="34" charset="0"/>
-                <a:ea typeface="Bridge Manrope" pitchFamily="34" charset="-122"/>
-                <a:cs typeface="Bridge Manrope" pitchFamily="34" charset="-120"/>
+                <a:latin typeface="Arial" pitchFamily="34" charset="0"/>
+                <a:ea typeface="Arial" pitchFamily="34" charset="-122"/>
+                <a:cs typeface="Arial" pitchFamily="34" charset="-120"/>
               </a:rPr>
               <a:t>Дороги, водоснабжение, энергетика, городская среда</a:t>
             </a:r>
@@ -7261,9 +7242,9 @@
                 <a:solidFill>
                   <a:srgbClr val="F4EFE6"/>
                 </a:solidFill>
-                <a:latin typeface="Bridge Playfair" pitchFamily="34" charset="0"/>
-                <a:ea typeface="Bridge Playfair" pitchFamily="34" charset="-122"/>
-                <a:cs typeface="Bridge Playfair" pitchFamily="34" charset="-120"/>
+                <a:latin typeface="Georgia" pitchFamily="34" charset="0"/>
+                <a:ea typeface="Georgia" pitchFamily="34" charset="-122"/>
+                <a:cs typeface="Georgia" pitchFamily="34" charset="-120"/>
               </a:rPr>
               <a:t>27</a:t>
             </a:r>
@@ -7299,13 +7280,13 @@
               <a:buNone/>
             </a:pPr>
             <a:r>
-              <a:rPr lang="en-US" sz="1300" dirty="0">
+              <a:rPr lang="en-US" sz="1300" b="1" dirty="0">
                 <a:solidFill>
                   <a:srgbClr val="F4EFE6"/>
                 </a:solidFill>
-                <a:latin typeface="Bridge Manrope SemiBold" pitchFamily="34" charset="0"/>
-                <a:ea typeface="Bridge Manrope SemiBold" pitchFamily="34" charset="-122"/>
-                <a:cs typeface="Bridge Manrope SemiBold" pitchFamily="34" charset="-120"/>
+                <a:latin typeface="Arial" pitchFamily="34" charset="0"/>
+                <a:ea typeface="Arial" pitchFamily="34" charset="-122"/>
+                <a:cs typeface="Arial" pitchFamily="34" charset="-120"/>
               </a:rPr>
               <a:t>лет опыта основателя</a:t>
             </a:r>
@@ -7345,9 +7326,9 @@
                 <a:solidFill>
                   <a:srgbClr val="A39C91"/>
                 </a:solidFill>
-                <a:latin typeface="Bridge Manrope" pitchFamily="34" charset="0"/>
-                <a:ea typeface="Bridge Manrope" pitchFamily="34" charset="-122"/>
-                <a:cs typeface="Bridge Manrope" pitchFamily="34" charset="-120"/>
+                <a:latin typeface="Arial" pitchFamily="34" charset="0"/>
+                <a:ea typeface="Arial" pitchFamily="34" charset="-122"/>
+                <a:cs typeface="Arial" pitchFamily="34" charset="-120"/>
               </a:rPr>
               <a:t>Из них более 15 лет — контракты FIDIC и проекты МФИ</a:t>
             </a:r>
@@ -7407,9 +7388,9 @@
                 <a:solidFill>
                   <a:srgbClr val="F4EFE6"/>
                 </a:solidFill>
-                <a:latin typeface="Bridge Playfair" pitchFamily="34" charset="0"/>
-                <a:ea typeface="Bridge Playfair" pitchFamily="34" charset="-122"/>
-                <a:cs typeface="Bridge Playfair" pitchFamily="34" charset="-120"/>
+                <a:latin typeface="Georgia" pitchFamily="34" charset="0"/>
+                <a:ea typeface="Georgia" pitchFamily="34" charset="-122"/>
+                <a:cs typeface="Georgia" pitchFamily="34" charset="-120"/>
               </a:rPr>
               <a:t>100</a:t>
             </a:r>
@@ -7421,9 +7402,9 @@
                 <a:solidFill>
                   <a:srgbClr val="D8BD96"/>
                 </a:solidFill>
-                <a:latin typeface="Bridge Playfair" pitchFamily="34" charset="0"/>
-                <a:ea typeface="Bridge Playfair" pitchFamily="34" charset="-122"/>
-                <a:cs typeface="Bridge Playfair" pitchFamily="34" charset="-120"/>
+                <a:latin typeface="Georgia" pitchFamily="34" charset="0"/>
+                <a:ea typeface="Georgia" pitchFamily="34" charset="-122"/>
+                <a:cs typeface="Georgia" pitchFamily="34" charset="-120"/>
               </a:rPr>
               <a:t>%</a:t>
             </a:r>
@@ -7456,13 +7437,13 @@
               <a:buNone/>
             </a:pPr>
             <a:r>
-              <a:rPr lang="en-US" sz="1300" dirty="0">
+              <a:rPr lang="en-US" sz="1300" b="1" dirty="0">
                 <a:solidFill>
                   <a:srgbClr val="F4EFE6"/>
                 </a:solidFill>
-                <a:latin typeface="Bridge Manrope SemiBold" pitchFamily="34" charset="0"/>
-                <a:ea typeface="Bridge Manrope SemiBold" pitchFamily="34" charset="-122"/>
-                <a:cs typeface="Bridge Manrope SemiBold" pitchFamily="34" charset="-120"/>
+                <a:latin typeface="Arial" pitchFamily="34" charset="0"/>
+                <a:ea typeface="Arial" pitchFamily="34" charset="-122"/>
+                <a:cs typeface="Arial" pitchFamily="34" charset="-120"/>
               </a:rPr>
               <a:t>на стороне клиента</a:t>
             </a:r>
@@ -7502,9 +7483,9 @@
                 <a:solidFill>
                   <a:srgbClr val="A39C91"/>
                 </a:solidFill>
-                <a:latin typeface="Bridge Manrope" pitchFamily="34" charset="0"/>
-                <a:ea typeface="Bridge Manrope" pitchFamily="34" charset="-122"/>
-                <a:cs typeface="Bridge Manrope" pitchFamily="34" charset="-120"/>
+                <a:latin typeface="Arial" pitchFamily="34" charset="0"/>
+                <a:ea typeface="Arial" pitchFamily="34" charset="-122"/>
+                <a:cs typeface="Arial" pitchFamily="34" charset="-120"/>
               </a:rPr>
               <a:t>От сметного аудита до арбитража</a:t>
             </a:r>
@@ -8846,13 +8827,13 @@
               <a:buNone/>
             </a:pPr>
             <a:r>
-              <a:rPr lang="en-US" sz="900" spc="200" kern="0" dirty="0">
+              <a:rPr lang="en-US" sz="900" b="1" spc="200" kern="0" dirty="0">
                 <a:solidFill>
                   <a:srgbClr val="1A1816"/>
                 </a:solidFill>
-                <a:latin typeface="Bridge Manrope SemiBold" pitchFamily="34" charset="0"/>
-                <a:ea typeface="Bridge Manrope SemiBold" pitchFamily="34" charset="-122"/>
-                <a:cs typeface="Bridge Manrope SemiBold" pitchFamily="34" charset="-120"/>
+                <a:latin typeface="Arial" pitchFamily="34" charset="0"/>
+                <a:ea typeface="Arial" pitchFamily="34" charset="-122"/>
+                <a:cs typeface="Arial" pitchFamily="34" charset="-120"/>
               </a:rPr>
               <a:t>04</a:t>
             </a:r>
@@ -8860,13 +8841,13 @@
               <a:buNone/>
             </a:pPr>
             <a:r>
-              <a:rPr lang="en-US" sz="900" spc="200" kern="0" dirty="0">
+              <a:rPr lang="en-US" sz="900" b="1" spc="200" kern="0" dirty="0">
                 <a:solidFill>
                   <a:srgbClr val="6E655A"/>
                 </a:solidFill>
-                <a:latin typeface="Bridge Manrope SemiBold" pitchFamily="34" charset="0"/>
-                <a:ea typeface="Bridge Manrope SemiBold" pitchFamily="34" charset="-122"/>
-                <a:cs typeface="Bridge Manrope SemiBold" pitchFamily="34" charset="-120"/>
+                <a:latin typeface="Arial" pitchFamily="34" charset="0"/>
+                <a:ea typeface="Arial" pitchFamily="34" charset="-122"/>
+                <a:cs typeface="Arial" pitchFamily="34" charset="-120"/>
               </a:rPr>
               <a:t> / 10</a:t>
             </a:r>
@@ -8899,13 +8880,13 @@
               <a:buNone/>
             </a:pPr>
             <a:r>
-              <a:rPr lang="en-US" sz="800" spc="200" kern="0" dirty="0">
+              <a:rPr lang="en-US" sz="800" b="1" spc="200" kern="0" dirty="0">
                 <a:solidFill>
                   <a:srgbClr val="6E655A"/>
                 </a:solidFill>
-                <a:latin typeface="Bridge Manrope SemiBold" pitchFamily="34" charset="0"/>
-                <a:ea typeface="Bridge Manrope SemiBold" pitchFamily="34" charset="-122"/>
-                <a:cs typeface="Bridge Manrope SemiBold" pitchFamily="34" charset="-120"/>
+                <a:latin typeface="Arial" pitchFamily="34" charset="0"/>
+                <a:ea typeface="Arial" pitchFamily="34" charset="-122"/>
+                <a:cs typeface="Arial" pitchFamily="34" charset="-120"/>
               </a:rPr>
               <a:t>bridgeconsult.uz</a:t>
             </a:r>
@@ -8938,13 +8919,13 @@
               <a:buNone/>
             </a:pPr>
             <a:r>
-              <a:rPr lang="en-US" sz="800" spc="200" kern="0" dirty="0">
+              <a:rPr lang="en-US" sz="800" b="1" spc="200" kern="0" dirty="0">
                 <a:solidFill>
                   <a:srgbClr val="6E655A"/>
                 </a:solidFill>
-                <a:latin typeface="Bridge Manrope SemiBold" pitchFamily="34" charset="0"/>
-                <a:ea typeface="Bridge Manrope SemiBold" pitchFamily="34" charset="-122"/>
-                <a:cs typeface="Bridge Manrope SemiBold" pitchFamily="34" charset="-120"/>
+                <a:latin typeface="Arial" pitchFamily="34" charset="0"/>
+                <a:ea typeface="Arial" pitchFamily="34" charset="-122"/>
+                <a:cs typeface="Arial" pitchFamily="34" charset="-120"/>
               </a:rPr>
               <a:t>41.2995° N  ·  69.2401° E</a:t>
             </a:r>
@@ -9000,13 +8981,13 @@
               <a:buNone/>
             </a:pPr>
             <a:r>
-              <a:rPr lang="en-US" sz="900" spc="300" kern="0" dirty="0">
+              <a:rPr lang="en-US" sz="900" b="1" spc="300" kern="0" dirty="0">
                 <a:solidFill>
                   <a:srgbClr val="9B7C56"/>
                 </a:solidFill>
-                <a:latin typeface="Bridge Manrope SemiBold" pitchFamily="34" charset="0"/>
-                <a:ea typeface="Bridge Manrope SemiBold" pitchFamily="34" charset="-122"/>
-                <a:cs typeface="Bridge Manrope SemiBold" pitchFamily="34" charset="-120"/>
+                <a:latin typeface="Arial" pitchFamily="34" charset="0"/>
+                <a:ea typeface="Arial" pitchFamily="34" charset="-122"/>
+                <a:cs typeface="Arial" pitchFamily="34" charset="-120"/>
               </a:rPr>
               <a:t>УСЛУГИ</a:t>
             </a:r>
@@ -9043,9 +9024,9 @@
                 <a:solidFill>
                   <a:srgbClr val="1A1816"/>
                 </a:solidFill>
-                <a:latin typeface="Bridge Playfair" pitchFamily="34" charset="0"/>
-                <a:ea typeface="Bridge Playfair" pitchFamily="34" charset="-122"/>
-                <a:cs typeface="Bridge Playfair" pitchFamily="34" charset="-120"/>
+                <a:latin typeface="Georgia" pitchFamily="34" charset="0"/>
+                <a:ea typeface="Georgia" pitchFamily="34" charset="-122"/>
+                <a:cs typeface="Georgia" pitchFamily="34" charset="-120"/>
               </a:rPr>
               <a:t>Четыре</a:t>
             </a:r>
@@ -9082,9 +9063,9 @@
                 <a:solidFill>
                   <a:srgbClr val="9B7C56"/>
                 </a:solidFill>
-                <a:latin typeface="Bridge Playfair" pitchFamily="34" charset="0"/>
-                <a:ea typeface="Bridge Playfair" pitchFamily="34" charset="-122"/>
-                <a:cs typeface="Bridge Playfair" pitchFamily="34" charset="-120"/>
+                <a:latin typeface="Georgia" pitchFamily="34" charset="0"/>
+                <a:ea typeface="Georgia" pitchFamily="34" charset="-122"/>
+                <a:cs typeface="Georgia" pitchFamily="34" charset="-120"/>
               </a:rPr>
               <a:t>направления</a:t>
             </a:r>
@@ -9124,9 +9105,9 @@
                 <a:solidFill>
                   <a:srgbClr val="6E655A"/>
                 </a:solidFill>
-                <a:latin typeface="Bridge Manrope" pitchFamily="34" charset="0"/>
-                <a:ea typeface="Bridge Manrope" pitchFamily="34" charset="-122"/>
-                <a:cs typeface="Bridge Manrope" pitchFamily="34" charset="-120"/>
+                <a:latin typeface="Arial" pitchFamily="34" charset="0"/>
+                <a:ea typeface="Arial" pitchFamily="34" charset="-122"/>
+                <a:cs typeface="Arial" pitchFamily="34" charset="-120"/>
               </a:rPr>
               <a:t>Полный цикл сопровождения инфраструктурного контракта — от тендерной стратегии до защиты позиции в арбитраже.</a:t>
             </a:r>
@@ -9214,9 +9195,9 @@
                 <a:solidFill>
                   <a:srgbClr val="9B7C56"/>
                 </a:solidFill>
-                <a:latin typeface="Bridge Playfair" pitchFamily="34" charset="0"/>
-                <a:ea typeface="Bridge Playfair" pitchFamily="34" charset="-122"/>
-                <a:cs typeface="Bridge Playfair" pitchFamily="34" charset="-120"/>
+                <a:latin typeface="Georgia" pitchFamily="34" charset="0"/>
+                <a:ea typeface="Georgia" pitchFamily="34" charset="-122"/>
+                <a:cs typeface="Georgia" pitchFamily="34" charset="-120"/>
               </a:rPr>
               <a:t>01</a:t>
             </a:r>
@@ -9249,13 +9230,13 @@
               <a:buNone/>
             </a:pPr>
             <a:r>
-              <a:rPr lang="en-US" sz="750" spc="200" kern="0" dirty="0">
+              <a:rPr lang="en-US" sz="750" b="1" spc="200" kern="0" dirty="0">
                 <a:solidFill>
                   <a:srgbClr val="8A7B66"/>
                 </a:solidFill>
-                <a:latin typeface="Bridge Manrope SemiBold" pitchFamily="34" charset="0"/>
-                <a:ea typeface="Bridge Manrope SemiBold" pitchFamily="34" charset="-122"/>
-                <a:cs typeface="Bridge Manrope SemiBold" pitchFamily="34" charset="-120"/>
+                <a:latin typeface="Arial" pitchFamily="34" charset="0"/>
+                <a:ea typeface="Arial" pitchFamily="34" charset="-122"/>
+                <a:cs typeface="Arial" pitchFamily="34" charset="-120"/>
               </a:rPr>
               <a:t>FIDIC / EPC</a:t>
             </a:r>
@@ -9288,13 +9269,13 @@
               <a:buNone/>
             </a:pPr>
             <a:r>
-              <a:rPr lang="en-US" sz="1450" dirty="0">
+              <a:rPr lang="en-US" sz="1450" b="1" dirty="0">
                 <a:solidFill>
                   <a:srgbClr val="1A1816"/>
                 </a:solidFill>
-                <a:latin typeface="Bridge Manrope ExtraBold" pitchFamily="34" charset="0"/>
-                <a:ea typeface="Bridge Manrope ExtraBold" pitchFamily="34" charset="-122"/>
-                <a:cs typeface="Bridge Manrope ExtraBold" pitchFamily="34" charset="-120"/>
+                <a:latin typeface="Arial" pitchFamily="34" charset="0"/>
+                <a:ea typeface="Arial" pitchFamily="34" charset="-122"/>
+                <a:cs typeface="Arial" pitchFamily="34" charset="-120"/>
               </a:rPr>
               <a:t>Контрактный инжиниринг</a:t>
             </a:r>
@@ -9338,9 +9319,9 @@
                 <a:solidFill>
                   <a:srgbClr val="3A342D"/>
                 </a:solidFill>
-                <a:latin typeface="Bridge Manrope" pitchFamily="34" charset="0"/>
-                <a:ea typeface="Bridge Manrope" pitchFamily="34" charset="-122"/>
-                <a:cs typeface="Bridge Manrope" pitchFamily="34" charset="-120"/>
+                <a:latin typeface="Arial" pitchFamily="34" charset="0"/>
+                <a:ea typeface="Arial" pitchFamily="34" charset="-122"/>
+                <a:cs typeface="Arial" pitchFamily="34" charset="-120"/>
               </a:rPr>
               <a:t>Тендерная документация и тендерный инжиниринг</a:t>
             </a:r>
@@ -9362,9 +9343,9 @@
                 <a:solidFill>
                   <a:srgbClr val="3A342D"/>
                 </a:solidFill>
-                <a:latin typeface="Bridge Manrope" pitchFamily="34" charset="0"/>
-                <a:ea typeface="Bridge Manrope" pitchFamily="34" charset="-122"/>
-                <a:cs typeface="Bridge Manrope" pitchFamily="34" charset="-120"/>
+                <a:latin typeface="Arial" pitchFamily="34" charset="0"/>
+                <a:ea typeface="Arial" pitchFamily="34" charset="-122"/>
+                <a:cs typeface="Arial" pitchFamily="34" charset="-120"/>
               </a:rPr>
               <a:t>Разработка и адаптация контрактов FIDIC и EPC</a:t>
             </a:r>
@@ -9386,9 +9367,9 @@
                 <a:solidFill>
                   <a:srgbClr val="3A342D"/>
                 </a:solidFill>
-                <a:latin typeface="Bridge Manrope" pitchFamily="34" charset="0"/>
-                <a:ea typeface="Bridge Manrope" pitchFamily="34" charset="-122"/>
-                <a:cs typeface="Bridge Manrope" pitchFamily="34" charset="-120"/>
+                <a:latin typeface="Arial" pitchFamily="34" charset="0"/>
+                <a:ea typeface="Arial" pitchFamily="34" charset="-122"/>
+                <a:cs typeface="Arial" pitchFamily="34" charset="-120"/>
               </a:rPr>
               <a:t>Аудит контрактной стратегии</a:t>
             </a:r>
@@ -9452,9 +9433,9 @@
                 <a:solidFill>
                   <a:srgbClr val="9B7C56"/>
                 </a:solidFill>
-                <a:latin typeface="Bridge Playfair" pitchFamily="34" charset="0"/>
-                <a:ea typeface="Bridge Playfair" pitchFamily="34" charset="-122"/>
-                <a:cs typeface="Bridge Playfair" pitchFamily="34" charset="-120"/>
+                <a:latin typeface="Georgia" pitchFamily="34" charset="0"/>
+                <a:ea typeface="Georgia" pitchFamily="34" charset="-122"/>
+                <a:cs typeface="Georgia" pitchFamily="34" charset="-120"/>
               </a:rPr>
               <a:t>02</a:t>
             </a:r>
@@ -9487,13 +9468,13 @@
               <a:buNone/>
             </a:pPr>
             <a:r>
-              <a:rPr lang="en-US" sz="750" spc="200" kern="0" dirty="0">
+              <a:rPr lang="en-US" sz="750" b="1" spc="200" kern="0" dirty="0">
                 <a:solidFill>
                   <a:srgbClr val="8A7B66"/>
                 </a:solidFill>
-                <a:latin typeface="Bridge Manrope SemiBold" pitchFamily="34" charset="0"/>
-                <a:ea typeface="Bridge Manrope SemiBold" pitchFamily="34" charset="-122"/>
-                <a:cs typeface="Bridge Manrope SemiBold" pitchFamily="34" charset="-120"/>
+                <a:latin typeface="Arial" pitchFamily="34" charset="0"/>
+                <a:ea typeface="Arial" pitchFamily="34" charset="-122"/>
+                <a:cs typeface="Arial" pitchFamily="34" charset="-120"/>
               </a:rPr>
               <a:t>CLAIMS · RISKS</a:t>
             </a:r>
@@ -9526,13 +9507,13 @@
               <a:buNone/>
             </a:pPr>
             <a:r>
-              <a:rPr lang="en-US" sz="1450" dirty="0">
+              <a:rPr lang="en-US" sz="1450" b="1" dirty="0">
                 <a:solidFill>
                   <a:srgbClr val="1A1816"/>
                 </a:solidFill>
-                <a:latin typeface="Bridge Manrope ExtraBold" pitchFamily="34" charset="0"/>
-                <a:ea typeface="Bridge Manrope ExtraBold" pitchFamily="34" charset="-122"/>
-                <a:cs typeface="Bridge Manrope ExtraBold" pitchFamily="34" charset="-120"/>
+                <a:latin typeface="Arial" pitchFamily="34" charset="0"/>
+                <a:ea typeface="Arial" pitchFamily="34" charset="-122"/>
+                <a:cs typeface="Arial" pitchFamily="34" charset="-120"/>
               </a:rPr>
               <a:t>Управление контрактами</a:t>
             </a:r>
@@ -9576,9 +9557,9 @@
                 <a:solidFill>
                   <a:srgbClr val="3A342D"/>
                 </a:solidFill>
-                <a:latin typeface="Bridge Manrope" pitchFamily="34" charset="0"/>
-                <a:ea typeface="Bridge Manrope" pitchFamily="34" charset="-122"/>
-                <a:cs typeface="Bridge Manrope" pitchFamily="34" charset="-120"/>
+                <a:latin typeface="Arial" pitchFamily="34" charset="0"/>
+                <a:ea typeface="Arial" pitchFamily="34" charset="-122"/>
+                <a:cs typeface="Arial" pitchFamily="34" charset="-120"/>
               </a:rPr>
               <a:t>Управление претензиями (claims)</a:t>
             </a:r>
@@ -9600,9 +9581,9 @@
                 <a:solidFill>
                   <a:srgbClr val="3A342D"/>
                 </a:solidFill>
-                <a:latin typeface="Bridge Manrope" pitchFamily="34" charset="0"/>
-                <a:ea typeface="Bridge Manrope" pitchFamily="34" charset="-122"/>
-                <a:cs typeface="Bridge Manrope" pitchFamily="34" charset="-120"/>
+                <a:latin typeface="Arial" pitchFamily="34" charset="0"/>
+                <a:ea typeface="Arial" pitchFamily="34" charset="-122"/>
+                <a:cs typeface="Arial" pitchFamily="34" charset="-120"/>
               </a:rPr>
               <a:t>Управление рисками и изменениями</a:t>
             </a:r>
@@ -9624,9 +9605,9 @@
                 <a:solidFill>
                   <a:srgbClr val="3A342D"/>
                 </a:solidFill>
-                <a:latin typeface="Bridge Manrope" pitchFamily="34" charset="0"/>
-                <a:ea typeface="Bridge Manrope" pitchFamily="34" charset="-122"/>
-                <a:cs typeface="Bridge Manrope" pitchFamily="34" charset="-120"/>
+                <a:latin typeface="Arial" pitchFamily="34" charset="0"/>
+                <a:ea typeface="Arial" pitchFamily="34" charset="-122"/>
+                <a:cs typeface="Arial" pitchFamily="34" charset="-120"/>
               </a:rPr>
               <a:t>Контроль бюджета, закупок и качества</a:t>
             </a:r>
@@ -9690,9 +9671,9 @@
                 <a:solidFill>
                   <a:srgbClr val="9B7C56"/>
                 </a:solidFill>
-                <a:latin typeface="Bridge Playfair" pitchFamily="34" charset="0"/>
-                <a:ea typeface="Bridge Playfair" pitchFamily="34" charset="-122"/>
-                <a:cs typeface="Bridge Playfair" pitchFamily="34" charset="-120"/>
+                <a:latin typeface="Georgia" pitchFamily="34" charset="0"/>
+                <a:ea typeface="Georgia" pitchFamily="34" charset="-122"/>
+                <a:cs typeface="Georgia" pitchFamily="34" charset="-120"/>
               </a:rPr>
               <a:t>03</a:t>
             </a:r>
@@ -9725,13 +9706,13 @@
               <a:buNone/>
             </a:pPr>
             <a:r>
-              <a:rPr lang="en-US" sz="750" spc="200" kern="0" dirty="0">
+              <a:rPr lang="en-US" sz="750" b="1" spc="200" kern="0" dirty="0">
                 <a:solidFill>
                   <a:srgbClr val="8A7B66"/>
                 </a:solidFill>
-                <a:latin typeface="Bridge Manrope SemiBold" pitchFamily="34" charset="0"/>
-                <a:ea typeface="Bridge Manrope SemiBold" pitchFamily="34" charset="-122"/>
-                <a:cs typeface="Bridge Manrope SemiBold" pitchFamily="34" charset="-120"/>
+                <a:latin typeface="Arial" pitchFamily="34" charset="0"/>
+                <a:ea typeface="Arial" pitchFamily="34" charset="-122"/>
+                <a:cs typeface="Arial" pitchFamily="34" charset="-120"/>
               </a:rPr>
               <a:t>DAAB · ADR</a:t>
             </a:r>
@@ -9764,13 +9745,13 @@
               <a:buNone/>
             </a:pPr>
             <a:r>
-              <a:rPr lang="en-US" sz="1450" dirty="0">
+              <a:rPr lang="en-US" sz="1450" b="1" dirty="0">
                 <a:solidFill>
                   <a:srgbClr val="1A1816"/>
                 </a:solidFill>
-                <a:latin typeface="Bridge Manrope ExtraBold" pitchFamily="34" charset="0"/>
-                <a:ea typeface="Bridge Manrope ExtraBold" pitchFamily="34" charset="-122"/>
-                <a:cs typeface="Bridge Manrope ExtraBold" pitchFamily="34" charset="-120"/>
+                <a:latin typeface="Arial" pitchFamily="34" charset="0"/>
+                <a:ea typeface="Arial" pitchFamily="34" charset="-122"/>
+                <a:cs typeface="Arial" pitchFamily="34" charset="-120"/>
               </a:rPr>
               <a:t>Споры и арбитраж</a:t>
             </a:r>
@@ -9814,9 +9795,9 @@
                 <a:solidFill>
                   <a:srgbClr val="3A342D"/>
                 </a:solidFill>
-                <a:latin typeface="Bridge Manrope" pitchFamily="34" charset="0"/>
-                <a:ea typeface="Bridge Manrope" pitchFamily="34" charset="-122"/>
-                <a:cs typeface="Bridge Manrope" pitchFamily="34" charset="-120"/>
+                <a:latin typeface="Arial" pitchFamily="34" charset="0"/>
+                <a:ea typeface="Arial" pitchFamily="34" charset="-122"/>
+                <a:cs typeface="Arial" pitchFamily="34" charset="-120"/>
               </a:rPr>
               <a:t>Советы по урегулированию споров DAAB / DAB</a:t>
             </a:r>
@@ -9838,9 +9819,9 @@
                 <a:solidFill>
                   <a:srgbClr val="3A342D"/>
                 </a:solidFill>
-                <a:latin typeface="Bridge Manrope" pitchFamily="34" charset="0"/>
-                <a:ea typeface="Bridge Manrope" pitchFamily="34" charset="-122"/>
-                <a:cs typeface="Bridge Manrope" pitchFamily="34" charset="-120"/>
+                <a:latin typeface="Arial" pitchFamily="34" charset="0"/>
+                <a:ea typeface="Arial" pitchFamily="34" charset="-122"/>
+                <a:cs typeface="Arial" pitchFamily="34" charset="-120"/>
               </a:rPr>
               <a:t>Медиация и внесудебное урегулирование</a:t>
             </a:r>
@@ -9862,9 +9843,9 @@
                 <a:solidFill>
                   <a:srgbClr val="3A342D"/>
                 </a:solidFill>
-                <a:latin typeface="Bridge Manrope" pitchFamily="34" charset="0"/>
-                <a:ea typeface="Bridge Manrope" pitchFamily="34" charset="-122"/>
-                <a:cs typeface="Bridge Manrope" pitchFamily="34" charset="-120"/>
+                <a:latin typeface="Arial" pitchFamily="34" charset="0"/>
+                <a:ea typeface="Arial" pitchFamily="34" charset="-122"/>
+                <a:cs typeface="Arial" pitchFamily="34" charset="-120"/>
               </a:rPr>
               <a:t>Экспертная поддержка в арбитраже</a:t>
             </a:r>
@@ -9928,9 +9909,9 @@
                 <a:solidFill>
                   <a:srgbClr val="9B7C56"/>
                 </a:solidFill>
-                <a:latin typeface="Bridge Playfair" pitchFamily="34" charset="0"/>
-                <a:ea typeface="Bridge Playfair" pitchFamily="34" charset="-122"/>
-                <a:cs typeface="Bridge Playfair" pitchFamily="34" charset="-120"/>
+                <a:latin typeface="Georgia" pitchFamily="34" charset="0"/>
+                <a:ea typeface="Georgia" pitchFamily="34" charset="-122"/>
+                <a:cs typeface="Georgia" pitchFamily="34" charset="-120"/>
               </a:rPr>
               <a:t>04</a:t>
             </a:r>
@@ -9963,13 +9944,13 @@
               <a:buNone/>
             </a:pPr>
             <a:r>
-              <a:rPr lang="en-US" sz="750" spc="200" kern="0" dirty="0">
+              <a:rPr lang="en-US" sz="750" b="1" spc="200" kern="0" dirty="0">
                 <a:solidFill>
                   <a:srgbClr val="8A7B66"/>
                 </a:solidFill>
-                <a:latin typeface="Bridge Manrope SemiBold" pitchFamily="34" charset="0"/>
-                <a:ea typeface="Bridge Manrope SemiBold" pitchFamily="34" charset="-122"/>
-                <a:cs typeface="Bridge Manrope SemiBold" pitchFamily="34" charset="-120"/>
+                <a:latin typeface="Arial" pitchFamily="34" charset="0"/>
+                <a:ea typeface="Arial" pitchFamily="34" charset="-122"/>
+                <a:cs typeface="Arial" pitchFamily="34" charset="-120"/>
               </a:rPr>
               <a:t>FDA · QUANTUM</a:t>
             </a:r>
@@ -10002,13 +9983,13 @@
               <a:buNone/>
             </a:pPr>
             <a:r>
-              <a:rPr lang="en-US" sz="1450" dirty="0">
+              <a:rPr lang="en-US" sz="1450" b="1" dirty="0">
                 <a:solidFill>
                   <a:srgbClr val="1A1816"/>
                 </a:solidFill>
-                <a:latin typeface="Bridge Manrope ExtraBold" pitchFamily="34" charset="0"/>
-                <a:ea typeface="Bridge Manrope ExtraBold" pitchFamily="34" charset="-122"/>
-                <a:cs typeface="Bridge Manrope ExtraBold" pitchFamily="34" charset="-120"/>
+                <a:latin typeface="Arial" pitchFamily="34" charset="0"/>
+                <a:ea typeface="Arial" pitchFamily="34" charset="-122"/>
+                <a:cs typeface="Arial" pitchFamily="34" charset="-120"/>
               </a:rPr>
               <a:t>Аналитика и обучение</a:t>
             </a:r>
@@ -10052,9 +10033,9 @@
                 <a:solidFill>
                   <a:srgbClr val="3A342D"/>
                 </a:solidFill>
-                <a:latin typeface="Bridge Manrope" pitchFamily="34" charset="0"/>
-                <a:ea typeface="Bridge Manrope" pitchFamily="34" charset="-122"/>
-                <a:cs typeface="Bridge Manrope" pitchFamily="34" charset="-120"/>
+                <a:latin typeface="Arial" pitchFamily="34" charset="0"/>
+                <a:ea typeface="Arial" pitchFamily="34" charset="-122"/>
+                <a:cs typeface="Arial" pitchFamily="34" charset="-120"/>
               </a:rPr>
               <a:t>Forensic Delay Analysis и расчёт Quantum</a:t>
             </a:r>
@@ -10076,9 +10057,9 @@
                 <a:solidFill>
                   <a:srgbClr val="3A342D"/>
                 </a:solidFill>
-                <a:latin typeface="Bridge Manrope" pitchFamily="34" charset="0"/>
-                <a:ea typeface="Bridge Manrope" pitchFamily="34" charset="-122"/>
-                <a:cs typeface="Bridge Manrope" pitchFamily="34" charset="-120"/>
+                <a:latin typeface="Arial" pitchFamily="34" charset="0"/>
+                <a:ea typeface="Arial" pitchFamily="34" charset="-122"/>
+                <a:cs typeface="Arial" pitchFamily="34" charset="-120"/>
               </a:rPr>
               <a:t>Адаптация к законодательству РУз</a:t>
             </a:r>
@@ -10100,9 +10081,9 @@
                 <a:solidFill>
                   <a:srgbClr val="3A342D"/>
                 </a:solidFill>
-                <a:latin typeface="Bridge Manrope" pitchFamily="34" charset="0"/>
-                <a:ea typeface="Bridge Manrope" pitchFamily="34" charset="-122"/>
-                <a:cs typeface="Bridge Manrope" pitchFamily="34" charset="-120"/>
+                <a:latin typeface="Arial" pitchFamily="34" charset="0"/>
+                <a:ea typeface="Arial" pitchFamily="34" charset="-122"/>
+                <a:cs typeface="Arial" pitchFamily="34" charset="-120"/>
               </a:rPr>
               <a:t>Семинары и корпоративное обучение</a:t>
             </a:r>
@@ -11612,13 +11593,13 @@
               <a:buNone/>
             </a:pPr>
             <a:r>
-              <a:rPr lang="en-US" sz="900" spc="200" kern="0" dirty="0">
+              <a:rPr lang="en-US" sz="900" b="1" spc="200" kern="0" dirty="0">
                 <a:solidFill>
                   <a:srgbClr val="F4EFE6"/>
                 </a:solidFill>
-                <a:latin typeface="Bridge Manrope SemiBold" pitchFamily="34" charset="0"/>
-                <a:ea typeface="Bridge Manrope SemiBold" pitchFamily="34" charset="-122"/>
-                <a:cs typeface="Bridge Manrope SemiBold" pitchFamily="34" charset="-120"/>
+                <a:latin typeface="Arial" pitchFamily="34" charset="0"/>
+                <a:ea typeface="Arial" pitchFamily="34" charset="-122"/>
+                <a:cs typeface="Arial" pitchFamily="34" charset="-120"/>
               </a:rPr>
               <a:t>05</a:t>
             </a:r>
@@ -11626,13 +11607,13 @@
               <a:buNone/>
             </a:pPr>
             <a:r>
-              <a:rPr lang="en-US" sz="900" spc="200" kern="0" dirty="0">
+              <a:rPr lang="en-US" sz="900" b="1" spc="200" kern="0" dirty="0">
                 <a:solidFill>
                   <a:srgbClr val="A39C91"/>
                 </a:solidFill>
-                <a:latin typeface="Bridge Manrope SemiBold" pitchFamily="34" charset="0"/>
-                <a:ea typeface="Bridge Manrope SemiBold" pitchFamily="34" charset="-122"/>
-                <a:cs typeface="Bridge Manrope SemiBold" pitchFamily="34" charset="-120"/>
+                <a:latin typeface="Arial" pitchFamily="34" charset="0"/>
+                <a:ea typeface="Arial" pitchFamily="34" charset="-122"/>
+                <a:cs typeface="Arial" pitchFamily="34" charset="-120"/>
               </a:rPr>
               <a:t> / 10</a:t>
             </a:r>
@@ -11665,13 +11646,13 @@
               <a:buNone/>
             </a:pPr>
             <a:r>
-              <a:rPr lang="en-US" sz="800" spc="200" kern="0" dirty="0">
+              <a:rPr lang="en-US" sz="800" b="1" spc="200" kern="0" dirty="0">
                 <a:solidFill>
                   <a:srgbClr val="A39C91"/>
                 </a:solidFill>
-                <a:latin typeface="Bridge Manrope SemiBold" pitchFamily="34" charset="0"/>
-                <a:ea typeface="Bridge Manrope SemiBold" pitchFamily="34" charset="-122"/>
-                <a:cs typeface="Bridge Manrope SemiBold" pitchFamily="34" charset="-120"/>
+                <a:latin typeface="Arial" pitchFamily="34" charset="0"/>
+                <a:ea typeface="Arial" pitchFamily="34" charset="-122"/>
+                <a:cs typeface="Arial" pitchFamily="34" charset="-120"/>
               </a:rPr>
               <a:t>bridgeconsult.uz</a:t>
             </a:r>
@@ -11704,13 +11685,13 @@
               <a:buNone/>
             </a:pPr>
             <a:r>
-              <a:rPr lang="en-US" sz="800" spc="200" kern="0" dirty="0">
+              <a:rPr lang="en-US" sz="800" b="1" spc="200" kern="0" dirty="0">
                 <a:solidFill>
                   <a:srgbClr val="A39C91"/>
                 </a:solidFill>
-                <a:latin typeface="Bridge Manrope SemiBold" pitchFamily="34" charset="0"/>
-                <a:ea typeface="Bridge Manrope SemiBold" pitchFamily="34" charset="-122"/>
-                <a:cs typeface="Bridge Manrope SemiBold" pitchFamily="34" charset="-120"/>
+                <a:latin typeface="Arial" pitchFamily="34" charset="0"/>
+                <a:ea typeface="Arial" pitchFamily="34" charset="-122"/>
+                <a:cs typeface="Arial" pitchFamily="34" charset="-120"/>
               </a:rPr>
               <a:t>41.2995° N  ·  69.2401° E</a:t>
             </a:r>
@@ -11766,13 +11747,13 @@
               <a:buNone/>
             </a:pPr>
             <a:r>
-              <a:rPr lang="en-US" sz="900" spc="300" kern="0" dirty="0">
+              <a:rPr lang="en-US" sz="900" b="1" spc="300" kern="0" dirty="0">
                 <a:solidFill>
                   <a:srgbClr val="D8BD96"/>
                 </a:solidFill>
-                <a:latin typeface="Bridge Manrope SemiBold" pitchFamily="34" charset="0"/>
-                <a:ea typeface="Bridge Manrope SemiBold" pitchFamily="34" charset="-122"/>
-                <a:cs typeface="Bridge Manrope SemiBold" pitchFamily="34" charset="-120"/>
+                <a:latin typeface="Arial" pitchFamily="34" charset="0"/>
+                <a:ea typeface="Arial" pitchFamily="34" charset="-122"/>
+                <a:cs typeface="Arial" pitchFamily="34" charset="-120"/>
               </a:rPr>
               <a:t>ЭКСПЕРТИЗА FIDIC</a:t>
             </a:r>
@@ -11809,9 +11790,9 @@
                 <a:solidFill>
                   <a:srgbClr val="F4EFE6"/>
                 </a:solidFill>
-                <a:latin typeface="Bridge Playfair" pitchFamily="34" charset="0"/>
-                <a:ea typeface="Bridge Playfair" pitchFamily="34" charset="-122"/>
-                <a:cs typeface="Bridge Playfair" pitchFamily="34" charset="-120"/>
+                <a:latin typeface="Georgia" pitchFamily="34" charset="0"/>
+                <a:ea typeface="Georgia" pitchFamily="34" charset="-122"/>
+                <a:cs typeface="Georgia" pitchFamily="34" charset="-120"/>
               </a:rPr>
               <a:t>Вся линейка</a:t>
             </a:r>
@@ -11848,9 +11829,9 @@
                 <a:solidFill>
                   <a:srgbClr val="D8BD96"/>
                 </a:solidFill>
-                <a:latin typeface="Bridge Playfair" pitchFamily="34" charset="0"/>
-                <a:ea typeface="Bridge Playfair" pitchFamily="34" charset="-122"/>
-                <a:cs typeface="Bridge Playfair" pitchFamily="34" charset="-120"/>
+                <a:latin typeface="Georgia" pitchFamily="34" charset="0"/>
+                <a:ea typeface="Georgia" pitchFamily="34" charset="-122"/>
+                <a:cs typeface="Georgia" pitchFamily="34" charset="-120"/>
               </a:rPr>
               <a:t>проформ FIDIC</a:t>
             </a:r>
@@ -11890,9 +11871,9 @@
                 <a:solidFill>
                   <a:srgbClr val="A39C91"/>
                 </a:solidFill>
-                <a:latin typeface="Bridge Manrope" pitchFamily="34" charset="0"/>
-                <a:ea typeface="Bridge Manrope" pitchFamily="34" charset="-122"/>
-                <a:cs typeface="Bridge Manrope" pitchFamily="34" charset="-120"/>
+                <a:latin typeface="Arial" pitchFamily="34" charset="0"/>
+                <a:ea typeface="Arial" pitchFamily="34" charset="-122"/>
+                <a:cs typeface="Arial" pitchFamily="34" charset="-120"/>
               </a:rPr>
               <a:t>Золотой стандарт типовых контрактов Международной федерации инженеров-консультантов — в ежедневной практике команды.</a:t>
             </a:r>
@@ -11948,13 +11929,13 @@
               <a:buNone/>
             </a:pPr>
             <a:r>
-              <a:rPr lang="en-US" sz="1350" dirty="0">
+              <a:rPr lang="en-US" sz="1350" b="1" dirty="0">
                 <a:solidFill>
                   <a:srgbClr val="F4EFE6"/>
                 </a:solidFill>
-                <a:latin typeface="Bridge Manrope SemiBold" pitchFamily="34" charset="0"/>
-                <a:ea typeface="Bridge Manrope SemiBold" pitchFamily="34" charset="-122"/>
-                <a:cs typeface="Bridge Manrope SemiBold" pitchFamily="34" charset="-120"/>
+                <a:latin typeface="Arial" pitchFamily="34" charset="0"/>
+                <a:ea typeface="Arial" pitchFamily="34" charset="-122"/>
+                <a:cs typeface="Arial" pitchFamily="34" charset="-120"/>
               </a:rPr>
               <a:t>Forensic Delay Analysis</a:t>
             </a:r>
@@ -11994,9 +11975,9 @@
                 <a:solidFill>
                   <a:srgbClr val="A39C91"/>
                 </a:solidFill>
-                <a:latin typeface="Bridge Manrope" pitchFamily="34" charset="0"/>
-                <a:ea typeface="Bridge Manrope" pitchFamily="34" charset="-122"/>
-                <a:cs typeface="Bridge Manrope" pitchFamily="34" charset="-120"/>
+                <a:latin typeface="Arial" pitchFamily="34" charset="0"/>
+                <a:ea typeface="Arial" pitchFamily="34" charset="-122"/>
+                <a:cs typeface="Arial" pitchFamily="34" charset="-120"/>
               </a:rPr>
               <a:t>SCL Protocol: Time Impact и Time Slice Analysis — обоснование права на продление сроков (EOT) и компенсацию.</a:t>
             </a:r>
@@ -12052,13 +12033,13 @@
               <a:buNone/>
             </a:pPr>
             <a:r>
-              <a:rPr lang="en-US" sz="1350" dirty="0">
+              <a:rPr lang="en-US" sz="1350" b="1" dirty="0">
                 <a:solidFill>
                   <a:srgbClr val="F4EFE6"/>
                 </a:solidFill>
-                <a:latin typeface="Bridge Manrope SemiBold" pitchFamily="34" charset="0"/>
-                <a:ea typeface="Bridge Manrope SemiBold" pitchFamily="34" charset="-122"/>
-                <a:cs typeface="Bridge Manrope SemiBold" pitchFamily="34" charset="-120"/>
+                <a:latin typeface="Arial" pitchFamily="34" charset="0"/>
+                <a:ea typeface="Arial" pitchFamily="34" charset="-122"/>
+                <a:cs typeface="Arial" pitchFamily="34" charset="-120"/>
               </a:rPr>
               <a:t>DAAB / DAB</a:t>
             </a:r>
@@ -12098,9 +12079,9 @@
                 <a:solidFill>
                   <a:srgbClr val="A39C91"/>
                 </a:solidFill>
-                <a:latin typeface="Bridge Manrope" pitchFamily="34" charset="0"/>
-                <a:ea typeface="Bridge Manrope" pitchFamily="34" charset="-122"/>
-                <a:cs typeface="Bridge Manrope" pitchFamily="34" charset="-120"/>
+                <a:latin typeface="Arial" pitchFamily="34" charset="0"/>
+                <a:ea typeface="Arial" pitchFamily="34" charset="-122"/>
+                <a:cs typeface="Arial" pitchFamily="34" charset="-120"/>
               </a:rPr>
               <a:t>Структурирование советов по спорам, Position Papers и представительство клиента на слушаниях.</a:t>
             </a:r>
@@ -12153,13 +12134,13 @@
               <a:buNone/>
             </a:pPr>
             <a:r>
-              <a:rPr lang="en-US" sz="750" spc="300" kern="0" dirty="0">
+              <a:rPr lang="en-US" sz="750" b="1" spc="300" kern="0" dirty="0">
                 <a:solidFill>
                   <a:srgbClr val="F4EFE6"/>
                 </a:solidFill>
-                <a:latin typeface="Bridge Manrope SemiBold" pitchFamily="34" charset="0"/>
-                <a:ea typeface="Bridge Manrope SemiBold" pitchFamily="34" charset="-122"/>
-                <a:cs typeface="Bridge Manrope SemiBold" pitchFamily="34" charset="-120"/>
+                <a:latin typeface="Arial" pitchFamily="34" charset="0"/>
+                <a:ea typeface="Arial" pitchFamily="34" charset="-122"/>
+                <a:cs typeface="Arial" pitchFamily="34" charset="-120"/>
               </a:rPr>
               <a:t>FIDIC</a:t>
             </a:r>
@@ -12196,9 +12177,9 @@
                 <a:solidFill>
                   <a:srgbClr val="F4EFE6"/>
                 </a:solidFill>
-                <a:latin typeface="Bridge Playfair" pitchFamily="34" charset="0"/>
-                <a:ea typeface="Bridge Playfair" pitchFamily="34" charset="-122"/>
-                <a:cs typeface="Bridge Playfair" pitchFamily="34" charset="-120"/>
+                <a:latin typeface="Georgia" pitchFamily="34" charset="0"/>
+                <a:ea typeface="Georgia" pitchFamily="34" charset="-122"/>
+                <a:cs typeface="Georgia" pitchFamily="34" charset="-120"/>
               </a:rPr>
               <a:t>Red Book</a:t>
             </a:r>
@@ -12234,13 +12215,13 @@
               <a:buNone/>
             </a:pPr>
             <a:r>
-              <a:rPr lang="en-US" sz="750" dirty="0">
+              <a:rPr lang="en-US" sz="750" b="1" dirty="0">
                 <a:solidFill>
                   <a:srgbClr val="F4EFE6"/>
                 </a:solidFill>
-                <a:latin typeface="Bridge Manrope SemiBold" pitchFamily="34" charset="0"/>
-                <a:ea typeface="Bridge Manrope SemiBold" pitchFamily="34" charset="-122"/>
-                <a:cs typeface="Bridge Manrope SemiBold" pitchFamily="34" charset="-120"/>
+                <a:latin typeface="Arial" pitchFamily="34" charset="0"/>
+                <a:ea typeface="Arial" pitchFamily="34" charset="-122"/>
+                <a:cs typeface="Arial" pitchFamily="34" charset="-120"/>
               </a:rPr>
               <a:t>Строительство по проекту Заказчика</a:t>
             </a:r>
@@ -12293,13 +12274,13 @@
               <a:buNone/>
             </a:pPr>
             <a:r>
-              <a:rPr lang="en-US" sz="750" spc="300" kern="0" dirty="0">
+              <a:rPr lang="en-US" sz="750" b="1" spc="300" kern="0" dirty="0">
                 <a:solidFill>
                   <a:srgbClr val="1A1816"/>
                 </a:solidFill>
-                <a:latin typeface="Bridge Manrope SemiBold" pitchFamily="34" charset="0"/>
-                <a:ea typeface="Bridge Manrope SemiBold" pitchFamily="34" charset="-122"/>
-                <a:cs typeface="Bridge Manrope SemiBold" pitchFamily="34" charset="-120"/>
+                <a:latin typeface="Arial" pitchFamily="34" charset="0"/>
+                <a:ea typeface="Arial" pitchFamily="34" charset="-122"/>
+                <a:cs typeface="Arial" pitchFamily="34" charset="-120"/>
               </a:rPr>
               <a:t>FIDIC</a:t>
             </a:r>
@@ -12336,9 +12317,9 @@
                 <a:solidFill>
                   <a:srgbClr val="1A1816"/>
                 </a:solidFill>
-                <a:latin typeface="Bridge Playfair" pitchFamily="34" charset="0"/>
-                <a:ea typeface="Bridge Playfair" pitchFamily="34" charset="-122"/>
-                <a:cs typeface="Bridge Playfair" pitchFamily="34" charset="-120"/>
+                <a:latin typeface="Georgia" pitchFamily="34" charset="0"/>
+                <a:ea typeface="Georgia" pitchFamily="34" charset="-122"/>
+                <a:cs typeface="Georgia" pitchFamily="34" charset="-120"/>
               </a:rPr>
               <a:t>Yellow Book</a:t>
             </a:r>
@@ -12374,13 +12355,13 @@
               <a:buNone/>
             </a:pPr>
             <a:r>
-              <a:rPr lang="en-US" sz="750" dirty="0">
+              <a:rPr lang="en-US" sz="750" b="1" dirty="0">
                 <a:solidFill>
                   <a:srgbClr val="1A1816"/>
                 </a:solidFill>
-                <a:latin typeface="Bridge Manrope SemiBold" pitchFamily="34" charset="0"/>
-                <a:ea typeface="Bridge Manrope SemiBold" pitchFamily="34" charset="-122"/>
-                <a:cs typeface="Bridge Manrope SemiBold" pitchFamily="34" charset="-120"/>
+                <a:latin typeface="Arial" pitchFamily="34" charset="0"/>
+                <a:ea typeface="Arial" pitchFamily="34" charset="-122"/>
+                <a:cs typeface="Arial" pitchFamily="34" charset="-120"/>
               </a:rPr>
               <a:t>Проектирование и строительство</a:t>
             </a:r>
@@ -12433,13 +12414,13 @@
               <a:buNone/>
             </a:pPr>
             <a:r>
-              <a:rPr lang="en-US" sz="750" spc="300" kern="0" dirty="0">
+              <a:rPr lang="en-US" sz="750" b="1" spc="300" kern="0" dirty="0">
                 <a:solidFill>
                   <a:srgbClr val="1A1816"/>
                 </a:solidFill>
-                <a:latin typeface="Bridge Manrope SemiBold" pitchFamily="34" charset="0"/>
-                <a:ea typeface="Bridge Manrope SemiBold" pitchFamily="34" charset="-122"/>
-                <a:cs typeface="Bridge Manrope SemiBold" pitchFamily="34" charset="-120"/>
+                <a:latin typeface="Arial" pitchFamily="34" charset="0"/>
+                <a:ea typeface="Arial" pitchFamily="34" charset="-122"/>
+                <a:cs typeface="Arial" pitchFamily="34" charset="-120"/>
               </a:rPr>
               <a:t>FIDIC</a:t>
             </a:r>
@@ -12476,9 +12457,9 @@
                 <a:solidFill>
                   <a:srgbClr val="1A1816"/>
                 </a:solidFill>
-                <a:latin typeface="Bridge Playfair" pitchFamily="34" charset="0"/>
-                <a:ea typeface="Bridge Playfair" pitchFamily="34" charset="-122"/>
-                <a:cs typeface="Bridge Playfair" pitchFamily="34" charset="-120"/>
+                <a:latin typeface="Georgia" pitchFamily="34" charset="0"/>
+                <a:ea typeface="Georgia" pitchFamily="34" charset="-122"/>
+                <a:cs typeface="Georgia" pitchFamily="34" charset="-120"/>
               </a:rPr>
               <a:t>Silver Book</a:t>
             </a:r>
@@ -12514,13 +12495,13 @@
               <a:buNone/>
             </a:pPr>
             <a:r>
-              <a:rPr lang="en-US" sz="750" dirty="0">
+              <a:rPr lang="en-US" sz="750" b="1" dirty="0">
                 <a:solidFill>
                   <a:srgbClr val="1A1816"/>
                 </a:solidFill>
-                <a:latin typeface="Bridge Manrope SemiBold" pitchFamily="34" charset="0"/>
-                <a:ea typeface="Bridge Manrope SemiBold" pitchFamily="34" charset="-122"/>
-                <a:cs typeface="Bridge Manrope SemiBold" pitchFamily="34" charset="-120"/>
+                <a:latin typeface="Arial" pitchFamily="34" charset="0"/>
+                <a:ea typeface="Arial" pitchFamily="34" charset="-122"/>
+                <a:cs typeface="Arial" pitchFamily="34" charset="-120"/>
               </a:rPr>
               <a:t>EPC / объекты под ключ</a:t>
             </a:r>
@@ -12573,13 +12554,13 @@
               <a:buNone/>
             </a:pPr>
             <a:r>
-              <a:rPr lang="en-US" sz="750" spc="300" kern="0" dirty="0">
+              <a:rPr lang="en-US" sz="750" b="1" spc="300" kern="0" dirty="0">
                 <a:solidFill>
                   <a:srgbClr val="1A1816"/>
                 </a:solidFill>
-                <a:latin typeface="Bridge Manrope SemiBold" pitchFamily="34" charset="0"/>
-                <a:ea typeface="Bridge Manrope SemiBold" pitchFamily="34" charset="-122"/>
-                <a:cs typeface="Bridge Manrope SemiBold" pitchFamily="34" charset="-120"/>
+                <a:latin typeface="Arial" pitchFamily="34" charset="0"/>
+                <a:ea typeface="Arial" pitchFamily="34" charset="-122"/>
+                <a:cs typeface="Arial" pitchFamily="34" charset="-120"/>
               </a:rPr>
               <a:t>FIDIC</a:t>
             </a:r>
@@ -12616,9 +12597,9 @@
                 <a:solidFill>
                   <a:srgbClr val="1A1816"/>
                 </a:solidFill>
-                <a:latin typeface="Bridge Playfair" pitchFamily="34" charset="0"/>
-                <a:ea typeface="Bridge Playfair" pitchFamily="34" charset="-122"/>
-                <a:cs typeface="Bridge Playfair" pitchFamily="34" charset="-120"/>
+                <a:latin typeface="Georgia" pitchFamily="34" charset="0"/>
+                <a:ea typeface="Georgia" pitchFamily="34" charset="-122"/>
+                <a:cs typeface="Georgia" pitchFamily="34" charset="-120"/>
               </a:rPr>
               <a:t>Pink Book</a:t>
             </a:r>
@@ -12654,13 +12635,13 @@
               <a:buNone/>
             </a:pPr>
             <a:r>
-              <a:rPr lang="en-US" sz="750" dirty="0">
+              <a:rPr lang="en-US" sz="750" b="1" dirty="0">
                 <a:solidFill>
                   <a:srgbClr val="1A1816"/>
                 </a:solidFill>
-                <a:latin typeface="Bridge Manrope SemiBold" pitchFamily="34" charset="0"/>
-                <a:ea typeface="Bridge Manrope SemiBold" pitchFamily="34" charset="-122"/>
-                <a:cs typeface="Bridge Manrope SemiBold" pitchFamily="34" charset="-120"/>
+                <a:latin typeface="Arial" pitchFamily="34" charset="0"/>
+                <a:ea typeface="Arial" pitchFamily="34" charset="-122"/>
+                <a:cs typeface="Arial" pitchFamily="34" charset="-120"/>
               </a:rPr>
               <a:t>MDB: издание для банков развития</a:t>
             </a:r>
@@ -12713,13 +12694,13 @@
               <a:buNone/>
             </a:pPr>
             <a:r>
-              <a:rPr lang="en-US" sz="750" spc="300" kern="0" dirty="0">
+              <a:rPr lang="en-US" sz="750" b="1" spc="300" kern="0" dirty="0">
                 <a:solidFill>
                   <a:srgbClr val="1A1816"/>
                 </a:solidFill>
-                <a:latin typeface="Bridge Manrope SemiBold" pitchFamily="34" charset="0"/>
-                <a:ea typeface="Bridge Manrope SemiBold" pitchFamily="34" charset="-122"/>
-                <a:cs typeface="Bridge Manrope SemiBold" pitchFamily="34" charset="-120"/>
+                <a:latin typeface="Arial" pitchFamily="34" charset="0"/>
+                <a:ea typeface="Arial" pitchFamily="34" charset="-122"/>
+                <a:cs typeface="Arial" pitchFamily="34" charset="-120"/>
               </a:rPr>
               <a:t>FIDIC</a:t>
             </a:r>
@@ -12756,9 +12737,9 @@
                 <a:solidFill>
                   <a:srgbClr val="1A1816"/>
                 </a:solidFill>
-                <a:latin typeface="Bridge Playfair" pitchFamily="34" charset="0"/>
-                <a:ea typeface="Bridge Playfair" pitchFamily="34" charset="-122"/>
-                <a:cs typeface="Bridge Playfair" pitchFamily="34" charset="-120"/>
+                <a:latin typeface="Georgia" pitchFamily="34" charset="0"/>
+                <a:ea typeface="Georgia" pitchFamily="34" charset="-122"/>
+                <a:cs typeface="Georgia" pitchFamily="34" charset="-120"/>
               </a:rPr>
               <a:t>White Book</a:t>
             </a:r>
@@ -12794,13 +12775,13 @@
               <a:buNone/>
             </a:pPr>
             <a:r>
-              <a:rPr lang="en-US" sz="750" dirty="0">
+              <a:rPr lang="en-US" sz="750" b="1" dirty="0">
                 <a:solidFill>
                   <a:srgbClr val="1A1816"/>
                 </a:solidFill>
-                <a:latin typeface="Bridge Manrope SemiBold" pitchFamily="34" charset="0"/>
-                <a:ea typeface="Bridge Manrope SemiBold" pitchFamily="34" charset="-122"/>
-                <a:cs typeface="Bridge Manrope SemiBold" pitchFamily="34" charset="-120"/>
+                <a:latin typeface="Arial" pitchFamily="34" charset="0"/>
+                <a:ea typeface="Arial" pitchFamily="34" charset="-122"/>
+                <a:cs typeface="Arial" pitchFamily="34" charset="-120"/>
               </a:rPr>
               <a:t>Договор с консультантом</a:t>
             </a:r>
@@ -14331,13 +14312,13 @@
               <a:buNone/>
             </a:pPr>
             <a:r>
-              <a:rPr lang="en-US" sz="900" spc="200" kern="0" dirty="0">
+              <a:rPr lang="en-US" sz="900" b="1" spc="200" kern="0" dirty="0">
                 <a:solidFill>
                   <a:srgbClr val="1A1816"/>
                 </a:solidFill>
-                <a:latin typeface="Bridge Manrope SemiBold" pitchFamily="34" charset="0"/>
-                <a:ea typeface="Bridge Manrope SemiBold" pitchFamily="34" charset="-122"/>
-                <a:cs typeface="Bridge Manrope SemiBold" pitchFamily="34" charset="-120"/>
+                <a:latin typeface="Arial" pitchFamily="34" charset="0"/>
+                <a:ea typeface="Arial" pitchFamily="34" charset="-122"/>
+                <a:cs typeface="Arial" pitchFamily="34" charset="-120"/>
               </a:rPr>
               <a:t>06</a:t>
             </a:r>
@@ -14345,13 +14326,13 @@
               <a:buNone/>
             </a:pPr>
             <a:r>
-              <a:rPr lang="en-US" sz="900" spc="200" kern="0" dirty="0">
+              <a:rPr lang="en-US" sz="900" b="1" spc="200" kern="0" dirty="0">
                 <a:solidFill>
                   <a:srgbClr val="6E655A"/>
                 </a:solidFill>
-                <a:latin typeface="Bridge Manrope SemiBold" pitchFamily="34" charset="0"/>
-                <a:ea typeface="Bridge Manrope SemiBold" pitchFamily="34" charset="-122"/>
-                <a:cs typeface="Bridge Manrope SemiBold" pitchFamily="34" charset="-120"/>
+                <a:latin typeface="Arial" pitchFamily="34" charset="0"/>
+                <a:ea typeface="Arial" pitchFamily="34" charset="-122"/>
+                <a:cs typeface="Arial" pitchFamily="34" charset="-120"/>
               </a:rPr>
               <a:t> / 10</a:t>
             </a:r>
@@ -14384,13 +14365,13 @@
               <a:buNone/>
             </a:pPr>
             <a:r>
-              <a:rPr lang="en-US" sz="800" spc="200" kern="0" dirty="0">
+              <a:rPr lang="en-US" sz="800" b="1" spc="200" kern="0" dirty="0">
                 <a:solidFill>
                   <a:srgbClr val="6E655A"/>
                 </a:solidFill>
-                <a:latin typeface="Bridge Manrope SemiBold" pitchFamily="34" charset="0"/>
-                <a:ea typeface="Bridge Manrope SemiBold" pitchFamily="34" charset="-122"/>
-                <a:cs typeface="Bridge Manrope SemiBold" pitchFamily="34" charset="-120"/>
+                <a:latin typeface="Arial" pitchFamily="34" charset="0"/>
+                <a:ea typeface="Arial" pitchFamily="34" charset="-122"/>
+                <a:cs typeface="Arial" pitchFamily="34" charset="-120"/>
               </a:rPr>
               <a:t>bridgeconsult.uz</a:t>
             </a:r>
@@ -14423,13 +14404,13 @@
               <a:buNone/>
             </a:pPr>
             <a:r>
-              <a:rPr lang="en-US" sz="800" spc="200" kern="0" dirty="0">
+              <a:rPr lang="en-US" sz="800" b="1" spc="200" kern="0" dirty="0">
                 <a:solidFill>
                   <a:srgbClr val="6E655A"/>
                 </a:solidFill>
-                <a:latin typeface="Bridge Manrope SemiBold" pitchFamily="34" charset="0"/>
-                <a:ea typeface="Bridge Manrope SemiBold" pitchFamily="34" charset="-122"/>
-                <a:cs typeface="Bridge Manrope SemiBold" pitchFamily="34" charset="-120"/>
+                <a:latin typeface="Arial" pitchFamily="34" charset="0"/>
+                <a:ea typeface="Arial" pitchFamily="34" charset="-122"/>
+                <a:cs typeface="Arial" pitchFamily="34" charset="-120"/>
               </a:rPr>
               <a:t>41.2995° N  ·  69.2401° E</a:t>
             </a:r>
@@ -14485,13 +14466,13 @@
               <a:buNone/>
             </a:pPr>
             <a:r>
-              <a:rPr lang="en-US" sz="900" spc="300" kern="0" dirty="0">
+              <a:rPr lang="en-US" sz="900" b="1" spc="300" kern="0" dirty="0">
                 <a:solidFill>
                   <a:srgbClr val="9B7C56"/>
                 </a:solidFill>
-                <a:latin typeface="Bridge Manrope SemiBold" pitchFamily="34" charset="0"/>
-                <a:ea typeface="Bridge Manrope SemiBold" pitchFamily="34" charset="-122"/>
-                <a:cs typeface="Bridge Manrope SemiBold" pitchFamily="34" charset="-120"/>
+                <a:latin typeface="Arial" pitchFamily="34" charset="0"/>
+                <a:ea typeface="Arial" pitchFamily="34" charset="-122"/>
+                <a:cs typeface="Arial" pitchFamily="34" charset="-120"/>
               </a:rPr>
               <a:t>ПОРТФОЛИО</a:t>
             </a:r>
@@ -14528,9 +14509,9 @@
                 <a:solidFill>
                   <a:srgbClr val="1A1816"/>
                 </a:solidFill>
-                <a:latin typeface="Bridge Playfair" pitchFamily="34" charset="0"/>
-                <a:ea typeface="Bridge Playfair" pitchFamily="34" charset="-122"/>
-                <a:cs typeface="Bridge Playfair" pitchFamily="34" charset="-120"/>
+                <a:latin typeface="Georgia" pitchFamily="34" charset="0"/>
+                <a:ea typeface="Georgia" pitchFamily="34" charset="-122"/>
+                <a:cs typeface="Georgia" pitchFamily="34" charset="-120"/>
               </a:rPr>
               <a:t>Избранные</a:t>
             </a:r>
@@ -14567,9 +14548,9 @@
                 <a:solidFill>
                   <a:srgbClr val="9B7C56"/>
                 </a:solidFill>
-                <a:latin typeface="Bridge Playfair" pitchFamily="34" charset="0"/>
-                <a:ea typeface="Bridge Playfair" pitchFamily="34" charset="-122"/>
-                <a:cs typeface="Bridge Playfair" pitchFamily="34" charset="-120"/>
+                <a:latin typeface="Georgia" pitchFamily="34" charset="0"/>
+                <a:ea typeface="Georgia" pitchFamily="34" charset="-122"/>
+                <a:cs typeface="Georgia" pitchFamily="34" charset="-120"/>
               </a:rPr>
               <a:t>проекты</a:t>
             </a:r>
@@ -14609,9 +14590,9 @@
                 <a:solidFill>
                   <a:srgbClr val="6E655A"/>
                 </a:solidFill>
-                <a:latin typeface="Bridge Manrope" pitchFamily="34" charset="0"/>
-                <a:ea typeface="Bridge Manrope" pitchFamily="34" charset="-122"/>
-                <a:cs typeface="Bridge Manrope" pitchFamily="34" charset="-120"/>
+                <a:latin typeface="Arial" pitchFamily="34" charset="0"/>
+                <a:ea typeface="Arial" pitchFamily="34" charset="-122"/>
+                <a:cs typeface="Arial" pitchFamily="34" charset="-120"/>
               </a:rPr>
               <a:t>Контрактное сопровождение объектов национального масштаба — от спортивной инфраструктуры до транспортных коридоров ЦАРЭС.</a:t>
             </a:r>
@@ -14690,13 +14671,13 @@
               <a:buNone/>
             </a:pPr>
             <a:r>
-              <a:rPr lang="en-US" sz="750" spc="150" kern="0" dirty="0">
+              <a:rPr lang="en-US" sz="750" b="1" spc="150" kern="0" dirty="0">
                 <a:solidFill>
                   <a:srgbClr val="F0DCBA"/>
                 </a:solidFill>
-                <a:latin typeface="Bridge Manrope SemiBold" pitchFamily="34" charset="0"/>
-                <a:ea typeface="Bridge Manrope SemiBold" pitchFamily="34" charset="-122"/>
-                <a:cs typeface="Bridge Manrope SemiBold" pitchFamily="34" charset="-120"/>
+                <a:latin typeface="Arial" pitchFamily="34" charset="0"/>
+                <a:ea typeface="Arial" pitchFamily="34" charset="-122"/>
+                <a:cs typeface="Arial" pitchFamily="34" charset="-120"/>
               </a:rPr>
               <a:t>EPC+F</a:t>
             </a:r>
@@ -14729,13 +14710,13 @@
               <a:buNone/>
             </a:pPr>
             <a:r>
-              <a:rPr lang="en-US" sz="850" spc="200" kern="0" dirty="0">
+              <a:rPr lang="en-US" sz="850" b="1" spc="200" kern="0" dirty="0">
                 <a:solidFill>
                   <a:srgbClr val="9B7C56"/>
                 </a:solidFill>
-                <a:latin typeface="Bridge Manrope SemiBold" pitchFamily="34" charset="0"/>
-                <a:ea typeface="Bridge Manrope SemiBold" pitchFamily="34" charset="-122"/>
-                <a:cs typeface="Bridge Manrope SemiBold" pitchFamily="34" charset="-120"/>
+                <a:latin typeface="Arial" pitchFamily="34" charset="0"/>
+                <a:ea typeface="Arial" pitchFamily="34" charset="-122"/>
+                <a:cs typeface="Arial" pitchFamily="34" charset="-120"/>
               </a:rPr>
               <a:t>2022 — 2025</a:t>
             </a:r>
@@ -14768,13 +14749,13 @@
               <a:buNone/>
             </a:pPr>
             <a:r>
-              <a:rPr lang="en-US" sz="1400" dirty="0">
+              <a:rPr lang="en-US" sz="1400" b="1" dirty="0">
                 <a:solidFill>
                   <a:srgbClr val="1A1816"/>
                 </a:solidFill>
-                <a:latin typeface="Bridge Manrope ExtraBold" pitchFamily="34" charset="0"/>
-                <a:ea typeface="Bridge Manrope ExtraBold" pitchFamily="34" charset="-122"/>
-                <a:cs typeface="Bridge Manrope ExtraBold" pitchFamily="34" charset="-120"/>
+                <a:latin typeface="Arial" pitchFamily="34" charset="0"/>
+                <a:ea typeface="Arial" pitchFamily="34" charset="-122"/>
+                <a:cs typeface="Arial" pitchFamily="34" charset="-120"/>
               </a:rPr>
               <a:t>Олимпийский городок, Ташкент</a:t>
             </a:r>
@@ -14814,9 +14795,9 @@
                 <a:solidFill>
                   <a:srgbClr val="6E655A"/>
                 </a:solidFill>
-                <a:latin typeface="Bridge Manrope" pitchFamily="34" charset="0"/>
-                <a:ea typeface="Bridge Manrope" pitchFamily="34" charset="-122"/>
-                <a:cs typeface="Bridge Manrope" pitchFamily="34" charset="-120"/>
+                <a:latin typeface="Arial" pitchFamily="34" charset="0"/>
+                <a:ea typeface="Arial" pitchFamily="34" charset="-122"/>
+                <a:cs typeface="Arial" pitchFamily="34" charset="-120"/>
               </a:rPr>
               <a:t>Спортивные объекты IV Летних Азиатских юношеских игр.</a:t>
             </a:r>
@@ -14895,13 +14876,13 @@
               <a:buNone/>
             </a:pPr>
             <a:r>
-              <a:rPr lang="en-US" sz="750" spc="150" kern="0" dirty="0">
+              <a:rPr lang="en-US" sz="750" b="1" spc="150" kern="0" dirty="0">
                 <a:solidFill>
                   <a:srgbClr val="F0DCBA"/>
                 </a:solidFill>
-                <a:latin typeface="Bridge Manrope SemiBold" pitchFamily="34" charset="0"/>
-                <a:ea typeface="Bridge Manrope SemiBold" pitchFamily="34" charset="-122"/>
-                <a:cs typeface="Bridge Manrope SemiBold" pitchFamily="34" charset="-120"/>
+                <a:latin typeface="Arial" pitchFamily="34" charset="0"/>
+                <a:ea typeface="Arial" pitchFamily="34" charset="-122"/>
+                <a:cs typeface="Arial" pitchFamily="34" charset="-120"/>
               </a:rPr>
               <a:t>FIDIC WHITE BOOK</a:t>
             </a:r>
@@ -14934,13 +14915,13 @@
               <a:buNone/>
             </a:pPr>
             <a:r>
-              <a:rPr lang="en-US" sz="850" spc="200" kern="0" dirty="0">
+              <a:rPr lang="en-US" sz="850" b="1" spc="200" kern="0" dirty="0">
                 <a:solidFill>
                   <a:srgbClr val="9B7C56"/>
                 </a:solidFill>
-                <a:latin typeface="Bridge Manrope SemiBold" pitchFamily="34" charset="0"/>
-                <a:ea typeface="Bridge Manrope SemiBold" pitchFamily="34" charset="-122"/>
-                <a:cs typeface="Bridge Manrope SemiBold" pitchFamily="34" charset="-120"/>
+                <a:latin typeface="Arial" pitchFamily="34" charset="0"/>
+                <a:ea typeface="Arial" pitchFamily="34" charset="-122"/>
+                <a:cs typeface="Arial" pitchFamily="34" charset="-120"/>
               </a:rPr>
               <a:t>2025 — н.в.</a:t>
             </a:r>
@@ -14973,13 +14954,13 @@
               <a:buNone/>
             </a:pPr>
             <a:r>
-              <a:rPr lang="en-US" sz="1400" dirty="0">
+              <a:rPr lang="en-US" sz="1400" b="1" dirty="0">
                 <a:solidFill>
                   <a:srgbClr val="1A1816"/>
                 </a:solidFill>
-                <a:latin typeface="Bridge Manrope ExtraBold" pitchFamily="34" charset="0"/>
-                <a:ea typeface="Bridge Manrope ExtraBold" pitchFamily="34" charset="-122"/>
-                <a:cs typeface="Bridge Manrope ExtraBold" pitchFamily="34" charset="-120"/>
+                <a:latin typeface="Arial" pitchFamily="34" charset="0"/>
+                <a:ea typeface="Arial" pitchFamily="34" charset="-122"/>
+                <a:cs typeface="Arial" pitchFamily="34" charset="-120"/>
               </a:rPr>
               <a:t>АО «Tashkent Invest Company»</a:t>
             </a:r>
@@ -15019,9 +15000,9 @@
                 <a:solidFill>
                   <a:srgbClr val="6E655A"/>
                 </a:solidFill>
-                <a:latin typeface="Bridge Manrope" pitchFamily="34" charset="0"/>
-                <a:ea typeface="Bridge Manrope" pitchFamily="34" charset="-122"/>
-                <a:cs typeface="Bridge Manrope" pitchFamily="34" charset="-120"/>
+                <a:latin typeface="Arial" pitchFamily="34" charset="0"/>
+                <a:ea typeface="Arial" pitchFamily="34" charset="-122"/>
+                <a:cs typeface="Arial" pitchFamily="34" charset="-120"/>
               </a:rPr>
               <a:t>Система закупок и управления контрактами для проектов EPC+F.</a:t>
             </a:r>
@@ -15100,13 +15081,13 @@
               <a:buNone/>
             </a:pPr>
             <a:r>
-              <a:rPr lang="en-US" sz="750" spc="150" kern="0" dirty="0">
+              <a:rPr lang="en-US" sz="750" b="1" spc="150" kern="0" dirty="0">
                 <a:solidFill>
                   <a:srgbClr val="F0DCBA"/>
                 </a:solidFill>
-                <a:latin typeface="Bridge Manrope SemiBold" pitchFamily="34" charset="0"/>
-                <a:ea typeface="Bridge Manrope SemiBold" pitchFamily="34" charset="-122"/>
-                <a:cs typeface="Bridge Manrope SemiBold" pitchFamily="34" charset="-120"/>
+                <a:latin typeface="Arial" pitchFamily="34" charset="0"/>
+                <a:ea typeface="Arial" pitchFamily="34" charset="-122"/>
+                <a:cs typeface="Arial" pitchFamily="34" charset="-120"/>
               </a:rPr>
               <a:t>MDB HARMONISED</a:t>
             </a:r>
@@ -15139,13 +15120,13 @@
               <a:buNone/>
             </a:pPr>
             <a:r>
-              <a:rPr lang="en-US" sz="850" spc="200" kern="0" dirty="0">
+              <a:rPr lang="en-US" sz="850" b="1" spc="200" kern="0" dirty="0">
                 <a:solidFill>
                   <a:srgbClr val="9B7C56"/>
                 </a:solidFill>
-                <a:latin typeface="Bridge Manrope SemiBold" pitchFamily="34" charset="0"/>
-                <a:ea typeface="Bridge Manrope SemiBold" pitchFamily="34" charset="-122"/>
-                <a:cs typeface="Bridge Manrope SemiBold" pitchFamily="34" charset="-120"/>
+                <a:latin typeface="Arial" pitchFamily="34" charset="0"/>
+                <a:ea typeface="Arial" pitchFamily="34" charset="-122"/>
+                <a:cs typeface="Arial" pitchFamily="34" charset="-120"/>
               </a:rPr>
               <a:t>2016 — 2022</a:t>
             </a:r>
@@ -15178,13 +15159,13 @@
               <a:buNone/>
             </a:pPr>
             <a:r>
-              <a:rPr lang="en-US" sz="1400" dirty="0">
+              <a:rPr lang="en-US" sz="1400" b="1" dirty="0">
                 <a:solidFill>
                   <a:srgbClr val="1A1816"/>
                 </a:solidFill>
-                <a:latin typeface="Bridge Manrope ExtraBold" pitchFamily="34" charset="0"/>
-                <a:ea typeface="Bridge Manrope ExtraBold" pitchFamily="34" charset="-122"/>
-                <a:cs typeface="Bridge Manrope ExtraBold" pitchFamily="34" charset="-120"/>
+                <a:latin typeface="Arial" pitchFamily="34" charset="0"/>
+                <a:ea typeface="Arial" pitchFamily="34" charset="-122"/>
+                <a:cs typeface="Arial" pitchFamily="34" charset="-120"/>
               </a:rPr>
               <a:t>Автодорога А-373, перевал Камчик</a:t>
             </a:r>
@@ -15224,9 +15205,9 @@
                 <a:solidFill>
                   <a:srgbClr val="6E655A"/>
                 </a:solidFill>
-                <a:latin typeface="Bridge Manrope" pitchFamily="34" charset="0"/>
-                <a:ea typeface="Bridge Manrope" pitchFamily="34" charset="-122"/>
-                <a:cs typeface="Bridge Manrope" pitchFamily="34" charset="-120"/>
+                <a:latin typeface="Arial" pitchFamily="34" charset="0"/>
+                <a:ea typeface="Arial" pitchFamily="34" charset="-122"/>
+                <a:cs typeface="Arial" pitchFamily="34" charset="-120"/>
               </a:rPr>
               <a:t>Транспортный коридор ЦАРЭС 2. Заказчик — АО EVRASCON.</a:t>
             </a:r>
@@ -15282,13 +15263,13 @@
               <a:buNone/>
             </a:pPr>
             <a:r>
-              <a:rPr lang="en-US" sz="950" spc="200" kern="0" dirty="0">
+              <a:rPr lang="en-US" sz="950" b="1" spc="200" kern="0" dirty="0">
                 <a:solidFill>
                   <a:srgbClr val="9B7C56"/>
                 </a:solidFill>
-                <a:latin typeface="Bridge Manrope SemiBold" pitchFamily="34" charset="0"/>
-                <a:ea typeface="Bridge Manrope SemiBold" pitchFamily="34" charset="-122"/>
-                <a:cs typeface="Bridge Manrope SemiBold" pitchFamily="34" charset="-120"/>
+                <a:latin typeface="Arial" pitchFamily="34" charset="0"/>
+                <a:ea typeface="Arial" pitchFamily="34" charset="-122"/>
+                <a:cs typeface="Arial" pitchFamily="34" charset="-120"/>
               </a:rPr>
               <a:t>ВОДОСНАБЖЕНИЕ   </a:t>
             </a:r>
@@ -15300,9 +15281,9 @@
                 <a:solidFill>
                   <a:srgbClr val="3A342D"/>
                 </a:solidFill>
-                <a:latin typeface="Bridge Manrope" pitchFamily="34" charset="0"/>
-                <a:ea typeface="Bridge Manrope" pitchFamily="34" charset="-122"/>
-                <a:cs typeface="Bridge Manrope" pitchFamily="34" charset="-120"/>
+                <a:latin typeface="Arial" pitchFamily="34" charset="0"/>
+                <a:ea typeface="Arial" pitchFamily="34" charset="-122"/>
+                <a:cs typeface="Arial" pitchFamily="34" charset="-120"/>
               </a:rPr>
               <a:t>Янгиюль и Жийдакапа — World Bank, EBRD   ·   Наманган, 60 км трубопровода — OPEC Fund   ·   Самаркандская область — АБР</a:t>
             </a:r>
@@ -16796,13 +16777,13 @@
               <a:buNone/>
             </a:pPr>
             <a:r>
-              <a:rPr lang="en-US" sz="900" spc="200" kern="0" dirty="0">
+              <a:rPr lang="en-US" sz="900" b="1" spc="200" kern="0" dirty="0">
                 <a:solidFill>
                   <a:srgbClr val="F4EFE6"/>
                 </a:solidFill>
-                <a:latin typeface="Bridge Manrope SemiBold" pitchFamily="34" charset="0"/>
-                <a:ea typeface="Bridge Manrope SemiBold" pitchFamily="34" charset="-122"/>
-                <a:cs typeface="Bridge Manrope SemiBold" pitchFamily="34" charset="-120"/>
+                <a:latin typeface="Arial" pitchFamily="34" charset="0"/>
+                <a:ea typeface="Arial" pitchFamily="34" charset="-122"/>
+                <a:cs typeface="Arial" pitchFamily="34" charset="-120"/>
               </a:rPr>
               <a:t>07</a:t>
             </a:r>
@@ -16810,13 +16791,13 @@
               <a:buNone/>
             </a:pPr>
             <a:r>
-              <a:rPr lang="en-US" sz="900" spc="200" kern="0" dirty="0">
+              <a:rPr lang="en-US" sz="900" b="1" spc="200" kern="0" dirty="0">
                 <a:solidFill>
                   <a:srgbClr val="A39C91"/>
                 </a:solidFill>
-                <a:latin typeface="Bridge Manrope SemiBold" pitchFamily="34" charset="0"/>
-                <a:ea typeface="Bridge Manrope SemiBold" pitchFamily="34" charset="-122"/>
-                <a:cs typeface="Bridge Manrope SemiBold" pitchFamily="34" charset="-120"/>
+                <a:latin typeface="Arial" pitchFamily="34" charset="0"/>
+                <a:ea typeface="Arial" pitchFamily="34" charset="-122"/>
+                <a:cs typeface="Arial" pitchFamily="34" charset="-120"/>
               </a:rPr>
               <a:t> / 10</a:t>
             </a:r>
@@ -16849,13 +16830,13 @@
               <a:buNone/>
             </a:pPr>
             <a:r>
-              <a:rPr lang="en-US" sz="800" spc="200" kern="0" dirty="0">
+              <a:rPr lang="en-US" sz="800" b="1" spc="200" kern="0" dirty="0">
                 <a:solidFill>
                   <a:srgbClr val="A39C91"/>
                 </a:solidFill>
-                <a:latin typeface="Bridge Manrope SemiBold" pitchFamily="34" charset="0"/>
-                <a:ea typeface="Bridge Manrope SemiBold" pitchFamily="34" charset="-122"/>
-                <a:cs typeface="Bridge Manrope SemiBold" pitchFamily="34" charset="-120"/>
+                <a:latin typeface="Arial" pitchFamily="34" charset="0"/>
+                <a:ea typeface="Arial" pitchFamily="34" charset="-122"/>
+                <a:cs typeface="Arial" pitchFamily="34" charset="-120"/>
               </a:rPr>
               <a:t>bridgeconsult.uz</a:t>
             </a:r>
@@ -16888,13 +16869,13 @@
               <a:buNone/>
             </a:pPr>
             <a:r>
-              <a:rPr lang="en-US" sz="800" spc="200" kern="0" dirty="0">
+              <a:rPr lang="en-US" sz="800" b="1" spc="200" kern="0" dirty="0">
                 <a:solidFill>
                   <a:srgbClr val="A39C91"/>
                 </a:solidFill>
-                <a:latin typeface="Bridge Manrope SemiBold" pitchFamily="34" charset="0"/>
-                <a:ea typeface="Bridge Manrope SemiBold" pitchFamily="34" charset="-122"/>
-                <a:cs typeface="Bridge Manrope SemiBold" pitchFamily="34" charset="-120"/>
+                <a:latin typeface="Arial" pitchFamily="34" charset="0"/>
+                <a:ea typeface="Arial" pitchFamily="34" charset="-122"/>
+                <a:cs typeface="Arial" pitchFamily="34" charset="-120"/>
               </a:rPr>
               <a:t>41.2995° N  ·  69.2401° E</a:t>
             </a:r>
@@ -16950,13 +16931,13 @@
               <a:buNone/>
             </a:pPr>
             <a:r>
-              <a:rPr lang="en-US" sz="900" spc="300" kern="0" dirty="0">
+              <a:rPr lang="en-US" sz="900" b="1" spc="300" kern="0" dirty="0">
                 <a:solidFill>
                   <a:srgbClr val="D8BD96"/>
                 </a:solidFill>
-                <a:latin typeface="Bridge Manrope SemiBold" pitchFamily="34" charset="0"/>
-                <a:ea typeface="Bridge Manrope SemiBold" pitchFamily="34" charset="-122"/>
-                <a:cs typeface="Bridge Manrope SemiBold" pitchFamily="34" charset="-120"/>
+                <a:latin typeface="Arial" pitchFamily="34" charset="0"/>
+                <a:ea typeface="Arial" pitchFamily="34" charset="-122"/>
+                <a:cs typeface="Arial" pitchFamily="34" charset="-120"/>
               </a:rPr>
               <a:t>КОМАНДА</a:t>
             </a:r>
@@ -16993,9 +16974,9 @@
                 <a:solidFill>
                   <a:srgbClr val="F4EFE6"/>
                 </a:solidFill>
-                <a:latin typeface="Bridge Playfair" pitchFamily="34" charset="0"/>
-                <a:ea typeface="Bridge Playfair" pitchFamily="34" charset="-122"/>
-                <a:cs typeface="Bridge Playfair" pitchFamily="34" charset="-120"/>
+                <a:latin typeface="Georgia" pitchFamily="34" charset="0"/>
+                <a:ea typeface="Georgia" pitchFamily="34" charset="-122"/>
+                <a:cs typeface="Georgia" pitchFamily="34" charset="-120"/>
               </a:rPr>
               <a:t>Лица</a:t>
             </a:r>
@@ -17032,9 +17013,9 @@
                 <a:solidFill>
                   <a:srgbClr val="D8BD96"/>
                 </a:solidFill>
-                <a:latin typeface="Bridge Playfair" pitchFamily="34" charset="0"/>
-                <a:ea typeface="Bridge Playfair" pitchFamily="34" charset="-122"/>
-                <a:cs typeface="Bridge Playfair" pitchFamily="34" charset="-120"/>
+                <a:latin typeface="Georgia" pitchFamily="34" charset="0"/>
+                <a:ea typeface="Georgia" pitchFamily="34" charset="-122"/>
+                <a:cs typeface="Georgia" pitchFamily="34" charset="-120"/>
               </a:rPr>
               <a:t>компании</a:t>
             </a:r>
@@ -17074,9 +17055,9 @@
                 <a:solidFill>
                   <a:srgbClr val="A39C91"/>
                 </a:solidFill>
-                <a:latin typeface="Bridge Manrope" pitchFamily="34" charset="0"/>
-                <a:ea typeface="Bridge Manrope" pitchFamily="34" charset="-122"/>
-                <a:cs typeface="Bridge Manrope" pitchFamily="34" charset="-120"/>
+                <a:latin typeface="Arial" pitchFamily="34" charset="0"/>
+                <a:ea typeface="Arial" pitchFamily="34" charset="-122"/>
+                <a:cs typeface="Arial" pitchFamily="34" charset="-120"/>
               </a:rPr>
               <a:t>Десятилетия практики в инженерном деле, юриспруденции и международном арбитраже.</a:t>
             </a:r>
@@ -17137,9 +17118,9 @@
                 <a:solidFill>
                   <a:srgbClr val="F4EFE6"/>
                 </a:solidFill>
-                <a:latin typeface="Bridge Playfair" pitchFamily="34" charset="0"/>
-                <a:ea typeface="Bridge Playfair" pitchFamily="34" charset="-122"/>
-                <a:cs typeface="Bridge Playfair" pitchFamily="34" charset="-120"/>
+                <a:latin typeface="Georgia" pitchFamily="34" charset="0"/>
+                <a:ea typeface="Georgia" pitchFamily="34" charset="-122"/>
+                <a:cs typeface="Georgia" pitchFamily="34" charset="-120"/>
               </a:rPr>
               <a:t>Лариса Белоусова</a:t>
             </a:r>
@@ -17179,9 +17160,9 @@
                 <a:solidFill>
                   <a:srgbClr val="A39C91"/>
                 </a:solidFill>
-                <a:latin typeface="Bridge Manrope" pitchFamily="34" charset="0"/>
-                <a:ea typeface="Bridge Manrope" pitchFamily="34" charset="-122"/>
-                <a:cs typeface="Bridge Manrope" pitchFamily="34" charset="-120"/>
+                <a:latin typeface="Arial" pitchFamily="34" charset="0"/>
+                <a:ea typeface="Arial" pitchFamily="34" charset="-122"/>
+                <a:cs typeface="Arial" pitchFamily="34" charset="-120"/>
               </a:rPr>
               <a:t>Основатель и директор · FCCE, FCCP, ADB Accredited</a:t>
             </a:r>
@@ -17242,9 +17223,9 @@
                 <a:solidFill>
                   <a:srgbClr val="F4EFE6"/>
                 </a:solidFill>
-                <a:latin typeface="Bridge Playfair" pitchFamily="34" charset="0"/>
-                <a:ea typeface="Bridge Playfair" pitchFamily="34" charset="-122"/>
-                <a:cs typeface="Bridge Playfair" pitchFamily="34" charset="-120"/>
+                <a:latin typeface="Georgia" pitchFamily="34" charset="0"/>
+                <a:ea typeface="Georgia" pitchFamily="34" charset="-122"/>
+                <a:cs typeface="Georgia" pitchFamily="34" charset="-120"/>
               </a:rPr>
               <a:t>Анна Убайдуллаева</a:t>
             </a:r>
@@ -17284,9 +17265,9 @@
                 <a:solidFill>
                   <a:srgbClr val="A39C91"/>
                 </a:solidFill>
-                <a:latin typeface="Bridge Manrope" pitchFamily="34" charset="0"/>
-                <a:ea typeface="Bridge Manrope" pitchFamily="34" charset="-122"/>
-                <a:cs typeface="Bridge Manrope" pitchFamily="34" charset="-120"/>
+                <a:latin typeface="Arial" pitchFamily="34" charset="0"/>
+                <a:ea typeface="Arial" pitchFamily="34" charset="-122"/>
+                <a:cs typeface="Arial" pitchFamily="34" charset="-120"/>
               </a:rPr>
               <a:t>Партнёр, юридический консультант · арбитр TIAC и VIAC</a:t>
             </a:r>
@@ -17347,9 +17328,9 @@
                 <a:solidFill>
                   <a:srgbClr val="F4EFE6"/>
                 </a:solidFill>
-                <a:latin typeface="Bridge Playfair" pitchFamily="34" charset="0"/>
-                <a:ea typeface="Bridge Playfair" pitchFamily="34" charset="-122"/>
-                <a:cs typeface="Bridge Playfair" pitchFamily="34" charset="-120"/>
+                <a:latin typeface="Georgia" pitchFamily="34" charset="0"/>
+                <a:ea typeface="Georgia" pitchFamily="34" charset="-122"/>
+                <a:cs typeface="Georgia" pitchFamily="34" charset="-120"/>
               </a:rPr>
               <a:t>Эрнест Белоусов</a:t>
             </a:r>
@@ -17389,9 +17370,9 @@
                 <a:solidFill>
                   <a:srgbClr val="A39C91"/>
                 </a:solidFill>
-                <a:latin typeface="Bridge Manrope" pitchFamily="34" charset="0"/>
-                <a:ea typeface="Bridge Manrope" pitchFamily="34" charset="-122"/>
-                <a:cs typeface="Bridge Manrope" pitchFamily="34" charset="-120"/>
+                <a:latin typeface="Arial" pitchFamily="34" charset="0"/>
+                <a:ea typeface="Arial" pitchFamily="34" charset="-122"/>
+                <a:cs typeface="Arial" pitchFamily="34" charset="-120"/>
               </a:rPr>
               <a:t>Ведущий специалист по контрактам FIDIC</a:t>
             </a:r>
@@ -17452,9 +17433,9 @@
                 <a:solidFill>
                   <a:srgbClr val="F4EFE6"/>
                 </a:solidFill>
-                <a:latin typeface="Bridge Playfair" pitchFamily="34" charset="0"/>
-                <a:ea typeface="Bridge Playfair" pitchFamily="34" charset="-122"/>
-                <a:cs typeface="Bridge Playfair" pitchFamily="34" charset="-120"/>
+                <a:latin typeface="Georgia" pitchFamily="34" charset="0"/>
+                <a:ea typeface="Georgia" pitchFamily="34" charset="-122"/>
+                <a:cs typeface="Georgia" pitchFamily="34" charset="-120"/>
               </a:rPr>
               <a:t>Люция Ахмедиева</a:t>
             </a:r>
@@ -17494,9 +17475,9 @@
                 <a:solidFill>
                   <a:srgbClr val="A39C91"/>
                 </a:solidFill>
-                <a:latin typeface="Bridge Manrope" pitchFamily="34" charset="0"/>
-                <a:ea typeface="Bridge Manrope" pitchFamily="34" charset="-122"/>
-                <a:cs typeface="Bridge Manrope" pitchFamily="34" charset="-120"/>
+                <a:latin typeface="Arial" pitchFamily="34" charset="0"/>
+                <a:ea typeface="Arial" pitchFamily="34" charset="-122"/>
+                <a:cs typeface="Arial" pitchFamily="34" charset="-120"/>
               </a:rPr>
               <a:t>Руководитель сметного отдела · 40+ лет опыта</a:t>
             </a:r>
@@ -17557,9 +17538,9 @@
                 <a:solidFill>
                   <a:srgbClr val="F4EFE6"/>
                 </a:solidFill>
-                <a:latin typeface="Bridge Playfair" pitchFamily="34" charset="0"/>
-                <a:ea typeface="Bridge Playfair" pitchFamily="34" charset="-122"/>
-                <a:cs typeface="Bridge Playfair" pitchFamily="34" charset="-120"/>
+                <a:latin typeface="Georgia" pitchFamily="34" charset="0"/>
+                <a:ea typeface="Georgia" pitchFamily="34" charset="-122"/>
+                <a:cs typeface="Georgia" pitchFamily="34" charset="-120"/>
               </a:rPr>
               <a:t>Ольга Митрофанова</a:t>
             </a:r>
@@ -17599,9 +17580,9 @@
                 <a:solidFill>
                   <a:srgbClr val="A39C91"/>
                 </a:solidFill>
-                <a:latin typeface="Bridge Manrope" pitchFamily="34" charset="0"/>
-                <a:ea typeface="Bridge Manrope" pitchFamily="34" charset="-122"/>
-                <a:cs typeface="Bridge Manrope" pitchFamily="34" charset="-120"/>
+                <a:latin typeface="Arial" pitchFamily="34" charset="0"/>
+                <a:ea typeface="Arial" pitchFamily="34" charset="-122"/>
+                <a:cs typeface="Arial" pitchFamily="34" charset="-120"/>
               </a:rPr>
               <a:t>Руководитель отдела качества · аудитор ISO 9001</a:t>
             </a:r>
@@ -19097,13 +19078,13 @@
               <a:buNone/>
             </a:pPr>
             <a:r>
-              <a:rPr lang="en-US" sz="900" spc="200" kern="0" dirty="0">
+              <a:rPr lang="en-US" sz="900" b="1" spc="200" kern="0" dirty="0">
                 <a:solidFill>
                   <a:srgbClr val="1A1816"/>
                 </a:solidFill>
-                <a:latin typeface="Bridge Manrope SemiBold" pitchFamily="34" charset="0"/>
-                <a:ea typeface="Bridge Manrope SemiBold" pitchFamily="34" charset="-122"/>
-                <a:cs typeface="Bridge Manrope SemiBold" pitchFamily="34" charset="-120"/>
+                <a:latin typeface="Arial" pitchFamily="34" charset="0"/>
+                <a:ea typeface="Arial" pitchFamily="34" charset="-122"/>
+                <a:cs typeface="Arial" pitchFamily="34" charset="-120"/>
               </a:rPr>
               <a:t>08</a:t>
             </a:r>
@@ -19111,13 +19092,13 @@
               <a:buNone/>
             </a:pPr>
             <a:r>
-              <a:rPr lang="en-US" sz="900" spc="200" kern="0" dirty="0">
+              <a:rPr lang="en-US" sz="900" b="1" spc="200" kern="0" dirty="0">
                 <a:solidFill>
                   <a:srgbClr val="6E655A"/>
                 </a:solidFill>
-                <a:latin typeface="Bridge Manrope SemiBold" pitchFamily="34" charset="0"/>
-                <a:ea typeface="Bridge Manrope SemiBold" pitchFamily="34" charset="-122"/>
-                <a:cs typeface="Bridge Manrope SemiBold" pitchFamily="34" charset="-120"/>
+                <a:latin typeface="Arial" pitchFamily="34" charset="0"/>
+                <a:ea typeface="Arial" pitchFamily="34" charset="-122"/>
+                <a:cs typeface="Arial" pitchFamily="34" charset="-120"/>
               </a:rPr>
               <a:t> / 10</a:t>
             </a:r>
@@ -19150,13 +19131,13 @@
               <a:buNone/>
             </a:pPr>
             <a:r>
-              <a:rPr lang="en-US" sz="800" spc="200" kern="0" dirty="0">
+              <a:rPr lang="en-US" sz="800" b="1" spc="200" kern="0" dirty="0">
                 <a:solidFill>
                   <a:srgbClr val="6E655A"/>
                 </a:solidFill>
-                <a:latin typeface="Bridge Manrope SemiBold" pitchFamily="34" charset="0"/>
-                <a:ea typeface="Bridge Manrope SemiBold" pitchFamily="34" charset="-122"/>
-                <a:cs typeface="Bridge Manrope SemiBold" pitchFamily="34" charset="-120"/>
+                <a:latin typeface="Arial" pitchFamily="34" charset="0"/>
+                <a:ea typeface="Arial" pitchFamily="34" charset="-122"/>
+                <a:cs typeface="Arial" pitchFamily="34" charset="-120"/>
               </a:rPr>
               <a:t>bridgeconsult.uz</a:t>
             </a:r>
@@ -19189,13 +19170,13 @@
               <a:buNone/>
             </a:pPr>
             <a:r>
-              <a:rPr lang="en-US" sz="800" spc="200" kern="0" dirty="0">
+              <a:rPr lang="en-US" sz="800" b="1" spc="200" kern="0" dirty="0">
                 <a:solidFill>
                   <a:srgbClr val="6E655A"/>
                 </a:solidFill>
-                <a:latin typeface="Bridge Manrope SemiBold" pitchFamily="34" charset="0"/>
-                <a:ea typeface="Bridge Manrope SemiBold" pitchFamily="34" charset="-122"/>
-                <a:cs typeface="Bridge Manrope SemiBold" pitchFamily="34" charset="-120"/>
+                <a:latin typeface="Arial" pitchFamily="34" charset="0"/>
+                <a:ea typeface="Arial" pitchFamily="34" charset="-122"/>
+                <a:cs typeface="Arial" pitchFamily="34" charset="-120"/>
               </a:rPr>
               <a:t>41.2995° N  ·  69.2401° E</a:t>
             </a:r>
@@ -19251,13 +19232,13 @@
               <a:buNone/>
             </a:pPr>
             <a:r>
-              <a:rPr lang="en-US" sz="900" spc="300" kern="0" dirty="0">
+              <a:rPr lang="en-US" sz="900" b="1" spc="300" kern="0" dirty="0">
                 <a:solidFill>
                   <a:srgbClr val="9B7C56"/>
                 </a:solidFill>
-                <a:latin typeface="Bridge Manrope SemiBold" pitchFamily="34" charset="0"/>
-                <a:ea typeface="Bridge Manrope SemiBold" pitchFamily="34" charset="-122"/>
-                <a:cs typeface="Bridge Manrope SemiBold" pitchFamily="34" charset="-120"/>
+                <a:latin typeface="Arial" pitchFamily="34" charset="0"/>
+                <a:ea typeface="Arial" pitchFamily="34" charset="-122"/>
+                <a:cs typeface="Arial" pitchFamily="34" charset="-120"/>
               </a:rPr>
               <a:t>ДОВЕРИЕ</a:t>
             </a:r>
@@ -19294,9 +19275,9 @@
                 <a:solidFill>
                   <a:srgbClr val="1A1816"/>
                 </a:solidFill>
-                <a:latin typeface="Bridge Playfair" pitchFamily="34" charset="0"/>
-                <a:ea typeface="Bridge Playfair" pitchFamily="34" charset="-122"/>
-                <a:cs typeface="Bridge Playfair" pitchFamily="34" charset="-120"/>
+                <a:latin typeface="Georgia" pitchFamily="34" charset="0"/>
+                <a:ea typeface="Georgia" pitchFamily="34" charset="-122"/>
+                <a:cs typeface="Georgia" pitchFamily="34" charset="-120"/>
               </a:rPr>
               <a:t>Международное</a:t>
             </a:r>
@@ -19333,9 +19314,9 @@
                 <a:solidFill>
                   <a:srgbClr val="9B7C56"/>
                 </a:solidFill>
-                <a:latin typeface="Bridge Playfair" pitchFamily="34" charset="0"/>
-                <a:ea typeface="Bridge Playfair" pitchFamily="34" charset="-122"/>
-                <a:cs typeface="Bridge Playfair" pitchFamily="34" charset="-120"/>
+                <a:latin typeface="Georgia" pitchFamily="34" charset="0"/>
+                <a:ea typeface="Georgia" pitchFamily="34" charset="-122"/>
+                <a:cs typeface="Georgia" pitchFamily="34" charset="-120"/>
               </a:rPr>
               <a:t>признание</a:t>
             </a:r>
@@ -19375,9 +19356,9 @@
                 <a:solidFill>
                   <a:srgbClr val="6E655A"/>
                 </a:solidFill>
-                <a:latin typeface="Bridge Manrope" pitchFamily="34" charset="0"/>
-                <a:ea typeface="Bridge Manrope" pitchFamily="34" charset="-122"/>
-                <a:cs typeface="Bridge Manrope" pitchFamily="34" charset="-120"/>
+                <a:latin typeface="Arial" pitchFamily="34" charset="0"/>
+                <a:ea typeface="Arial" pitchFamily="34" charset="-122"/>
+                <a:cs typeface="Arial" pitchFamily="34" charset="-120"/>
               </a:rPr>
               <a:t>Руководитель компании — аккредитованный АБР специалист по управлению контрактами и предотвращению споров.</a:t>
             </a:r>
@@ -19437,9 +19418,9 @@
                 <a:solidFill>
                   <a:srgbClr val="9B7C56"/>
                 </a:solidFill>
-                <a:latin typeface="Bridge Playfair" pitchFamily="34" charset="0"/>
-                <a:ea typeface="Bridge Playfair" pitchFamily="34" charset="-122"/>
-                <a:cs typeface="Bridge Playfair" pitchFamily="34" charset="-120"/>
+                <a:latin typeface="Georgia" pitchFamily="34" charset="0"/>
+                <a:ea typeface="Georgia" pitchFamily="34" charset="-122"/>
+                <a:cs typeface="Georgia" pitchFamily="34" charset="-120"/>
               </a:rPr>
               <a:t>FCCE · FCCP</a:t>
             </a:r>
@@ -19476,9 +19457,9 @@
                 <a:solidFill>
                   <a:srgbClr val="1A1816"/>
                 </a:solidFill>
-                <a:latin typeface="Bridge Manrope" pitchFamily="34" charset="0"/>
-                <a:ea typeface="Bridge Manrope" pitchFamily="34" charset="-122"/>
-                <a:cs typeface="Bridge Manrope" pitchFamily="34" charset="-120"/>
+                <a:latin typeface="Arial" pitchFamily="34" charset="0"/>
+                <a:ea typeface="Arial" pitchFamily="34" charset="-122"/>
+                <a:cs typeface="Arial" pitchFamily="34" charset="-120"/>
               </a:rPr>
               <a:t>Сертифицированный консультант FIDIC</a:t>
             </a:r>
@@ -19538,9 +19519,9 @@
                 <a:solidFill>
                   <a:srgbClr val="9B7C56"/>
                 </a:solidFill>
-                <a:latin typeface="Bridge Playfair" pitchFamily="34" charset="0"/>
-                <a:ea typeface="Bridge Playfair" pitchFamily="34" charset="-122"/>
-                <a:cs typeface="Bridge Playfair" pitchFamily="34" charset="-120"/>
+                <a:latin typeface="Georgia" pitchFamily="34" charset="0"/>
+                <a:ea typeface="Georgia" pitchFamily="34" charset="-122"/>
+                <a:cs typeface="Georgia" pitchFamily="34" charset="-120"/>
               </a:rPr>
               <a:t>ADB</a:t>
             </a:r>
@@ -19577,9 +19558,9 @@
                 <a:solidFill>
                   <a:srgbClr val="1A1816"/>
                 </a:solidFill>
-                <a:latin typeface="Bridge Manrope" pitchFamily="34" charset="0"/>
-                <a:ea typeface="Bridge Manrope" pitchFamily="34" charset="-122"/>
-                <a:cs typeface="Bridge Manrope" pitchFamily="34" charset="-120"/>
+                <a:latin typeface="Arial" pitchFamily="34" charset="0"/>
+                <a:ea typeface="Arial" pitchFamily="34" charset="-122"/>
+                <a:cs typeface="Arial" pitchFamily="34" charset="-120"/>
               </a:rPr>
               <a:t>Аккредитация АБР: контракты и споры</a:t>
             </a:r>
@@ -19639,9 +19620,9 @@
                 <a:solidFill>
                   <a:srgbClr val="9B7C56"/>
                 </a:solidFill>
-                <a:latin typeface="Bridge Playfair" pitchFamily="34" charset="0"/>
-                <a:ea typeface="Bridge Playfair" pitchFamily="34" charset="-122"/>
-                <a:cs typeface="Bridge Playfair" pitchFamily="34" charset="-120"/>
+                <a:latin typeface="Georgia" pitchFamily="34" charset="0"/>
+                <a:ea typeface="Georgia" pitchFamily="34" charset="-122"/>
+                <a:cs typeface="Georgia" pitchFamily="34" charset="-120"/>
               </a:rPr>
               <a:t>MCIArb</a:t>
             </a:r>
@@ -19678,9 +19659,9 @@
                 <a:solidFill>
                   <a:srgbClr val="1A1816"/>
                 </a:solidFill>
-                <a:latin typeface="Bridge Manrope" pitchFamily="34" charset="0"/>
-                <a:ea typeface="Bridge Manrope" pitchFamily="34" charset="-122"/>
-                <a:cs typeface="Bridge Manrope" pitchFamily="34" charset="-120"/>
+                <a:latin typeface="Arial" pitchFamily="34" charset="0"/>
+                <a:ea typeface="Arial" pitchFamily="34" charset="-122"/>
+                <a:cs typeface="Arial" pitchFamily="34" charset="-120"/>
               </a:rPr>
               <a:t>Член Королевского института арбитров</a:t>
             </a:r>
@@ -19740,9 +19721,9 @@
                 <a:solidFill>
                   <a:srgbClr val="9B7C56"/>
                 </a:solidFill>
-                <a:latin typeface="Bridge Playfair" pitchFamily="34" charset="0"/>
-                <a:ea typeface="Bridge Playfair" pitchFamily="34" charset="-122"/>
-                <a:cs typeface="Bridge Playfair" pitchFamily="34" charset="-120"/>
+                <a:latin typeface="Georgia" pitchFamily="34" charset="0"/>
+                <a:ea typeface="Georgia" pitchFamily="34" charset="-122"/>
+                <a:cs typeface="Georgia" pitchFamily="34" charset="-120"/>
               </a:rPr>
               <a:t>DRBF</a:t>
             </a:r>
@@ -19779,9 +19760,9 @@
                 <a:solidFill>
                   <a:srgbClr val="1A1816"/>
                 </a:solidFill>
-                <a:latin typeface="Bridge Manrope" pitchFamily="34" charset="0"/>
-                <a:ea typeface="Bridge Manrope" pitchFamily="34" charset="-122"/>
-                <a:cs typeface="Bridge Manrope" pitchFamily="34" charset="-120"/>
+                <a:latin typeface="Arial" pitchFamily="34" charset="0"/>
+                <a:ea typeface="Arial" pitchFamily="34" charset="-122"/>
+                <a:cs typeface="Arial" pitchFamily="34" charset="-120"/>
               </a:rPr>
               <a:t>Практик Совета по разрешению споров</a:t>
             </a:r>
@@ -19841,9 +19822,9 @@
                 <a:solidFill>
                   <a:srgbClr val="9B7C56"/>
                 </a:solidFill>
-                <a:latin typeface="Bridge Playfair" pitchFamily="34" charset="0"/>
-                <a:ea typeface="Bridge Playfair" pitchFamily="34" charset="-122"/>
-                <a:cs typeface="Bridge Playfair" pitchFamily="34" charset="-120"/>
+                <a:latin typeface="Georgia" pitchFamily="34" charset="0"/>
+                <a:ea typeface="Georgia" pitchFamily="34" charset="-122"/>
+                <a:cs typeface="Georgia" pitchFamily="34" charset="-120"/>
               </a:rPr>
               <a:t>ICAC</a:t>
             </a:r>
@@ -19880,9 +19861,9 @@
                 <a:solidFill>
                   <a:srgbClr val="1A1816"/>
                 </a:solidFill>
-                <a:latin typeface="Bridge Manrope" pitchFamily="34" charset="0"/>
-                <a:ea typeface="Bridge Manrope" pitchFamily="34" charset="-122"/>
-                <a:cs typeface="Bridge Manrope" pitchFamily="34" charset="-120"/>
+                <a:latin typeface="Arial" pitchFamily="34" charset="0"/>
+                <a:ea typeface="Arial" pitchFamily="34" charset="-122"/>
+                <a:cs typeface="Arial" pitchFamily="34" charset="-120"/>
               </a:rPr>
               <a:t>Арбитр МКАС при ТПП Республики Узбекистан</a:t>
             </a:r>
@@ -19915,13 +19896,13 @@
               <a:buNone/>
             </a:pPr>
             <a:r>
-              <a:rPr lang="en-US" sz="850" spc="250" kern="0" dirty="0">
+              <a:rPr lang="en-US" sz="850" b="1" spc="250" kern="0" dirty="0">
                 <a:solidFill>
                   <a:srgbClr val="9B7C56"/>
                 </a:solidFill>
-                <a:latin typeface="Bridge Manrope SemiBold" pitchFamily="34" charset="0"/>
-                <a:ea typeface="Bridge Manrope SemiBold" pitchFamily="34" charset="-122"/>
-                <a:cs typeface="Bridge Manrope SemiBold" pitchFamily="34" charset="-120"/>
+                <a:latin typeface="Arial" pitchFamily="34" charset="0"/>
+                <a:ea typeface="Arial" pitchFamily="34" charset="-122"/>
+                <a:cs typeface="Arial" pitchFamily="34" charset="-120"/>
               </a:rPr>
               <a:t>МФИ, АРБИТРАЖНЫЕ И ПРОФЕССИОНАЛЬНЫЕ СООБЩЕСТВА</a:t>
             </a:r>
@@ -20366,9 +20347,9 @@
                 <a:solidFill>
                   <a:srgbClr val="D8BD96"/>
                 </a:solidFill>
-                <a:latin typeface="Bridge Playfair" pitchFamily="34" charset="0"/>
-                <a:ea typeface="Bridge Playfair" pitchFamily="34" charset="-122"/>
-                <a:cs typeface="Bridge Playfair" pitchFamily="34" charset="-120"/>
+                <a:latin typeface="Georgia" pitchFamily="34" charset="0"/>
+                <a:ea typeface="Georgia" pitchFamily="34" charset="-122"/>
+                <a:cs typeface="Georgia" pitchFamily="34" charset="-120"/>
               </a:rPr>
               <a:t>“</a:t>
             </a:r>
@@ -20408,9 +20389,9 @@
                 <a:solidFill>
                   <a:srgbClr val="1A1816"/>
                 </a:solidFill>
-                <a:latin typeface="Bridge Playfair" pitchFamily="34" charset="0"/>
-                <a:ea typeface="Bridge Playfair" pitchFamily="34" charset="-122"/>
-                <a:cs typeface="Bridge Playfair" pitchFamily="34" charset="-120"/>
+                <a:latin typeface="Georgia" pitchFamily="34" charset="0"/>
+                <a:ea typeface="Georgia" pitchFamily="34" charset="-122"/>
+                <a:cs typeface="Georgia" pitchFamily="34" charset="-120"/>
               </a:rPr>
               <a:t>Сильный контракт создаёт не барьеры, а ясность, доверие и общий путь к результату.</a:t>
             </a:r>
@@ -20443,13 +20424,13 @@
               <a:buNone/>
             </a:pPr>
             <a:r>
-              <a:rPr lang="en-US" sz="850" spc="250" kern="0" dirty="0">
+              <a:rPr lang="en-US" sz="850" b="1" spc="250" kern="0" dirty="0">
                 <a:solidFill>
                   <a:srgbClr val="6E655A"/>
                 </a:solidFill>
-                <a:latin typeface="Bridge Manrope SemiBold" pitchFamily="34" charset="0"/>
-                <a:ea typeface="Bridge Manrope SemiBold" pitchFamily="34" charset="-122"/>
-                <a:cs typeface="Bridge Manrope SemiBold" pitchFamily="34" charset="-120"/>
+                <a:latin typeface="Arial" pitchFamily="34" charset="0"/>
+                <a:ea typeface="Arial" pitchFamily="34" charset="-122"/>
+                <a:cs typeface="Arial" pitchFamily="34" charset="-120"/>
               </a:rPr>
               <a:t>ЛАРИСА БЕЛОУСОВА, ОСНОВАТЕЛЬ</a:t>
             </a:r>
@@ -22275,13 +22256,13 @@
               <a:buNone/>
             </a:pPr>
             <a:r>
-              <a:rPr lang="en-US" sz="900" spc="200" kern="0" dirty="0">
+              <a:rPr lang="en-US" sz="900" b="1" spc="200" kern="0" dirty="0">
                 <a:solidFill>
                   <a:srgbClr val="F4EFE6"/>
                 </a:solidFill>
-                <a:latin typeface="Bridge Manrope SemiBold" pitchFamily="34" charset="0"/>
-                <a:ea typeface="Bridge Manrope SemiBold" pitchFamily="34" charset="-122"/>
-                <a:cs typeface="Bridge Manrope SemiBold" pitchFamily="34" charset="-120"/>
+                <a:latin typeface="Arial" pitchFamily="34" charset="0"/>
+                <a:ea typeface="Arial" pitchFamily="34" charset="-122"/>
+                <a:cs typeface="Arial" pitchFamily="34" charset="-120"/>
               </a:rPr>
               <a:t>09</a:t>
             </a:r>
@@ -22289,13 +22270,13 @@
               <a:buNone/>
             </a:pPr>
             <a:r>
-              <a:rPr lang="en-US" sz="900" spc="200" kern="0" dirty="0">
+              <a:rPr lang="en-US" sz="900" b="1" spc="200" kern="0" dirty="0">
                 <a:solidFill>
                   <a:srgbClr val="A39C91"/>
                 </a:solidFill>
-                <a:latin typeface="Bridge Manrope SemiBold" pitchFamily="34" charset="0"/>
-                <a:ea typeface="Bridge Manrope SemiBold" pitchFamily="34" charset="-122"/>
-                <a:cs typeface="Bridge Manrope SemiBold" pitchFamily="34" charset="-120"/>
+                <a:latin typeface="Arial" pitchFamily="34" charset="0"/>
+                <a:ea typeface="Arial" pitchFamily="34" charset="-122"/>
+                <a:cs typeface="Arial" pitchFamily="34" charset="-120"/>
               </a:rPr>
               <a:t> / 10</a:t>
             </a:r>
@@ -22328,13 +22309,13 @@
               <a:buNone/>
             </a:pPr>
             <a:r>
-              <a:rPr lang="en-US" sz="800" spc="200" kern="0" dirty="0">
+              <a:rPr lang="en-US" sz="800" b="1" spc="200" kern="0" dirty="0">
                 <a:solidFill>
                   <a:srgbClr val="A39C91"/>
                 </a:solidFill>
-                <a:latin typeface="Bridge Manrope SemiBold" pitchFamily="34" charset="0"/>
-                <a:ea typeface="Bridge Manrope SemiBold" pitchFamily="34" charset="-122"/>
-                <a:cs typeface="Bridge Manrope SemiBold" pitchFamily="34" charset="-120"/>
+                <a:latin typeface="Arial" pitchFamily="34" charset="0"/>
+                <a:ea typeface="Arial" pitchFamily="34" charset="-122"/>
+                <a:cs typeface="Arial" pitchFamily="34" charset="-120"/>
               </a:rPr>
               <a:t>bridgeconsult.uz</a:t>
             </a:r>
@@ -22367,13 +22348,13 @@
               <a:buNone/>
             </a:pPr>
             <a:r>
-              <a:rPr lang="en-US" sz="800" spc="200" kern="0" dirty="0">
+              <a:rPr lang="en-US" sz="800" b="1" spc="200" kern="0" dirty="0">
                 <a:solidFill>
                   <a:srgbClr val="A39C91"/>
                 </a:solidFill>
-                <a:latin typeface="Bridge Manrope SemiBold" pitchFamily="34" charset="0"/>
-                <a:ea typeface="Bridge Manrope SemiBold" pitchFamily="34" charset="-122"/>
-                <a:cs typeface="Bridge Manrope SemiBold" pitchFamily="34" charset="-120"/>
+                <a:latin typeface="Arial" pitchFamily="34" charset="0"/>
+                <a:ea typeface="Arial" pitchFamily="34" charset="-122"/>
+                <a:cs typeface="Arial" pitchFamily="34" charset="-120"/>
               </a:rPr>
               <a:t>41.2995° N  ·  69.2401° E</a:t>
             </a:r>
@@ -22429,13 +22410,13 @@
               <a:buNone/>
             </a:pPr>
             <a:r>
-              <a:rPr lang="en-US" sz="900" spc="300" kern="0" dirty="0">
+              <a:rPr lang="en-US" sz="900" b="1" spc="300" kern="0" dirty="0">
                 <a:solidFill>
                   <a:srgbClr val="D8BD96"/>
                 </a:solidFill>
-                <a:latin typeface="Bridge Manrope SemiBold" pitchFamily="34" charset="0"/>
-                <a:ea typeface="Bridge Manrope SemiBold" pitchFamily="34" charset="-122"/>
-                <a:cs typeface="Bridge Manrope SemiBold" pitchFamily="34" charset="-120"/>
+                <a:latin typeface="Arial" pitchFamily="34" charset="0"/>
+                <a:ea typeface="Arial" pitchFamily="34" charset="-122"/>
+                <a:cs typeface="Arial" pitchFamily="34" charset="-120"/>
               </a:rPr>
               <a:t>ПОДХОД</a:t>
             </a:r>
@@ -22472,9 +22453,9 @@
                 <a:solidFill>
                   <a:srgbClr val="F4EFE6"/>
                 </a:solidFill>
-                <a:latin typeface="Bridge Playfair" pitchFamily="34" charset="0"/>
-                <a:ea typeface="Bridge Playfair" pitchFamily="34" charset="-122"/>
-                <a:cs typeface="Bridge Playfair" pitchFamily="34" charset="-120"/>
+                <a:latin typeface="Georgia" pitchFamily="34" charset="0"/>
+                <a:ea typeface="Georgia" pitchFamily="34" charset="-122"/>
+                <a:cs typeface="Georgia" pitchFamily="34" charset="-120"/>
               </a:rPr>
               <a:t>Почему выбирают</a:t>
             </a:r>
@@ -22511,9 +22492,9 @@
                 <a:solidFill>
                   <a:srgbClr val="D8BD96"/>
                 </a:solidFill>
-                <a:latin typeface="Bridge Playfair" pitchFamily="34" charset="0"/>
-                <a:ea typeface="Bridge Playfair" pitchFamily="34" charset="-122"/>
-                <a:cs typeface="Bridge Playfair" pitchFamily="34" charset="-120"/>
+                <a:latin typeface="Georgia" pitchFamily="34" charset="0"/>
+                <a:ea typeface="Georgia" pitchFamily="34" charset="-122"/>
+                <a:cs typeface="Georgia" pitchFamily="34" charset="-120"/>
               </a:rPr>
               <a:t>Bridge Consult</a:t>
             </a:r>
@@ -22573,9 +22554,9 @@
                 <a:solidFill>
                   <a:srgbClr val="D8BD96"/>
                 </a:solidFill>
-                <a:latin typeface="Bridge Playfair" pitchFamily="34" charset="0"/>
-                <a:ea typeface="Bridge Playfair" pitchFamily="34" charset="-122"/>
-                <a:cs typeface="Bridge Playfair" pitchFamily="34" charset="-120"/>
+                <a:latin typeface="Georgia" pitchFamily="34" charset="0"/>
+                <a:ea typeface="Georgia" pitchFamily="34" charset="-122"/>
+                <a:cs typeface="Georgia" pitchFamily="34" charset="-120"/>
               </a:rPr>
               <a:t>01</a:t>
             </a:r>
@@ -22608,13 +22589,13 @@
               <a:buNone/>
             </a:pPr>
             <a:r>
-              <a:rPr lang="en-US" sz="1700" dirty="0">
+              <a:rPr lang="en-US" sz="1700" b="1" dirty="0">
                 <a:solidFill>
                   <a:srgbClr val="F4EFE6"/>
                 </a:solidFill>
-                <a:latin typeface="Bridge Manrope SemiBold" pitchFamily="34" charset="0"/>
-                <a:ea typeface="Bridge Manrope SemiBold" pitchFamily="34" charset="-122"/>
-                <a:cs typeface="Bridge Manrope SemiBold" pitchFamily="34" charset="-120"/>
+                <a:latin typeface="Arial" pitchFamily="34" charset="0"/>
+                <a:ea typeface="Arial" pitchFamily="34" charset="-122"/>
+                <a:cs typeface="Arial" pitchFamily="34" charset="-120"/>
               </a:rPr>
               <a:t>Международный стандарт</a:t>
             </a:r>
@@ -22654,9 +22635,9 @@
                 <a:solidFill>
                   <a:srgbClr val="A39C91"/>
                 </a:solidFill>
-                <a:latin typeface="Bridge Manrope" pitchFamily="34" charset="0"/>
-                <a:ea typeface="Bridge Manrope" pitchFamily="34" charset="-122"/>
-                <a:cs typeface="Bridge Manrope" pitchFamily="34" charset="-120"/>
+                <a:latin typeface="Arial" pitchFamily="34" charset="0"/>
+                <a:ea typeface="Arial" pitchFamily="34" charset="-122"/>
+                <a:cs typeface="Arial" pitchFamily="34" charset="-120"/>
               </a:rPr>
               <a:t>Глубокое понимание проформ FIDIC, EPC-контрактов и требований международных финансовых институтов.</a:t>
             </a:r>
@@ -22716,9 +22697,9 @@
                 <a:solidFill>
                   <a:srgbClr val="D8BD96"/>
                 </a:solidFill>
-                <a:latin typeface="Bridge Playfair" pitchFamily="34" charset="0"/>
-                <a:ea typeface="Bridge Playfair" pitchFamily="34" charset="-122"/>
-                <a:cs typeface="Bridge Playfair" pitchFamily="34" charset="-120"/>
+                <a:latin typeface="Georgia" pitchFamily="34" charset="0"/>
+                <a:ea typeface="Georgia" pitchFamily="34" charset="-122"/>
+                <a:cs typeface="Georgia" pitchFamily="34" charset="-120"/>
               </a:rPr>
               <a:t>02</a:t>
             </a:r>
@@ -22751,13 +22732,13 @@
               <a:buNone/>
             </a:pPr>
             <a:r>
-              <a:rPr lang="en-US" sz="1700" dirty="0">
+              <a:rPr lang="en-US" sz="1700" b="1" dirty="0">
                 <a:solidFill>
                   <a:srgbClr val="F4EFE6"/>
                 </a:solidFill>
-                <a:latin typeface="Bridge Manrope SemiBold" pitchFamily="34" charset="0"/>
-                <a:ea typeface="Bridge Manrope SemiBold" pitchFamily="34" charset="-122"/>
-                <a:cs typeface="Bridge Manrope SemiBold" pitchFamily="34" charset="-120"/>
+                <a:latin typeface="Arial" pitchFamily="34" charset="0"/>
+                <a:ea typeface="Arial" pitchFamily="34" charset="-122"/>
+                <a:cs typeface="Arial" pitchFamily="34" charset="-120"/>
               </a:rPr>
               <a:t>Локальная адаптация</a:t>
             </a:r>
@@ -22797,9 +22778,9 @@
                 <a:solidFill>
                   <a:srgbClr val="A39C91"/>
                 </a:solidFill>
-                <a:latin typeface="Bridge Manrope" pitchFamily="34" charset="0"/>
-                <a:ea typeface="Bridge Manrope" pitchFamily="34" charset="-122"/>
-                <a:cs typeface="Bridge Manrope" pitchFamily="34" charset="-120"/>
+                <a:latin typeface="Arial" pitchFamily="34" charset="0"/>
+                <a:ea typeface="Arial" pitchFamily="34" charset="-122"/>
+                <a:cs typeface="Arial" pitchFamily="34" charset="-120"/>
               </a:rPr>
               <a:t>Интеграция международных контрактов в правовое поле Республики Узбекистан без потери их юридической силы.</a:t>
             </a:r>
@@ -22859,9 +22840,9 @@
                 <a:solidFill>
                   <a:srgbClr val="D8BD96"/>
                 </a:solidFill>
-                <a:latin typeface="Bridge Playfair" pitchFamily="34" charset="0"/>
-                <a:ea typeface="Bridge Playfair" pitchFamily="34" charset="-122"/>
-                <a:cs typeface="Bridge Playfair" pitchFamily="34" charset="-120"/>
+                <a:latin typeface="Georgia" pitchFamily="34" charset="0"/>
+                <a:ea typeface="Georgia" pitchFamily="34" charset="-122"/>
+                <a:cs typeface="Georgia" pitchFamily="34" charset="-120"/>
               </a:rPr>
               <a:t>03</a:t>
             </a:r>
@@ -22894,13 +22875,13 @@
               <a:buNone/>
             </a:pPr>
             <a:r>
-              <a:rPr lang="en-US" sz="1700" dirty="0">
+              <a:rPr lang="en-US" sz="1700" b="1" dirty="0">
                 <a:solidFill>
                   <a:srgbClr val="F4EFE6"/>
                 </a:solidFill>
-                <a:latin typeface="Bridge Manrope SemiBold" pitchFamily="34" charset="0"/>
-                <a:ea typeface="Bridge Manrope SemiBold" pitchFamily="34" charset="-122"/>
-                <a:cs typeface="Bridge Manrope SemiBold" pitchFamily="34" charset="-120"/>
+                <a:latin typeface="Arial" pitchFamily="34" charset="0"/>
+                <a:ea typeface="Arial" pitchFamily="34" charset="-122"/>
+                <a:cs typeface="Arial" pitchFamily="34" charset="-120"/>
               </a:rPr>
               <a:t>Комплексная защита</a:t>
             </a:r>
@@ -22940,9 +22921,9 @@
                 <a:solidFill>
                   <a:srgbClr val="A39C91"/>
                 </a:solidFill>
-                <a:latin typeface="Bridge Manrope" pitchFamily="34" charset="0"/>
-                <a:ea typeface="Bridge Manrope" pitchFamily="34" charset="-122"/>
-                <a:cs typeface="Bridge Manrope" pitchFamily="34" charset="-120"/>
+                <a:latin typeface="Arial" pitchFamily="34" charset="0"/>
+                <a:ea typeface="Arial" pitchFamily="34" charset="-122"/>
+                <a:cs typeface="Arial" pitchFamily="34" charset="-120"/>
               </a:rPr>
               <a:t>Интересы клиента на всех уровнях: от сметного аудита и претензий до представительства в арбитраже.</a:t>
             </a:r>
